--- a/assets/figures-editable/c1-c2/c1-e14.pptx
+++ b/assets/figures-editable/c1-c2/c1-e14.pptx
@@ -7,7 +7,7 @@
   <p:sldIdLst>
     <p:sldId id="256" r:id="rId7"/>
   </p:sldIdLst>
-  <p:sldSz cx="11948160" cy="7924799" type="screen4x3"/>
+  <p:sldSz cx="12191695" cy="6858000" type="screen4x3"/>
   <p:notesSz cx="6858000" cy="9144000"/>
   <p:defaultTextStyle>
     <a:defPPr>
@@ -3098,14 +3098,14 @@
       <p:grpSpPr/>
       <p:sp>
         <p:nvSpPr>
-          <p:cNvPr id="2" name="text1" descr="sci-ppt:C1-E14-001"/>
+          <p:cNvPr id="2" name="C1-E14 text 0" descr="sci-ppt:o000"/>
           <p:cNvSpPr txBox="1"/>
           <p:nvPr/>
         </p:nvSpPr>
         <p:spPr>
           <a:xfrm>
-            <a:off x="316992" y="268224"/>
-            <a:ext cx="11277600" cy="359054"/>
+            <a:off x="274320" y="118872"/>
+            <a:ext cx="11612880" cy="340105"/>
           </a:xfrm>
           <a:prstGeom prst="rect">
             <a:avLst/>
@@ -3114,7 +3114,7 @@
           <a:effectLst/>
         </p:spPr>
         <p:txBody>
-          <a:bodyPr wrap="none" lIns="27432" rIns="27432" tIns="18288" bIns="18288" anchor="ctr">
+          <a:bodyPr wrap="none" lIns="18288" rIns="18288" tIns="18288" bIns="18288" anchor="t">
             <a:spAutoFit/>
           </a:bodyPr>
           <a:lstStyle/>
@@ -3125,83 +3125,115 @@
               </a:spcAft>
             </a:pPr>
             <a:r>
-              <a:rPr sz="1823" b="0" i="0">
+              <a:rPr sz="1900" b="1" i="0">
                 <a:solidFill>
                   <a:srgbClr val="8EDBD4"/>
                 </a:solidFill>
                 <a:latin typeface="Arial"/>
               </a:rPr>
-              <a:t>C1-E14 | Physical-variable diagram</a:t>
-            </a:r>
-          </a:p>
-        </p:txBody>
-      </p:sp>
-      <p:sp>
-        <p:nvSpPr>
-          <p:cNvPr id="3" name="ellipse2" descr="sci-ppt:C1-E14-002"/>
-          <p:cNvSpPr/>
-          <p:nvPr/>
-        </p:nvSpPr>
-        <p:spPr>
-          <a:xfrm>
-            <a:off x="2072640" y="1402080"/>
-            <a:ext cx="2438400" cy="2438400"/>
-          </a:xfrm>
-          <a:prstGeom prst="ellipse">
-            <a:avLst/>
-          </a:prstGeom>
-          <a:solidFill>
-            <a:srgbClr val="213E4B"/>
-          </a:solidFill>
-          <a:ln w="21590">
+              <a:t>C1-E14 · Exact chain rule and integrating factor</a:t>
+            </a:r>
+          </a:p>
+        </p:txBody>
+      </p:sp>
+      <p:cxnSp>
+        <p:nvCxnSpPr>
+          <p:cNvPr id="3" name="C1-E14 line 1" descr="sci-ppt:o001"/>
+          <p:cNvCxnSpPr/>
+          <p:nvPr/>
+        </p:nvCxnSpPr>
+        <p:spPr>
+          <a:xfrm>
+            <a:off x="7132320" y="3063239"/>
+            <a:ext cx="4572000" cy="0"/>
+          </a:xfrm>
+          <a:prstGeom prst="line">
+            <a:avLst/>
+          </a:prstGeom>
+          <a:ln w="19050">
             <a:solidFill>
               <a:srgbClr val="B4C7D2"/>
             </a:solidFill>
           </a:ln>
           <a:effectLst/>
         </p:spPr>
-        <p:txBody>
-          <a:bodyPr rtlCol="0" anchor="ctr"/>
-          <a:lstStyle/>
-          <a:p>
-            <a:pPr algn="ctr"/>
-          </a:p>
-        </p:txBody>
-      </p:sp>
+      </p:cxnSp>
       <p:cxnSp>
         <p:nvCxnSpPr>
-          <p:cNvPr id="4" name="arrow3" descr="sci-ppt:C1-E14-003"/>
+          <p:cNvPr id="4" name="C1-E14 line 2" descr="sci-ppt:o002"/>
           <p:cNvCxnSpPr/>
           <p:nvPr/>
         </p:nvCxnSpPr>
         <p:spPr>
           <a:xfrm>
-            <a:off x="3291840" y="2621280"/>
-            <a:ext cx="1219200" cy="0"/>
+            <a:off x="7132320" y="1325880"/>
+            <a:ext cx="0" cy="1737359"/>
           </a:xfrm>
           <a:prstGeom prst="line">
             <a:avLst/>
           </a:prstGeom>
-          <a:ln w="25400">
+          <a:ln w="19050">
             <a:solidFill>
-              <a:srgbClr val="8EDBD4"/>
+              <a:srgbClr val="B4C7D2"/>
             </a:solidFill>
-            <a:headEnd type="none" w="med" len="med"/>
-            <a:tailEnd type="triangle" w="med" len="med"/>
           </a:ln>
           <a:effectLst/>
         </p:spPr>
       </p:cxnSp>
-      <p:sp>
-        <p:nvSpPr>
-          <p:cNvPr id="5" name="text4" descr="sci-ppt:C1-E14-004"/>
+      <p:cxnSp>
+        <p:nvCxnSpPr>
+          <p:cNvPr id="5" name="C1-E14 line 3" descr="sci-ppt:o003"/>
+          <p:cNvCxnSpPr/>
+          <p:nvPr/>
+        </p:nvCxnSpPr>
+        <p:spPr>
+          <a:xfrm>
+            <a:off x="7132320" y="3063239"/>
+            <a:ext cx="0" cy="64008"/>
+          </a:xfrm>
+          <a:prstGeom prst="line">
+            <a:avLst/>
+          </a:prstGeom>
+          <a:ln w="12700">
+            <a:solidFill>
+              <a:srgbClr val="B4C7D2"/>
+            </a:solidFill>
+          </a:ln>
+          <a:effectLst/>
+        </p:spPr>
+      </p:cxnSp>
+      <p:cxnSp>
+        <p:nvCxnSpPr>
+          <p:cNvPr id="6" name="C1-E14 line 4" descr="sci-ppt:o004"/>
+          <p:cNvCxnSpPr/>
+          <p:nvPr/>
+        </p:nvCxnSpPr>
+        <p:spPr>
+          <a:xfrm>
+            <a:off x="7132320" y="1325880"/>
+            <a:ext cx="0" cy="1737359"/>
+          </a:xfrm>
+          <a:prstGeom prst="line">
+            <a:avLst/>
+          </a:prstGeom>
+          <a:ln w="7620">
+            <a:solidFill>
+              <a:srgbClr val="2E4756"/>
+            </a:solidFill>
+          </a:ln>
+          <a:effectLst/>
+        </p:spPr>
+      </p:cxnSp>
+      <p:sp>
+        <p:nvSpPr>
+          <p:cNvPr id="7" name="C1-E14 text 5" descr="sci-ppt:o005"/>
           <p:cNvSpPr txBox="1"/>
           <p:nvPr/>
         </p:nvSpPr>
         <p:spPr>
           <a:xfrm>
-            <a:off x="3474720" y="2133600"/>
-            <a:ext cx="1584960" cy="396849"/>
+            <a:off x="6675120" y="3145535"/>
+            <a:ext cx="914400" cy="208407"/>
           </a:xfrm>
           <a:prstGeom prst="rect">
             <a:avLst/>
@@ -3210,7 +3242,573 @@
           <a:effectLst/>
         </p:spPr>
         <p:txBody>
-          <a:bodyPr wrap="none" lIns="27432" rIns="27432" tIns="18288" bIns="18288" anchor="ctr">
+          <a:bodyPr wrap="none" lIns="18288" rIns="18288" tIns="18288" bIns="18288" anchor="t">
+            <a:spAutoFit/>
+          </a:bodyPr>
+          <a:lstStyle/>
+          <a:p>
+            <a:pPr algn="ctr">
+              <a:spcAft>
+                <a:spcPts val="0"/>
+              </a:spcAft>
+            </a:pPr>
+            <a:r>
+              <a:rPr sz="1050" b="0" i="0">
+                <a:solidFill>
+                  <a:srgbClr val="B4C7D2"/>
+                </a:solidFill>
+                <a:latin typeface="Arial"/>
+              </a:rPr>
+              <a:t>0.25</a:t>
+            </a:r>
+          </a:p>
+        </p:txBody>
+      </p:sp>
+      <p:cxnSp>
+        <p:nvCxnSpPr>
+          <p:cNvPr id="8" name="C1-E14 line 6" descr="sci-ppt:o006"/>
+          <p:cNvCxnSpPr/>
+          <p:nvPr/>
+        </p:nvCxnSpPr>
+        <p:spPr>
+          <a:xfrm>
+            <a:off x="8656320" y="3063239"/>
+            <a:ext cx="0" cy="64008"/>
+          </a:xfrm>
+          <a:prstGeom prst="line">
+            <a:avLst/>
+          </a:prstGeom>
+          <a:ln w="12700">
+            <a:solidFill>
+              <a:srgbClr val="B4C7D2"/>
+            </a:solidFill>
+          </a:ln>
+          <a:effectLst/>
+        </p:spPr>
+      </p:cxnSp>
+      <p:cxnSp>
+        <p:nvCxnSpPr>
+          <p:cNvPr id="9" name="C1-E14 line 7" descr="sci-ppt:o007"/>
+          <p:cNvCxnSpPr/>
+          <p:nvPr/>
+        </p:nvCxnSpPr>
+        <p:spPr>
+          <a:xfrm>
+            <a:off x="8656320" y="1325880"/>
+            <a:ext cx="0" cy="1737359"/>
+          </a:xfrm>
+          <a:prstGeom prst="line">
+            <a:avLst/>
+          </a:prstGeom>
+          <a:ln w="7620">
+            <a:solidFill>
+              <a:srgbClr val="2E4756"/>
+            </a:solidFill>
+          </a:ln>
+          <a:effectLst/>
+        </p:spPr>
+      </p:cxnSp>
+      <p:sp>
+        <p:nvSpPr>
+          <p:cNvPr id="10" name="C1-E14 text 8" descr="sci-ppt:o008"/>
+          <p:cNvSpPr txBox="1"/>
+          <p:nvPr/>
+        </p:nvSpPr>
+        <p:spPr>
+          <a:xfrm>
+            <a:off x="8199120" y="3145535"/>
+            <a:ext cx="914400" cy="208407"/>
+          </a:xfrm>
+          <a:prstGeom prst="rect">
+            <a:avLst/>
+          </a:prstGeom>
+          <a:noFill/>
+          <a:effectLst/>
+        </p:spPr>
+        <p:txBody>
+          <a:bodyPr wrap="none" lIns="18288" rIns="18288" tIns="18288" bIns="18288" anchor="t">
+            <a:spAutoFit/>
+          </a:bodyPr>
+          <a:lstStyle/>
+          <a:p>
+            <a:pPr algn="ctr">
+              <a:spcAft>
+                <a:spcPts val="0"/>
+              </a:spcAft>
+            </a:pPr>
+            <a:r>
+              <a:rPr sz="1050" b="0" i="0">
+                <a:solidFill>
+                  <a:srgbClr val="B4C7D2"/>
+                </a:solidFill>
+                <a:latin typeface="Arial"/>
+              </a:rPr>
+              <a:t>0.50</a:t>
+            </a:r>
+          </a:p>
+        </p:txBody>
+      </p:sp>
+      <p:cxnSp>
+        <p:nvCxnSpPr>
+          <p:cNvPr id="11" name="C1-E14 line 9" descr="sci-ppt:o009"/>
+          <p:cNvCxnSpPr/>
+          <p:nvPr/>
+        </p:nvCxnSpPr>
+        <p:spPr>
+          <a:xfrm>
+            <a:off x="10180320" y="3063239"/>
+            <a:ext cx="0" cy="64008"/>
+          </a:xfrm>
+          <a:prstGeom prst="line">
+            <a:avLst/>
+          </a:prstGeom>
+          <a:ln w="12700">
+            <a:solidFill>
+              <a:srgbClr val="B4C7D2"/>
+            </a:solidFill>
+          </a:ln>
+          <a:effectLst/>
+        </p:spPr>
+      </p:cxnSp>
+      <p:cxnSp>
+        <p:nvCxnSpPr>
+          <p:cNvPr id="12" name="C1-E14 line 10" descr="sci-ppt:o010"/>
+          <p:cNvCxnSpPr/>
+          <p:nvPr/>
+        </p:nvCxnSpPr>
+        <p:spPr>
+          <a:xfrm>
+            <a:off x="10180320" y="1325880"/>
+            <a:ext cx="0" cy="1737359"/>
+          </a:xfrm>
+          <a:prstGeom prst="line">
+            <a:avLst/>
+          </a:prstGeom>
+          <a:ln w="7620">
+            <a:solidFill>
+              <a:srgbClr val="2E4756"/>
+            </a:solidFill>
+          </a:ln>
+          <a:effectLst/>
+        </p:spPr>
+      </p:cxnSp>
+      <p:sp>
+        <p:nvSpPr>
+          <p:cNvPr id="13" name="C1-E14 text 11" descr="sci-ppt:o011"/>
+          <p:cNvSpPr txBox="1"/>
+          <p:nvPr/>
+        </p:nvSpPr>
+        <p:spPr>
+          <a:xfrm>
+            <a:off x="9723120" y="3145535"/>
+            <a:ext cx="914400" cy="208407"/>
+          </a:xfrm>
+          <a:prstGeom prst="rect">
+            <a:avLst/>
+          </a:prstGeom>
+          <a:noFill/>
+          <a:effectLst/>
+        </p:spPr>
+        <p:txBody>
+          <a:bodyPr wrap="none" lIns="18288" rIns="18288" tIns="18288" bIns="18288" anchor="t">
+            <a:spAutoFit/>
+          </a:bodyPr>
+          <a:lstStyle/>
+          <a:p>
+            <a:pPr algn="ctr">
+              <a:spcAft>
+                <a:spcPts val="0"/>
+              </a:spcAft>
+            </a:pPr>
+            <a:r>
+              <a:rPr sz="1050" b="0" i="0">
+                <a:solidFill>
+                  <a:srgbClr val="B4C7D2"/>
+                </a:solidFill>
+                <a:latin typeface="Arial"/>
+              </a:rPr>
+              <a:t>0.75</a:t>
+            </a:r>
+          </a:p>
+        </p:txBody>
+      </p:sp>
+      <p:cxnSp>
+        <p:nvCxnSpPr>
+          <p:cNvPr id="14" name="C1-E14 line 12" descr="sci-ppt:o012"/>
+          <p:cNvCxnSpPr/>
+          <p:nvPr/>
+        </p:nvCxnSpPr>
+        <p:spPr>
+          <a:xfrm>
+            <a:off x="11704320" y="3063239"/>
+            <a:ext cx="0" cy="64008"/>
+          </a:xfrm>
+          <a:prstGeom prst="line">
+            <a:avLst/>
+          </a:prstGeom>
+          <a:ln w="12700">
+            <a:solidFill>
+              <a:srgbClr val="B4C7D2"/>
+            </a:solidFill>
+          </a:ln>
+          <a:effectLst/>
+        </p:spPr>
+      </p:cxnSp>
+      <p:cxnSp>
+        <p:nvCxnSpPr>
+          <p:cNvPr id="15" name="C1-E14 line 13" descr="sci-ppt:o013"/>
+          <p:cNvCxnSpPr/>
+          <p:nvPr/>
+        </p:nvCxnSpPr>
+        <p:spPr>
+          <a:xfrm>
+            <a:off x="11704320" y="1325880"/>
+            <a:ext cx="0" cy="1737359"/>
+          </a:xfrm>
+          <a:prstGeom prst="line">
+            <a:avLst/>
+          </a:prstGeom>
+          <a:ln w="7620">
+            <a:solidFill>
+              <a:srgbClr val="2E4756"/>
+            </a:solidFill>
+          </a:ln>
+          <a:effectLst/>
+        </p:spPr>
+      </p:cxnSp>
+      <p:sp>
+        <p:nvSpPr>
+          <p:cNvPr id="16" name="C1-E14 text 14" descr="sci-ppt:o014"/>
+          <p:cNvSpPr txBox="1"/>
+          <p:nvPr/>
+        </p:nvSpPr>
+        <p:spPr>
+          <a:xfrm>
+            <a:off x="11247120" y="3145535"/>
+            <a:ext cx="914400" cy="208407"/>
+          </a:xfrm>
+          <a:prstGeom prst="rect">
+            <a:avLst/>
+          </a:prstGeom>
+          <a:noFill/>
+          <a:effectLst/>
+        </p:spPr>
+        <p:txBody>
+          <a:bodyPr wrap="none" lIns="18288" rIns="18288" tIns="18288" bIns="18288" anchor="t">
+            <a:spAutoFit/>
+          </a:bodyPr>
+          <a:lstStyle/>
+          <a:p>
+            <a:pPr algn="ctr">
+              <a:spcAft>
+                <a:spcPts val="0"/>
+              </a:spcAft>
+            </a:pPr>
+            <a:r>
+              <a:rPr sz="1050" b="0" i="0">
+                <a:solidFill>
+                  <a:srgbClr val="B4C7D2"/>
+                </a:solidFill>
+                <a:latin typeface="Arial"/>
+              </a:rPr>
+              <a:t>1.00</a:t>
+            </a:r>
+          </a:p>
+        </p:txBody>
+      </p:sp>
+      <p:cxnSp>
+        <p:nvCxnSpPr>
+          <p:cNvPr id="17" name="C1-E14 line 15" descr="sci-ppt:o015"/>
+          <p:cNvCxnSpPr/>
+          <p:nvPr/>
+        </p:nvCxnSpPr>
+        <p:spPr>
+          <a:xfrm>
+            <a:off x="7068312" y="3063239"/>
+            <a:ext cx="64008" cy="0"/>
+          </a:xfrm>
+          <a:prstGeom prst="line">
+            <a:avLst/>
+          </a:prstGeom>
+          <a:ln w="12700">
+            <a:solidFill>
+              <a:srgbClr val="B4C7D2"/>
+            </a:solidFill>
+          </a:ln>
+          <a:effectLst/>
+        </p:spPr>
+      </p:cxnSp>
+      <p:cxnSp>
+        <p:nvCxnSpPr>
+          <p:cNvPr id="18" name="C1-E14 line 16" descr="sci-ppt:o016"/>
+          <p:cNvCxnSpPr/>
+          <p:nvPr/>
+        </p:nvCxnSpPr>
+        <p:spPr>
+          <a:xfrm>
+            <a:off x="7068312" y="2520314"/>
+            <a:ext cx="64008" cy="0"/>
+          </a:xfrm>
+          <a:prstGeom prst="line">
+            <a:avLst/>
+          </a:prstGeom>
+          <a:ln w="12700">
+            <a:solidFill>
+              <a:srgbClr val="B4C7D2"/>
+            </a:solidFill>
+          </a:ln>
+          <a:effectLst/>
+        </p:spPr>
+      </p:cxnSp>
+      <p:cxnSp>
+        <p:nvCxnSpPr>
+          <p:cNvPr id="19" name="C1-E14 line 17" descr="sci-ppt:o017"/>
+          <p:cNvCxnSpPr/>
+          <p:nvPr/>
+        </p:nvCxnSpPr>
+        <p:spPr>
+          <a:xfrm>
+            <a:off x="7132320" y="2520314"/>
+            <a:ext cx="4572000" cy="0"/>
+          </a:xfrm>
+          <a:prstGeom prst="line">
+            <a:avLst/>
+          </a:prstGeom>
+          <a:ln w="7620">
+            <a:solidFill>
+              <a:srgbClr val="2E4756"/>
+            </a:solidFill>
+          </a:ln>
+          <a:effectLst/>
+        </p:spPr>
+      </p:cxnSp>
+      <p:sp>
+        <p:nvSpPr>
+          <p:cNvPr id="20" name="C1-E14 text 18" descr="sci-ppt:o018"/>
+          <p:cNvSpPr txBox="1"/>
+          <p:nvPr/>
+        </p:nvSpPr>
+        <p:spPr>
+          <a:xfrm>
+            <a:off x="6263640" y="2438019"/>
+            <a:ext cx="777240" cy="208407"/>
+          </a:xfrm>
+          <a:prstGeom prst="rect">
+            <a:avLst/>
+          </a:prstGeom>
+          <a:noFill/>
+          <a:effectLst/>
+        </p:spPr>
+        <p:txBody>
+          <a:bodyPr wrap="none" lIns="18288" rIns="18288" tIns="18288" bIns="18288" anchor="t">
+            <a:spAutoFit/>
+          </a:bodyPr>
+          <a:lstStyle/>
+          <a:p>
+            <a:pPr algn="r">
+              <a:spcAft>
+                <a:spcPts val="0"/>
+              </a:spcAft>
+            </a:pPr>
+            <a:r>
+              <a:rPr sz="1050" b="0" i="0">
+                <a:solidFill>
+                  <a:srgbClr val="B4C7D2"/>
+                </a:solidFill>
+                <a:latin typeface="Arial"/>
+              </a:rPr>
+              <a:t>20</a:t>
+            </a:r>
+          </a:p>
+        </p:txBody>
+      </p:sp>
+      <p:cxnSp>
+        <p:nvCxnSpPr>
+          <p:cNvPr id="21" name="C1-E14 line 19" descr="sci-ppt:o019"/>
+          <p:cNvCxnSpPr/>
+          <p:nvPr/>
+        </p:nvCxnSpPr>
+        <p:spPr>
+          <a:xfrm>
+            <a:off x="7068312" y="1977389"/>
+            <a:ext cx="64008" cy="0"/>
+          </a:xfrm>
+          <a:prstGeom prst="line">
+            <a:avLst/>
+          </a:prstGeom>
+          <a:ln w="12700">
+            <a:solidFill>
+              <a:srgbClr val="B4C7D2"/>
+            </a:solidFill>
+          </a:ln>
+          <a:effectLst/>
+        </p:spPr>
+      </p:cxnSp>
+      <p:cxnSp>
+        <p:nvCxnSpPr>
+          <p:cNvPr id="22" name="C1-E14 line 20" descr="sci-ppt:o020"/>
+          <p:cNvCxnSpPr/>
+          <p:nvPr/>
+        </p:nvCxnSpPr>
+        <p:spPr>
+          <a:xfrm>
+            <a:off x="7132320" y="1977389"/>
+            <a:ext cx="4572000" cy="0"/>
+          </a:xfrm>
+          <a:prstGeom prst="line">
+            <a:avLst/>
+          </a:prstGeom>
+          <a:ln w="7620">
+            <a:solidFill>
+              <a:srgbClr val="2E4756"/>
+            </a:solidFill>
+          </a:ln>
+          <a:effectLst/>
+        </p:spPr>
+      </p:cxnSp>
+      <p:sp>
+        <p:nvSpPr>
+          <p:cNvPr id="23" name="C1-E14 text 21" descr="sci-ppt:o021"/>
+          <p:cNvSpPr txBox="1"/>
+          <p:nvPr/>
+        </p:nvSpPr>
+        <p:spPr>
+          <a:xfrm>
+            <a:off x="6263640" y="1895093"/>
+            <a:ext cx="777240" cy="208407"/>
+          </a:xfrm>
+          <a:prstGeom prst="rect">
+            <a:avLst/>
+          </a:prstGeom>
+          <a:noFill/>
+          <a:effectLst/>
+        </p:spPr>
+        <p:txBody>
+          <a:bodyPr wrap="none" lIns="18288" rIns="18288" tIns="18288" bIns="18288" anchor="t">
+            <a:spAutoFit/>
+          </a:bodyPr>
+          <a:lstStyle/>
+          <a:p>
+            <a:pPr algn="r">
+              <a:spcAft>
+                <a:spcPts val="0"/>
+              </a:spcAft>
+            </a:pPr>
+            <a:r>
+              <a:rPr sz="1050" b="0" i="0">
+                <a:solidFill>
+                  <a:srgbClr val="B4C7D2"/>
+                </a:solidFill>
+                <a:latin typeface="Arial"/>
+              </a:rPr>
+              <a:t>40</a:t>
+            </a:r>
+          </a:p>
+        </p:txBody>
+      </p:sp>
+      <p:cxnSp>
+        <p:nvCxnSpPr>
+          <p:cNvPr id="24" name="C1-E14 line 22" descr="sci-ppt:o022"/>
+          <p:cNvCxnSpPr/>
+          <p:nvPr/>
+        </p:nvCxnSpPr>
+        <p:spPr>
+          <a:xfrm>
+            <a:off x="7068312" y="1434464"/>
+            <a:ext cx="64008" cy="0"/>
+          </a:xfrm>
+          <a:prstGeom prst="line">
+            <a:avLst/>
+          </a:prstGeom>
+          <a:ln w="12700">
+            <a:solidFill>
+              <a:srgbClr val="B4C7D2"/>
+            </a:solidFill>
+          </a:ln>
+          <a:effectLst/>
+        </p:spPr>
+      </p:cxnSp>
+      <p:cxnSp>
+        <p:nvCxnSpPr>
+          <p:cNvPr id="25" name="C1-E14 line 23" descr="sci-ppt:o023"/>
+          <p:cNvCxnSpPr/>
+          <p:nvPr/>
+        </p:nvCxnSpPr>
+        <p:spPr>
+          <a:xfrm>
+            <a:off x="7132320" y="1434464"/>
+            <a:ext cx="4572000" cy="0"/>
+          </a:xfrm>
+          <a:prstGeom prst="line">
+            <a:avLst/>
+          </a:prstGeom>
+          <a:ln w="7620">
+            <a:solidFill>
+              <a:srgbClr val="2E4756"/>
+            </a:solidFill>
+          </a:ln>
+          <a:effectLst/>
+        </p:spPr>
+      </p:cxnSp>
+      <p:sp>
+        <p:nvSpPr>
+          <p:cNvPr id="26" name="C1-E14 text 24" descr="sci-ppt:o024"/>
+          <p:cNvSpPr txBox="1"/>
+          <p:nvPr/>
+        </p:nvSpPr>
+        <p:spPr>
+          <a:xfrm>
+            <a:off x="6263640" y="1352168"/>
+            <a:ext cx="777240" cy="208407"/>
+          </a:xfrm>
+          <a:prstGeom prst="rect">
+            <a:avLst/>
+          </a:prstGeom>
+          <a:noFill/>
+          <a:effectLst/>
+        </p:spPr>
+        <p:txBody>
+          <a:bodyPr wrap="none" lIns="18288" rIns="18288" tIns="18288" bIns="18288" anchor="t">
+            <a:spAutoFit/>
+          </a:bodyPr>
+          <a:lstStyle/>
+          <a:p>
+            <a:pPr algn="r">
+              <a:spcAft>
+                <a:spcPts val="0"/>
+              </a:spcAft>
+            </a:pPr>
+            <a:r>
+              <a:rPr sz="1050" b="0" i="0">
+                <a:solidFill>
+                  <a:srgbClr val="B4C7D2"/>
+                </a:solidFill>
+                <a:latin typeface="Arial"/>
+              </a:rPr>
+              <a:t>60</a:t>
+            </a:r>
+          </a:p>
+        </p:txBody>
+      </p:sp>
+      <p:sp>
+        <p:nvSpPr>
+          <p:cNvPr id="27" name="C1-E14 text 25" descr="sci-ppt:o025"/>
+          <p:cNvSpPr txBox="1"/>
+          <p:nvPr/>
+        </p:nvSpPr>
+        <p:spPr>
+          <a:xfrm>
+            <a:off x="6583680" y="978407"/>
+            <a:ext cx="4572000" cy="231648"/>
+          </a:xfrm>
+          <a:prstGeom prst="rect">
+            <a:avLst/>
+          </a:prstGeom>
+          <a:noFill/>
+          <a:effectLst/>
+        </p:spPr>
+        <p:txBody>
+          <a:bodyPr wrap="none" lIns="18288" rIns="18288" tIns="18288" bIns="18288" anchor="t">
             <a:spAutoFit/>
           </a:bodyPr>
           <a:lstStyle/>
@@ -3221,27 +3819,518 @@
               </a:spcAft>
             </a:pPr>
             <a:r>
-              <a:rPr sz="2016" b="0" i="0">
+              <a:rPr sz="1200" b="0" i="0">
                 <a:solidFill>
                   <a:srgbClr val="E7F0F3"/>
                 </a:solidFill>
                 <a:latin typeface="Arial"/>
               </a:rPr>
-              <a:t>R(t)</a:t>
-            </a:r>
-          </a:p>
-        </p:txBody>
-      </p:sp>
-      <p:sp>
-        <p:nvSpPr>
-          <p:cNvPr id="6" name="text5" descr="sci-ppt:C1-E14-005"/>
+              <a:t>y (scaled)</a:t>
+            </a:r>
+          </a:p>
+        </p:txBody>
+      </p:sp>
+      <p:sp>
+        <p:nvSpPr>
+          <p:cNvPr id="28" name="C1-E14 polygon 26" descr="sci-ppt:o026"/>
+          <p:cNvSpPr/>
+          <p:nvPr/>
+        </p:nvSpPr>
+        <p:spPr>
+          <a:xfrm>
+            <a:off x="7132320" y="1353026"/>
+            <a:ext cx="4572000" cy="1710213"/>
+          </a:xfrm>
+          <a:custGeom>
+            <a:avLst/>
+            <a:gdLst/>
+            <a:ahLst/>
+            <a:cxnLst/>
+            <a:rect l="l" t="t" r="r" b="b"/>
+            <a:pathLst>
+              <a:path w="4572000" h="1710213">
+                <a:moveTo>
+                  <a:pt x="0" y="0"/>
+                </a:moveTo>
+                <a:lnTo>
+                  <a:pt x="30581" y="100529"/>
+                </a:lnTo>
+                <a:lnTo>
+                  <a:pt x="61163" y="193449"/>
+                </a:lnTo>
+                <a:lnTo>
+                  <a:pt x="91745" y="279467"/>
+                </a:lnTo>
+                <a:lnTo>
+                  <a:pt x="122327" y="359212"/>
+                </a:lnTo>
+                <a:lnTo>
+                  <a:pt x="152909" y="433245"/>
+                </a:lnTo>
+                <a:lnTo>
+                  <a:pt x="183491" y="502070"/>
+                </a:lnTo>
+                <a:lnTo>
+                  <a:pt x="214073" y="566135"/>
+                </a:lnTo>
+                <a:lnTo>
+                  <a:pt x="244655" y="625846"/>
+                </a:lnTo>
+                <a:lnTo>
+                  <a:pt x="275237" y="681566"/>
+                </a:lnTo>
+                <a:lnTo>
+                  <a:pt x="305819" y="733623"/>
+                </a:lnTo>
+                <a:lnTo>
+                  <a:pt x="336401" y="782313"/>
+                </a:lnTo>
+                <a:lnTo>
+                  <a:pt x="366983" y="827904"/>
+                </a:lnTo>
+                <a:lnTo>
+                  <a:pt x="397565" y="870639"/>
+                </a:lnTo>
+                <a:lnTo>
+                  <a:pt x="428147" y="910738"/>
+                </a:lnTo>
+                <a:lnTo>
+                  <a:pt x="458729" y="948400"/>
+                </a:lnTo>
+                <a:lnTo>
+                  <a:pt x="489311" y="983810"/>
+                </a:lnTo>
+                <a:lnTo>
+                  <a:pt x="519892" y="1017131"/>
+                </a:lnTo>
+                <a:lnTo>
+                  <a:pt x="550474" y="1048517"/>
+                </a:lnTo>
+                <a:lnTo>
+                  <a:pt x="581056" y="1078105"/>
+                </a:lnTo>
+                <a:lnTo>
+                  <a:pt x="611638" y="1106023"/>
+                </a:lnTo>
+                <a:lnTo>
+                  <a:pt x="642220" y="1132386"/>
+                </a:lnTo>
+                <a:lnTo>
+                  <a:pt x="672802" y="1157302"/>
+                </a:lnTo>
+                <a:lnTo>
+                  <a:pt x="703384" y="1180868"/>
+                </a:lnTo>
+                <a:lnTo>
+                  <a:pt x="733966" y="1203174"/>
+                </a:lnTo>
+                <a:lnTo>
+                  <a:pt x="764548" y="1224304"/>
+                </a:lnTo>
+                <a:lnTo>
+                  <a:pt x="795130" y="1244334"/>
+                </a:lnTo>
+                <a:lnTo>
+                  <a:pt x="825712" y="1263335"/>
+                </a:lnTo>
+                <a:lnTo>
+                  <a:pt x="856294" y="1281372"/>
+                </a:lnTo>
+                <a:lnTo>
+                  <a:pt x="886876" y="1298506"/>
+                </a:lnTo>
+                <a:lnTo>
+                  <a:pt x="917458" y="1314792"/>
+                </a:lnTo>
+                <a:lnTo>
+                  <a:pt x="948040" y="1330281"/>
+                </a:lnTo>
+                <a:lnTo>
+                  <a:pt x="978622" y="1345023"/>
+                </a:lnTo>
+                <a:lnTo>
+                  <a:pt x="1009204" y="1359062"/>
+                </a:lnTo>
+                <a:lnTo>
+                  <a:pt x="1039785" y="1372438"/>
+                </a:lnTo>
+                <a:lnTo>
+                  <a:pt x="1070367" y="1385192"/>
+                </a:lnTo>
+                <a:lnTo>
+                  <a:pt x="1100949" y="1397358"/>
+                </a:lnTo>
+                <a:lnTo>
+                  <a:pt x="1131531" y="1408970"/>
+                </a:lnTo>
+                <a:lnTo>
+                  <a:pt x="1162113" y="1420059"/>
+                </a:lnTo>
+                <a:lnTo>
+                  <a:pt x="1192695" y="1430654"/>
+                </a:lnTo>
+                <a:lnTo>
+                  <a:pt x="1223277" y="1440783"/>
+                </a:lnTo>
+                <a:lnTo>
+                  <a:pt x="1253859" y="1450471"/>
+                </a:lnTo>
+                <a:lnTo>
+                  <a:pt x="1284441" y="1459741"/>
+                </a:lnTo>
+                <a:lnTo>
+                  <a:pt x="1315023" y="1468616"/>
+                </a:lnTo>
+                <a:lnTo>
+                  <a:pt x="1345605" y="1477117"/>
+                </a:lnTo>
+                <a:lnTo>
+                  <a:pt x="1376187" y="1485263"/>
+                </a:lnTo>
+                <a:lnTo>
+                  <a:pt x="1406769" y="1493073"/>
+                </a:lnTo>
+                <a:lnTo>
+                  <a:pt x="1437351" y="1500563"/>
+                </a:lnTo>
+                <a:lnTo>
+                  <a:pt x="1467933" y="1507751"/>
+                </a:lnTo>
+                <a:lnTo>
+                  <a:pt x="1498515" y="1514650"/>
+                </a:lnTo>
+                <a:lnTo>
+                  <a:pt x="1529096" y="1521276"/>
+                </a:lnTo>
+                <a:lnTo>
+                  <a:pt x="1559678" y="1527641"/>
+                </a:lnTo>
+                <a:lnTo>
+                  <a:pt x="1590260" y="1533759"/>
+                </a:lnTo>
+                <a:lnTo>
+                  <a:pt x="1620842" y="1539641"/>
+                </a:lnTo>
+                <a:lnTo>
+                  <a:pt x="1651424" y="1545299"/>
+                </a:lnTo>
+                <a:lnTo>
+                  <a:pt x="1682006" y="1550743"/>
+                </a:lnTo>
+                <a:lnTo>
+                  <a:pt x="1712588" y="1555983"/>
+                </a:lnTo>
+                <a:lnTo>
+                  <a:pt x="1743170" y="1561028"/>
+                </a:lnTo>
+                <a:lnTo>
+                  <a:pt x="1773752" y="1565889"/>
+                </a:lnTo>
+                <a:lnTo>
+                  <a:pt x="1804334" y="1570572"/>
+                </a:lnTo>
+                <a:lnTo>
+                  <a:pt x="1834916" y="1575086"/>
+                </a:lnTo>
+                <a:lnTo>
+                  <a:pt x="1865498" y="1579439"/>
+                </a:lnTo>
+                <a:lnTo>
+                  <a:pt x="1896080" y="1583638"/>
+                </a:lnTo>
+                <a:lnTo>
+                  <a:pt x="1926662" y="1587689"/>
+                </a:lnTo>
+                <a:lnTo>
+                  <a:pt x="1957244" y="1591599"/>
+                </a:lnTo>
+                <a:lnTo>
+                  <a:pt x="1987826" y="1595374"/>
+                </a:lnTo>
+                <a:lnTo>
+                  <a:pt x="2018408" y="1599019"/>
+                </a:lnTo>
+                <a:lnTo>
+                  <a:pt x="2048989" y="1602541"/>
+                </a:lnTo>
+                <a:lnTo>
+                  <a:pt x="2079571" y="1605945"/>
+                </a:lnTo>
+                <a:lnTo>
+                  <a:pt x="2110153" y="1609234"/>
+                </a:lnTo>
+                <a:lnTo>
+                  <a:pt x="2140735" y="1612415"/>
+                </a:lnTo>
+                <a:lnTo>
+                  <a:pt x="2171317" y="1615492"/>
+                </a:lnTo>
+                <a:lnTo>
+                  <a:pt x="2201899" y="1618468"/>
+                </a:lnTo>
+                <a:lnTo>
+                  <a:pt x="2232481" y="1621348"/>
+                </a:lnTo>
+                <a:lnTo>
+                  <a:pt x="2263063" y="1624136"/>
+                </a:lnTo>
+                <a:lnTo>
+                  <a:pt x="2293645" y="1626835"/>
+                </a:lnTo>
+                <a:lnTo>
+                  <a:pt x="2324227" y="1629450"/>
+                </a:lnTo>
+                <a:lnTo>
+                  <a:pt x="2354809" y="1631982"/>
+                </a:lnTo>
+                <a:lnTo>
+                  <a:pt x="2385391" y="1634436"/>
+                </a:lnTo>
+                <a:lnTo>
+                  <a:pt x="2415973" y="1636814"/>
+                </a:lnTo>
+                <a:lnTo>
+                  <a:pt x="2446555" y="1639119"/>
+                </a:lnTo>
+                <a:lnTo>
+                  <a:pt x="2477137" y="1641355"/>
+                </a:lnTo>
+                <a:lnTo>
+                  <a:pt x="2507719" y="1643523"/>
+                </a:lnTo>
+                <a:lnTo>
+                  <a:pt x="2538301" y="1645626"/>
+                </a:lnTo>
+                <a:lnTo>
+                  <a:pt x="2568882" y="1647667"/>
+                </a:lnTo>
+                <a:lnTo>
+                  <a:pt x="2599464" y="1649648"/>
+                </a:lnTo>
+                <a:lnTo>
+                  <a:pt x="2630046" y="1651571"/>
+                </a:lnTo>
+                <a:lnTo>
+                  <a:pt x="2660628" y="1653438"/>
+                </a:lnTo>
+                <a:lnTo>
+                  <a:pt x="2691210" y="1655251"/>
+                </a:lnTo>
+                <a:lnTo>
+                  <a:pt x="2721792" y="1657013"/>
+                </a:lnTo>
+                <a:lnTo>
+                  <a:pt x="2752374" y="1658724"/>
+                </a:lnTo>
+                <a:lnTo>
+                  <a:pt x="2782956" y="1660388"/>
+                </a:lnTo>
+                <a:lnTo>
+                  <a:pt x="2813538" y="1662004"/>
+                </a:lnTo>
+                <a:lnTo>
+                  <a:pt x="2844120" y="1663576"/>
+                </a:lnTo>
+                <a:lnTo>
+                  <a:pt x="2874702" y="1665104"/>
+                </a:lnTo>
+                <a:lnTo>
+                  <a:pt x="2905284" y="1666591"/>
+                </a:lnTo>
+                <a:lnTo>
+                  <a:pt x="2935866" y="1668036"/>
+                </a:lnTo>
+                <a:lnTo>
+                  <a:pt x="2966448" y="1669443"/>
+                </a:lnTo>
+                <a:lnTo>
+                  <a:pt x="2997030" y="1670812"/>
+                </a:lnTo>
+                <a:lnTo>
+                  <a:pt x="3027612" y="1672145"/>
+                </a:lnTo>
+                <a:lnTo>
+                  <a:pt x="3058193" y="1673442"/>
+                </a:lnTo>
+                <a:lnTo>
+                  <a:pt x="3088775" y="1674704"/>
+                </a:lnTo>
+                <a:lnTo>
+                  <a:pt x="3119357" y="1675934"/>
+                </a:lnTo>
+                <a:lnTo>
+                  <a:pt x="3149939" y="1677132"/>
+                </a:lnTo>
+                <a:lnTo>
+                  <a:pt x="3180521" y="1678299"/>
+                </a:lnTo>
+                <a:lnTo>
+                  <a:pt x="3211103" y="1679436"/>
+                </a:lnTo>
+                <a:lnTo>
+                  <a:pt x="3241685" y="1680544"/>
+                </a:lnTo>
+                <a:lnTo>
+                  <a:pt x="3272267" y="1681624"/>
+                </a:lnTo>
+                <a:lnTo>
+                  <a:pt x="3302849" y="1682677"/>
+                </a:lnTo>
+                <a:lnTo>
+                  <a:pt x="3333431" y="1683703"/>
+                </a:lnTo>
+                <a:lnTo>
+                  <a:pt x="3364013" y="1684704"/>
+                </a:lnTo>
+                <a:lnTo>
+                  <a:pt x="3394595" y="1685680"/>
+                </a:lnTo>
+                <a:lnTo>
+                  <a:pt x="3425177" y="1686632"/>
+                </a:lnTo>
+                <a:lnTo>
+                  <a:pt x="3455759" y="1687561"/>
+                </a:lnTo>
+                <a:lnTo>
+                  <a:pt x="3486341" y="1688467"/>
+                </a:lnTo>
+                <a:lnTo>
+                  <a:pt x="3516923" y="1689352"/>
+                </a:lnTo>
+                <a:lnTo>
+                  <a:pt x="3547505" y="1690215"/>
+                </a:lnTo>
+                <a:lnTo>
+                  <a:pt x="3578086" y="1691058"/>
+                </a:lnTo>
+                <a:lnTo>
+                  <a:pt x="3608668" y="1691880"/>
+                </a:lnTo>
+                <a:lnTo>
+                  <a:pt x="3639250" y="1692684"/>
+                </a:lnTo>
+                <a:lnTo>
+                  <a:pt x="3669832" y="1693468"/>
+                </a:lnTo>
+                <a:lnTo>
+                  <a:pt x="3700414" y="1694234"/>
+                </a:lnTo>
+                <a:lnTo>
+                  <a:pt x="3730996" y="1694983"/>
+                </a:lnTo>
+                <a:lnTo>
+                  <a:pt x="3761578" y="1695714"/>
+                </a:lnTo>
+                <a:lnTo>
+                  <a:pt x="3792160" y="1696429"/>
+                </a:lnTo>
+                <a:lnTo>
+                  <a:pt x="3822742" y="1697127"/>
+                </a:lnTo>
+                <a:lnTo>
+                  <a:pt x="3853324" y="1697810"/>
+                </a:lnTo>
+                <a:lnTo>
+                  <a:pt x="3883906" y="1698477"/>
+                </a:lnTo>
+                <a:lnTo>
+                  <a:pt x="3914488" y="1699129"/>
+                </a:lnTo>
+                <a:lnTo>
+                  <a:pt x="3945070" y="1699767"/>
+                </a:lnTo>
+                <a:lnTo>
+                  <a:pt x="3975652" y="1700391"/>
+                </a:lnTo>
+                <a:lnTo>
+                  <a:pt x="4006234" y="1701001"/>
+                </a:lnTo>
+                <a:lnTo>
+                  <a:pt x="4036816" y="1701597"/>
+                </a:lnTo>
+                <a:lnTo>
+                  <a:pt x="4067397" y="1702181"/>
+                </a:lnTo>
+                <a:lnTo>
+                  <a:pt x="4097979" y="1702752"/>
+                </a:lnTo>
+                <a:lnTo>
+                  <a:pt x="4128561" y="1703310"/>
+                </a:lnTo>
+                <a:lnTo>
+                  <a:pt x="4159143" y="1703857"/>
+                </a:lnTo>
+                <a:lnTo>
+                  <a:pt x="4189725" y="1704392"/>
+                </a:lnTo>
+                <a:lnTo>
+                  <a:pt x="4220307" y="1704916"/>
+                </a:lnTo>
+                <a:lnTo>
+                  <a:pt x="4250889" y="1705429"/>
+                </a:lnTo>
+                <a:lnTo>
+                  <a:pt x="4281471" y="1705931"/>
+                </a:lnTo>
+                <a:lnTo>
+                  <a:pt x="4312053" y="1706422"/>
+                </a:lnTo>
+                <a:lnTo>
+                  <a:pt x="4342635" y="1706903"/>
+                </a:lnTo>
+                <a:lnTo>
+                  <a:pt x="4373217" y="1707375"/>
+                </a:lnTo>
+                <a:lnTo>
+                  <a:pt x="4403799" y="1707836"/>
+                </a:lnTo>
+                <a:lnTo>
+                  <a:pt x="4434381" y="1708289"/>
+                </a:lnTo>
+                <a:lnTo>
+                  <a:pt x="4464963" y="1708732"/>
+                </a:lnTo>
+                <a:lnTo>
+                  <a:pt x="4495545" y="1709166"/>
+                </a:lnTo>
+                <a:lnTo>
+                  <a:pt x="4526127" y="1709591"/>
+                </a:lnTo>
+                <a:lnTo>
+                  <a:pt x="4556709" y="1710008"/>
+                </a:lnTo>
+                <a:lnTo>
+                  <a:pt x="4572000" y="1710213"/>
+                </a:lnTo>
+              </a:path>
+            </a:pathLst>
+          </a:custGeom>
+          <a:noFill/>
+          <a:ln w="38100">
+            <a:solidFill>
+              <a:srgbClr val="F28BA0"/>
+            </a:solidFill>
+          </a:ln>
+          <a:effectLst/>
+        </p:spPr>
+        <p:txBody>
+          <a:bodyPr rtlCol="0" anchor="ctr"/>
+          <a:lstStyle/>
+          <a:p>
+            <a:pPr algn="ctr"/>
+          </a:p>
+        </p:txBody>
+      </p:sp>
+      <p:sp>
+        <p:nvSpPr>
+          <p:cNvPr id="29" name="C1-E14 text 27" descr="sci-ppt:o027"/>
           <p:cNvSpPr txBox="1"/>
           <p:nvPr/>
         </p:nvSpPr>
         <p:spPr>
           <a:xfrm>
-            <a:off x="2682240" y="2804160"/>
-            <a:ext cx="2194560" cy="377952"/>
+            <a:off x="8729472" y="1478756"/>
+            <a:ext cx="3840480" cy="231648"/>
           </a:xfrm>
           <a:prstGeom prst="rect">
             <a:avLst/>
@@ -3250,7 +4339,7 @@
           <a:effectLst/>
         </p:spPr>
         <p:txBody>
-          <a:bodyPr wrap="none" lIns="27432" rIns="27432" tIns="18288" bIns="18288" anchor="ctr">
+          <a:bodyPr wrap="none" lIns="18288" rIns="18288" tIns="18288" bIns="18288" anchor="t">
             <a:spAutoFit/>
           </a:bodyPr>
           <a:lstStyle/>
@@ -3261,27 +4350,721 @@
               </a:spcAft>
             </a:pPr>
             <a:r>
-              <a:rPr sz="1920" b="0" i="0">
+              <a:rPr sz="1200" b="0" i="0">
+                <a:solidFill>
+                  <a:srgbClr val="F28BA0"/>
+                </a:solidFill>
+                <a:latin typeface="Arial"/>
+              </a:rPr>
+              <a:t>y = Ṙ² ∝ x⁻³ − 1: blows up inward</a:t>
+            </a:r>
+          </a:p>
+        </p:txBody>
+      </p:sp>
+      <p:cxnSp>
+        <p:nvCxnSpPr>
+          <p:cNvPr id="30" name="C1-E14 line 28" descr="sci-ppt:o028"/>
+          <p:cNvCxnSpPr/>
+          <p:nvPr/>
+        </p:nvCxnSpPr>
+        <p:spPr>
+          <a:xfrm>
+            <a:off x="7132320" y="5532120"/>
+            <a:ext cx="4572000" cy="0"/>
+          </a:xfrm>
+          <a:prstGeom prst="line">
+            <a:avLst/>
+          </a:prstGeom>
+          <a:ln w="19050">
+            <a:solidFill>
+              <a:srgbClr val="B4C7D2"/>
+            </a:solidFill>
+          </a:ln>
+          <a:effectLst/>
+        </p:spPr>
+      </p:cxnSp>
+      <p:cxnSp>
+        <p:nvCxnSpPr>
+          <p:cNvPr id="31" name="C1-E14 line 29" descr="sci-ppt:o029"/>
+          <p:cNvCxnSpPr/>
+          <p:nvPr/>
+        </p:nvCxnSpPr>
+        <p:spPr>
+          <a:xfrm>
+            <a:off x="7132320" y="3794760"/>
+            <a:ext cx="0" cy="1737360"/>
+          </a:xfrm>
+          <a:prstGeom prst="line">
+            <a:avLst/>
+          </a:prstGeom>
+          <a:ln w="19050">
+            <a:solidFill>
+              <a:srgbClr val="B4C7D2"/>
+            </a:solidFill>
+          </a:ln>
+          <a:effectLst/>
+        </p:spPr>
+      </p:cxnSp>
+      <p:cxnSp>
+        <p:nvCxnSpPr>
+          <p:cNvPr id="32" name="C1-E14 line 30" descr="sci-ppt:o030"/>
+          <p:cNvCxnSpPr/>
+          <p:nvPr/>
+        </p:nvCxnSpPr>
+        <p:spPr>
+          <a:xfrm>
+            <a:off x="7132320" y="5532120"/>
+            <a:ext cx="0" cy="64008"/>
+          </a:xfrm>
+          <a:prstGeom prst="line">
+            <a:avLst/>
+          </a:prstGeom>
+          <a:ln w="12700">
+            <a:solidFill>
+              <a:srgbClr val="B4C7D2"/>
+            </a:solidFill>
+          </a:ln>
+          <a:effectLst/>
+        </p:spPr>
+      </p:cxnSp>
+      <p:cxnSp>
+        <p:nvCxnSpPr>
+          <p:cNvPr id="33" name="C1-E14 line 31" descr="sci-ppt:o031"/>
+          <p:cNvCxnSpPr/>
+          <p:nvPr/>
+        </p:nvCxnSpPr>
+        <p:spPr>
+          <a:xfrm>
+            <a:off x="7132320" y="3794760"/>
+            <a:ext cx="0" cy="1737360"/>
+          </a:xfrm>
+          <a:prstGeom prst="line">
+            <a:avLst/>
+          </a:prstGeom>
+          <a:ln w="7620">
+            <a:solidFill>
+              <a:srgbClr val="2E4756"/>
+            </a:solidFill>
+          </a:ln>
+          <a:effectLst/>
+        </p:spPr>
+      </p:cxnSp>
+      <p:sp>
+        <p:nvSpPr>
+          <p:cNvPr id="34" name="C1-E14 text 32" descr="sci-ppt:o032"/>
+          <p:cNvSpPr txBox="1"/>
+          <p:nvPr/>
+        </p:nvSpPr>
+        <p:spPr>
+          <a:xfrm>
+            <a:off x="6675120" y="5614416"/>
+            <a:ext cx="914400" cy="208407"/>
+          </a:xfrm>
+          <a:prstGeom prst="rect">
+            <a:avLst/>
+          </a:prstGeom>
+          <a:noFill/>
+          <a:effectLst/>
+        </p:spPr>
+        <p:txBody>
+          <a:bodyPr wrap="none" lIns="18288" rIns="18288" tIns="18288" bIns="18288" anchor="t">
+            <a:spAutoFit/>
+          </a:bodyPr>
+          <a:lstStyle/>
+          <a:p>
+            <a:pPr algn="ctr">
+              <a:spcAft>
+                <a:spcPts val="0"/>
+              </a:spcAft>
+            </a:pPr>
+            <a:r>
+              <a:rPr sz="1050" b="0" i="0">
+                <a:solidFill>
+                  <a:srgbClr val="B4C7D2"/>
+                </a:solidFill>
+                <a:latin typeface="Arial"/>
+              </a:rPr>
+              <a:t>0.00</a:t>
+            </a:r>
+          </a:p>
+        </p:txBody>
+      </p:sp>
+      <p:cxnSp>
+        <p:nvCxnSpPr>
+          <p:cNvPr id="35" name="C1-E14 line 33" descr="sci-ppt:o033"/>
+          <p:cNvCxnSpPr/>
+          <p:nvPr/>
+        </p:nvCxnSpPr>
+        <p:spPr>
+          <a:xfrm>
+            <a:off x="8275320" y="5532120"/>
+            <a:ext cx="0" cy="64008"/>
+          </a:xfrm>
+          <a:prstGeom prst="line">
+            <a:avLst/>
+          </a:prstGeom>
+          <a:ln w="12700">
+            <a:solidFill>
+              <a:srgbClr val="B4C7D2"/>
+            </a:solidFill>
+          </a:ln>
+          <a:effectLst/>
+        </p:spPr>
+      </p:cxnSp>
+      <p:cxnSp>
+        <p:nvCxnSpPr>
+          <p:cNvPr id="36" name="C1-E14 line 34" descr="sci-ppt:o034"/>
+          <p:cNvCxnSpPr/>
+          <p:nvPr/>
+        </p:nvCxnSpPr>
+        <p:spPr>
+          <a:xfrm>
+            <a:off x="8275320" y="3794760"/>
+            <a:ext cx="0" cy="1737360"/>
+          </a:xfrm>
+          <a:prstGeom prst="line">
+            <a:avLst/>
+          </a:prstGeom>
+          <a:ln w="7620">
+            <a:solidFill>
+              <a:srgbClr val="2E4756"/>
+            </a:solidFill>
+          </a:ln>
+          <a:effectLst/>
+        </p:spPr>
+      </p:cxnSp>
+      <p:sp>
+        <p:nvSpPr>
+          <p:cNvPr id="37" name="C1-E14 text 35" descr="sci-ppt:o035"/>
+          <p:cNvSpPr txBox="1"/>
+          <p:nvPr/>
+        </p:nvSpPr>
+        <p:spPr>
+          <a:xfrm>
+            <a:off x="7818120" y="5614416"/>
+            <a:ext cx="914400" cy="208407"/>
+          </a:xfrm>
+          <a:prstGeom prst="rect">
+            <a:avLst/>
+          </a:prstGeom>
+          <a:noFill/>
+          <a:effectLst/>
+        </p:spPr>
+        <p:txBody>
+          <a:bodyPr wrap="none" lIns="18288" rIns="18288" tIns="18288" bIns="18288" anchor="t">
+            <a:spAutoFit/>
+          </a:bodyPr>
+          <a:lstStyle/>
+          <a:p>
+            <a:pPr algn="ctr">
+              <a:spcAft>
+                <a:spcPts val="0"/>
+              </a:spcAft>
+            </a:pPr>
+            <a:r>
+              <a:rPr sz="1050" b="0" i="0">
+                <a:solidFill>
+                  <a:srgbClr val="B4C7D2"/>
+                </a:solidFill>
+                <a:latin typeface="Arial"/>
+              </a:rPr>
+              <a:t>0.25</a:t>
+            </a:r>
+          </a:p>
+        </p:txBody>
+      </p:sp>
+      <p:cxnSp>
+        <p:nvCxnSpPr>
+          <p:cNvPr id="38" name="C1-E14 line 36" descr="sci-ppt:o036"/>
+          <p:cNvCxnSpPr/>
+          <p:nvPr/>
+        </p:nvCxnSpPr>
+        <p:spPr>
+          <a:xfrm>
+            <a:off x="9418320" y="5532120"/>
+            <a:ext cx="0" cy="64008"/>
+          </a:xfrm>
+          <a:prstGeom prst="line">
+            <a:avLst/>
+          </a:prstGeom>
+          <a:ln w="12700">
+            <a:solidFill>
+              <a:srgbClr val="B4C7D2"/>
+            </a:solidFill>
+          </a:ln>
+          <a:effectLst/>
+        </p:spPr>
+      </p:cxnSp>
+      <p:cxnSp>
+        <p:nvCxnSpPr>
+          <p:cNvPr id="39" name="C1-E14 line 37" descr="sci-ppt:o037"/>
+          <p:cNvCxnSpPr/>
+          <p:nvPr/>
+        </p:nvCxnSpPr>
+        <p:spPr>
+          <a:xfrm>
+            <a:off x="9418320" y="3794760"/>
+            <a:ext cx="0" cy="1737360"/>
+          </a:xfrm>
+          <a:prstGeom prst="line">
+            <a:avLst/>
+          </a:prstGeom>
+          <a:ln w="7620">
+            <a:solidFill>
+              <a:srgbClr val="2E4756"/>
+            </a:solidFill>
+          </a:ln>
+          <a:effectLst/>
+        </p:spPr>
+      </p:cxnSp>
+      <p:sp>
+        <p:nvSpPr>
+          <p:cNvPr id="40" name="C1-E14 text 38" descr="sci-ppt:o038"/>
+          <p:cNvSpPr txBox="1"/>
+          <p:nvPr/>
+        </p:nvSpPr>
+        <p:spPr>
+          <a:xfrm>
+            <a:off x="8961120" y="5614416"/>
+            <a:ext cx="914400" cy="208407"/>
+          </a:xfrm>
+          <a:prstGeom prst="rect">
+            <a:avLst/>
+          </a:prstGeom>
+          <a:noFill/>
+          <a:effectLst/>
+        </p:spPr>
+        <p:txBody>
+          <a:bodyPr wrap="none" lIns="18288" rIns="18288" tIns="18288" bIns="18288" anchor="t">
+            <a:spAutoFit/>
+          </a:bodyPr>
+          <a:lstStyle/>
+          <a:p>
+            <a:pPr algn="ctr">
+              <a:spcAft>
+                <a:spcPts val="0"/>
+              </a:spcAft>
+            </a:pPr>
+            <a:r>
+              <a:rPr sz="1050" b="0" i="0">
+                <a:solidFill>
+                  <a:srgbClr val="B4C7D2"/>
+                </a:solidFill>
+                <a:latin typeface="Arial"/>
+              </a:rPr>
+              <a:t>0.50</a:t>
+            </a:r>
+          </a:p>
+        </p:txBody>
+      </p:sp>
+      <p:cxnSp>
+        <p:nvCxnSpPr>
+          <p:cNvPr id="41" name="C1-E14 line 39" descr="sci-ppt:o039"/>
+          <p:cNvCxnSpPr/>
+          <p:nvPr/>
+        </p:nvCxnSpPr>
+        <p:spPr>
+          <a:xfrm>
+            <a:off x="10561320" y="5532120"/>
+            <a:ext cx="0" cy="64008"/>
+          </a:xfrm>
+          <a:prstGeom prst="line">
+            <a:avLst/>
+          </a:prstGeom>
+          <a:ln w="12700">
+            <a:solidFill>
+              <a:srgbClr val="B4C7D2"/>
+            </a:solidFill>
+          </a:ln>
+          <a:effectLst/>
+        </p:spPr>
+      </p:cxnSp>
+      <p:cxnSp>
+        <p:nvCxnSpPr>
+          <p:cNvPr id="42" name="C1-E14 line 40" descr="sci-ppt:o040"/>
+          <p:cNvCxnSpPr/>
+          <p:nvPr/>
+        </p:nvCxnSpPr>
+        <p:spPr>
+          <a:xfrm>
+            <a:off x="10561320" y="3794760"/>
+            <a:ext cx="0" cy="1737360"/>
+          </a:xfrm>
+          <a:prstGeom prst="line">
+            <a:avLst/>
+          </a:prstGeom>
+          <a:ln w="7620">
+            <a:solidFill>
+              <a:srgbClr val="2E4756"/>
+            </a:solidFill>
+          </a:ln>
+          <a:effectLst/>
+        </p:spPr>
+      </p:cxnSp>
+      <p:sp>
+        <p:nvSpPr>
+          <p:cNvPr id="43" name="C1-E14 text 41" descr="sci-ppt:o041"/>
+          <p:cNvSpPr txBox="1"/>
+          <p:nvPr/>
+        </p:nvSpPr>
+        <p:spPr>
+          <a:xfrm>
+            <a:off x="10104120" y="5614416"/>
+            <a:ext cx="914400" cy="208407"/>
+          </a:xfrm>
+          <a:prstGeom prst="rect">
+            <a:avLst/>
+          </a:prstGeom>
+          <a:noFill/>
+          <a:effectLst/>
+        </p:spPr>
+        <p:txBody>
+          <a:bodyPr wrap="none" lIns="18288" rIns="18288" tIns="18288" bIns="18288" anchor="t">
+            <a:spAutoFit/>
+          </a:bodyPr>
+          <a:lstStyle/>
+          <a:p>
+            <a:pPr algn="ctr">
+              <a:spcAft>
+                <a:spcPts val="0"/>
+              </a:spcAft>
+            </a:pPr>
+            <a:r>
+              <a:rPr sz="1050" b="0" i="0">
+                <a:solidFill>
+                  <a:srgbClr val="B4C7D2"/>
+                </a:solidFill>
+                <a:latin typeface="Arial"/>
+              </a:rPr>
+              <a:t>0.75</a:t>
+            </a:r>
+          </a:p>
+        </p:txBody>
+      </p:sp>
+      <p:cxnSp>
+        <p:nvCxnSpPr>
+          <p:cNvPr id="44" name="C1-E14 line 42" descr="sci-ppt:o042"/>
+          <p:cNvCxnSpPr/>
+          <p:nvPr/>
+        </p:nvCxnSpPr>
+        <p:spPr>
+          <a:xfrm>
+            <a:off x="11704320" y="5532120"/>
+            <a:ext cx="0" cy="64008"/>
+          </a:xfrm>
+          <a:prstGeom prst="line">
+            <a:avLst/>
+          </a:prstGeom>
+          <a:ln w="12700">
+            <a:solidFill>
+              <a:srgbClr val="B4C7D2"/>
+            </a:solidFill>
+          </a:ln>
+          <a:effectLst/>
+        </p:spPr>
+      </p:cxnSp>
+      <p:cxnSp>
+        <p:nvCxnSpPr>
+          <p:cNvPr id="45" name="C1-E14 line 43" descr="sci-ppt:o043"/>
+          <p:cNvCxnSpPr/>
+          <p:nvPr/>
+        </p:nvCxnSpPr>
+        <p:spPr>
+          <a:xfrm>
+            <a:off x="11704320" y="3794760"/>
+            <a:ext cx="0" cy="1737360"/>
+          </a:xfrm>
+          <a:prstGeom prst="line">
+            <a:avLst/>
+          </a:prstGeom>
+          <a:ln w="7620">
+            <a:solidFill>
+              <a:srgbClr val="2E4756"/>
+            </a:solidFill>
+          </a:ln>
+          <a:effectLst/>
+        </p:spPr>
+      </p:cxnSp>
+      <p:sp>
+        <p:nvSpPr>
+          <p:cNvPr id="46" name="C1-E14 text 44" descr="sci-ppt:o044"/>
+          <p:cNvSpPr txBox="1"/>
+          <p:nvPr/>
+        </p:nvSpPr>
+        <p:spPr>
+          <a:xfrm>
+            <a:off x="11247120" y="5614416"/>
+            <a:ext cx="914400" cy="208407"/>
+          </a:xfrm>
+          <a:prstGeom prst="rect">
+            <a:avLst/>
+          </a:prstGeom>
+          <a:noFill/>
+          <a:effectLst/>
+        </p:spPr>
+        <p:txBody>
+          <a:bodyPr wrap="none" lIns="18288" rIns="18288" tIns="18288" bIns="18288" anchor="t">
+            <a:spAutoFit/>
+          </a:bodyPr>
+          <a:lstStyle/>
+          <a:p>
+            <a:pPr algn="ctr">
+              <a:spcAft>
+                <a:spcPts val="0"/>
+              </a:spcAft>
+            </a:pPr>
+            <a:r>
+              <a:rPr sz="1050" b="0" i="0">
+                <a:solidFill>
+                  <a:srgbClr val="B4C7D2"/>
+                </a:solidFill>
+                <a:latin typeface="Arial"/>
+              </a:rPr>
+              <a:t>1.00</a:t>
+            </a:r>
+          </a:p>
+        </p:txBody>
+      </p:sp>
+      <p:cxnSp>
+        <p:nvCxnSpPr>
+          <p:cNvPr id="47" name="C1-E14 line 45" descr="sci-ppt:o045"/>
+          <p:cNvCxnSpPr/>
+          <p:nvPr/>
+        </p:nvCxnSpPr>
+        <p:spPr>
+          <a:xfrm>
+            <a:off x="7068312" y="5532120"/>
+            <a:ext cx="64008" cy="0"/>
+          </a:xfrm>
+          <a:prstGeom prst="line">
+            <a:avLst/>
+          </a:prstGeom>
+          <a:ln w="12700">
+            <a:solidFill>
+              <a:srgbClr val="B4C7D2"/>
+            </a:solidFill>
+          </a:ln>
+          <a:effectLst/>
+        </p:spPr>
+      </p:cxnSp>
+      <p:cxnSp>
+        <p:nvCxnSpPr>
+          <p:cNvPr id="48" name="C1-E14 line 46" descr="sci-ppt:o046"/>
+          <p:cNvCxnSpPr/>
+          <p:nvPr/>
+        </p:nvCxnSpPr>
+        <p:spPr>
+          <a:xfrm>
+            <a:off x="7068312" y="4742410"/>
+            <a:ext cx="64008" cy="0"/>
+          </a:xfrm>
+          <a:prstGeom prst="line">
+            <a:avLst/>
+          </a:prstGeom>
+          <a:ln w="12700">
+            <a:solidFill>
+              <a:srgbClr val="B4C7D2"/>
+            </a:solidFill>
+          </a:ln>
+          <a:effectLst/>
+        </p:spPr>
+      </p:cxnSp>
+      <p:cxnSp>
+        <p:nvCxnSpPr>
+          <p:cNvPr id="49" name="C1-E14 line 47" descr="sci-ppt:o047"/>
+          <p:cNvCxnSpPr/>
+          <p:nvPr/>
+        </p:nvCxnSpPr>
+        <p:spPr>
+          <a:xfrm>
+            <a:off x="7132320" y="4742410"/>
+            <a:ext cx="4572000" cy="0"/>
+          </a:xfrm>
+          <a:prstGeom prst="line">
+            <a:avLst/>
+          </a:prstGeom>
+          <a:ln w="7620">
+            <a:solidFill>
+              <a:srgbClr val="2E4756"/>
+            </a:solidFill>
+          </a:ln>
+          <a:effectLst/>
+        </p:spPr>
+      </p:cxnSp>
+      <p:sp>
+        <p:nvSpPr>
+          <p:cNvPr id="50" name="C1-E14 text 48" descr="sci-ppt:o048"/>
+          <p:cNvSpPr txBox="1"/>
+          <p:nvPr/>
+        </p:nvSpPr>
+        <p:spPr>
+          <a:xfrm>
+            <a:off x="6263640" y="4660114"/>
+            <a:ext cx="777240" cy="208407"/>
+          </a:xfrm>
+          <a:prstGeom prst="rect">
+            <a:avLst/>
+          </a:prstGeom>
+          <a:noFill/>
+          <a:effectLst/>
+        </p:spPr>
+        <p:txBody>
+          <a:bodyPr wrap="none" lIns="18288" rIns="18288" tIns="18288" bIns="18288" anchor="t">
+            <a:spAutoFit/>
+          </a:bodyPr>
+          <a:lstStyle/>
+          <a:p>
+            <a:pPr algn="r">
+              <a:spcAft>
+                <a:spcPts val="0"/>
+              </a:spcAft>
+            </a:pPr>
+            <a:r>
+              <a:rPr sz="1050" b="0" i="0">
+                <a:solidFill>
+                  <a:srgbClr val="B4C7D2"/>
+                </a:solidFill>
+                <a:latin typeface="Arial"/>
+              </a:rPr>
+              <a:t>0.5</a:t>
+            </a:r>
+          </a:p>
+        </p:txBody>
+      </p:sp>
+      <p:cxnSp>
+        <p:nvCxnSpPr>
+          <p:cNvPr id="51" name="C1-E14 line 49" descr="sci-ppt:o049"/>
+          <p:cNvCxnSpPr/>
+          <p:nvPr/>
+        </p:nvCxnSpPr>
+        <p:spPr>
+          <a:xfrm>
+            <a:off x="7068312" y="3952701"/>
+            <a:ext cx="64008" cy="0"/>
+          </a:xfrm>
+          <a:prstGeom prst="line">
+            <a:avLst/>
+          </a:prstGeom>
+          <a:ln w="12700">
+            <a:solidFill>
+              <a:srgbClr val="B4C7D2"/>
+            </a:solidFill>
+          </a:ln>
+          <a:effectLst/>
+        </p:spPr>
+      </p:cxnSp>
+      <p:cxnSp>
+        <p:nvCxnSpPr>
+          <p:cNvPr id="52" name="C1-E14 line 50" descr="sci-ppt:o050"/>
+          <p:cNvCxnSpPr/>
+          <p:nvPr/>
+        </p:nvCxnSpPr>
+        <p:spPr>
+          <a:xfrm>
+            <a:off x="7132320" y="3952701"/>
+            <a:ext cx="4572000" cy="0"/>
+          </a:xfrm>
+          <a:prstGeom prst="line">
+            <a:avLst/>
+          </a:prstGeom>
+          <a:ln w="7620">
+            <a:solidFill>
+              <a:srgbClr val="2E4756"/>
+            </a:solidFill>
+          </a:ln>
+          <a:effectLst/>
+        </p:spPr>
+      </p:cxnSp>
+      <p:sp>
+        <p:nvSpPr>
+          <p:cNvPr id="53" name="C1-E14 text 51" descr="sci-ppt:o051"/>
+          <p:cNvSpPr txBox="1"/>
+          <p:nvPr/>
+        </p:nvSpPr>
+        <p:spPr>
+          <a:xfrm>
+            <a:off x="6263640" y="3870405"/>
+            <a:ext cx="777240" cy="208407"/>
+          </a:xfrm>
+          <a:prstGeom prst="rect">
+            <a:avLst/>
+          </a:prstGeom>
+          <a:noFill/>
+          <a:effectLst/>
+        </p:spPr>
+        <p:txBody>
+          <a:bodyPr wrap="none" lIns="18288" rIns="18288" tIns="18288" bIns="18288" anchor="t">
+            <a:spAutoFit/>
+          </a:bodyPr>
+          <a:lstStyle/>
+          <a:p>
+            <a:pPr algn="r">
+              <a:spcAft>
+                <a:spcPts val="0"/>
+              </a:spcAft>
+            </a:pPr>
+            <a:r>
+              <a:rPr sz="1050" b="0" i="0">
+                <a:solidFill>
+                  <a:srgbClr val="B4C7D2"/>
+                </a:solidFill>
+                <a:latin typeface="Arial"/>
+              </a:rPr>
+              <a:t>1.0</a:t>
+            </a:r>
+          </a:p>
+        </p:txBody>
+      </p:sp>
+      <p:sp>
+        <p:nvSpPr>
+          <p:cNvPr id="54" name="C1-E14 text 52" descr="sci-ppt:o052"/>
+          <p:cNvSpPr txBox="1"/>
+          <p:nvPr/>
+        </p:nvSpPr>
+        <p:spPr>
+          <a:xfrm>
+            <a:off x="7132320" y="5815584"/>
+            <a:ext cx="4572000" cy="231648"/>
+          </a:xfrm>
+          <a:prstGeom prst="rect">
+            <a:avLst/>
+          </a:prstGeom>
+          <a:noFill/>
+          <a:effectLst/>
+        </p:spPr>
+        <p:txBody>
+          <a:bodyPr wrap="none" lIns="18288" rIns="18288" tIns="18288" bIns="18288" anchor="t">
+            <a:spAutoFit/>
+          </a:bodyPr>
+          <a:lstStyle/>
+          <a:p>
+            <a:pPr algn="ctr">
+              <a:spcAft>
+                <a:spcPts val="0"/>
+              </a:spcAft>
+            </a:pPr>
+            <a:r>
+              <a:rPr sz="1200" b="0" i="0">
                 <a:solidFill>
                   <a:srgbClr val="E7F0F3"/>
                 </a:solidFill>
                 <a:latin typeface="Arial"/>
               </a:rPr>
-              <a:t>p_b</a:t>
-            </a:r>
-          </a:p>
-        </p:txBody>
-      </p:sp>
-      <p:sp>
-        <p:nvSpPr>
-          <p:cNvPr id="7" name="text6" descr="sci-ppt:C1-E14-006"/>
+              <a:t>x = R / Rₘₐₓ</a:t>
+            </a:r>
+          </a:p>
+        </p:txBody>
+      </p:sp>
+      <p:sp>
+        <p:nvSpPr>
+          <p:cNvPr id="55" name="C1-E14 text 53" descr="sci-ppt:o053"/>
           <p:cNvSpPr txBox="1"/>
           <p:nvPr/>
         </p:nvSpPr>
         <p:spPr>
           <a:xfrm>
-            <a:off x="5242560" y="1524000"/>
-            <a:ext cx="4876800" cy="415747"/>
+            <a:off x="6583680" y="3447288"/>
+            <a:ext cx="4572000" cy="231648"/>
           </a:xfrm>
           <a:prstGeom prst="rect">
             <a:avLst/>
@@ -3290,7 +5073,7 @@
           <a:effectLst/>
         </p:spPr>
         <p:txBody>
-          <a:bodyPr wrap="none" lIns="27432" rIns="27432" tIns="18288" bIns="18288" anchor="ctr">
+          <a:bodyPr wrap="none" lIns="18288" rIns="18288" tIns="18288" bIns="18288" anchor="t">
             <a:spAutoFit/>
           </a:bodyPr>
           <a:lstStyle/>
@@ -3301,27 +5084,688 @@
               </a:spcAft>
             </a:pPr>
             <a:r>
-              <a:rPr sz="2111" b="0" i="0">
+              <a:rPr sz="1200" b="0" i="0">
                 <a:solidFill>
                   <a:srgbClr val="E7F0F3"/>
                 </a:solidFill>
                 <a:latin typeface="Arial"/>
               </a:rPr>
-              <a:t>Surrounding liquid</a:t>
-            </a:r>
-          </a:p>
-        </p:txBody>
-      </p:sp>
-      <p:sp>
-        <p:nvSpPr>
-          <p:cNvPr id="8" name="text7" descr="sci-ppt:C1-E14-007"/>
+              <a:t>R³y (scaled)</a:t>
+            </a:r>
+          </a:p>
+        </p:txBody>
+      </p:sp>
+      <p:sp>
+        <p:nvSpPr>
+          <p:cNvPr id="56" name="C1-E14 polygon 54" descr="sci-ppt:o054"/>
+          <p:cNvSpPr/>
+          <p:nvPr/>
+        </p:nvSpPr>
+        <p:spPr>
+          <a:xfrm>
+            <a:off x="7132320" y="3952701"/>
+            <a:ext cx="4572000" cy="1579419"/>
+          </a:xfrm>
+          <a:custGeom>
+            <a:avLst/>
+            <a:gdLst/>
+            <a:ahLst/>
+            <a:cxnLst/>
+            <a:rect l="l" t="t" r="r" b="b"/>
+            <a:pathLst>
+              <a:path w="4572000" h="1579419">
+                <a:moveTo>
+                  <a:pt x="0" y="0"/>
+                </a:moveTo>
+                <a:lnTo>
+                  <a:pt x="22974" y="1"/>
+                </a:lnTo>
+                <a:lnTo>
+                  <a:pt x="45949" y="2"/>
+                </a:lnTo>
+                <a:lnTo>
+                  <a:pt x="68924" y="6"/>
+                </a:lnTo>
+                <a:lnTo>
+                  <a:pt x="91899" y="13"/>
+                </a:lnTo>
+                <a:lnTo>
+                  <a:pt x="114874" y="25"/>
+                </a:lnTo>
+                <a:lnTo>
+                  <a:pt x="137849" y="44"/>
+                </a:lnTo>
+                <a:lnTo>
+                  <a:pt x="160824" y="69"/>
+                </a:lnTo>
+                <a:lnTo>
+                  <a:pt x="183798" y="103"/>
+                </a:lnTo>
+                <a:lnTo>
+                  <a:pt x="206773" y="146"/>
+                </a:lnTo>
+                <a:lnTo>
+                  <a:pt x="229748" y="201"/>
+                </a:lnTo>
+                <a:lnTo>
+                  <a:pt x="252723" y="267"/>
+                </a:lnTo>
+                <a:lnTo>
+                  <a:pt x="275698" y="347"/>
+                </a:lnTo>
+                <a:lnTo>
+                  <a:pt x="298673" y="441"/>
+                </a:lnTo>
+                <a:lnTo>
+                  <a:pt x="321648" y="550"/>
+                </a:lnTo>
+                <a:lnTo>
+                  <a:pt x="344623" y="677"/>
+                </a:lnTo>
+                <a:lnTo>
+                  <a:pt x="367597" y="821"/>
+                </a:lnTo>
+                <a:lnTo>
+                  <a:pt x="390572" y="985"/>
+                </a:lnTo>
+                <a:lnTo>
+                  <a:pt x="413547" y="1169"/>
+                </a:lnTo>
+                <a:lnTo>
+                  <a:pt x="436522" y="1375"/>
+                </a:lnTo>
+                <a:lnTo>
+                  <a:pt x="459497" y="1604"/>
+                </a:lnTo>
+                <a:lnTo>
+                  <a:pt x="482472" y="1856"/>
+                </a:lnTo>
+                <a:lnTo>
+                  <a:pt x="505447" y="2134"/>
+                </a:lnTo>
+                <a:lnTo>
+                  <a:pt x="528422" y="2439"/>
+                </a:lnTo>
+                <a:lnTo>
+                  <a:pt x="551396" y="2771"/>
+                </a:lnTo>
+                <a:lnTo>
+                  <a:pt x="574371" y="3132"/>
+                </a:lnTo>
+                <a:lnTo>
+                  <a:pt x="597346" y="3523"/>
+                </a:lnTo>
+                <a:lnTo>
+                  <a:pt x="620321" y="3945"/>
+                </a:lnTo>
+                <a:lnTo>
+                  <a:pt x="643296" y="4400"/>
+                </a:lnTo>
+                <a:lnTo>
+                  <a:pt x="666271" y="4888"/>
+                </a:lnTo>
+                <a:lnTo>
+                  <a:pt x="689246" y="5412"/>
+                </a:lnTo>
+                <a:lnTo>
+                  <a:pt x="712221" y="5971"/>
+                </a:lnTo>
+                <a:lnTo>
+                  <a:pt x="735195" y="6568"/>
+                </a:lnTo>
+                <a:lnTo>
+                  <a:pt x="758170" y="7203"/>
+                </a:lnTo>
+                <a:lnTo>
+                  <a:pt x="781145" y="7878"/>
+                </a:lnTo>
+                <a:lnTo>
+                  <a:pt x="804120" y="8593"/>
+                </a:lnTo>
+                <a:lnTo>
+                  <a:pt x="827095" y="9351"/>
+                </a:lnTo>
+                <a:lnTo>
+                  <a:pt x="850070" y="10152"/>
+                </a:lnTo>
+                <a:lnTo>
+                  <a:pt x="873045" y="10998"/>
+                </a:lnTo>
+                <a:lnTo>
+                  <a:pt x="896020" y="11889"/>
+                </a:lnTo>
+                <a:lnTo>
+                  <a:pt x="918994" y="12827"/>
+                </a:lnTo>
+                <a:lnTo>
+                  <a:pt x="941969" y="13813"/>
+                </a:lnTo>
+                <a:lnTo>
+                  <a:pt x="964944" y="14849"/>
+                </a:lnTo>
+                <a:lnTo>
+                  <a:pt x="987919" y="15935"/>
+                </a:lnTo>
+                <a:lnTo>
+                  <a:pt x="1010894" y="17073"/>
+                </a:lnTo>
+                <a:lnTo>
+                  <a:pt x="1033869" y="18263"/>
+                </a:lnTo>
+                <a:lnTo>
+                  <a:pt x="1056844" y="19508"/>
+                </a:lnTo>
+                <a:lnTo>
+                  <a:pt x="1079819" y="20808"/>
+                </a:lnTo>
+                <a:lnTo>
+                  <a:pt x="1102793" y="22165"/>
+                </a:lnTo>
+                <a:lnTo>
+                  <a:pt x="1125768" y="23579"/>
+                </a:lnTo>
+                <a:lnTo>
+                  <a:pt x="1148743" y="25053"/>
+                </a:lnTo>
+                <a:lnTo>
+                  <a:pt x="1171718" y="26586"/>
+                </a:lnTo>
+                <a:lnTo>
+                  <a:pt x="1194693" y="28181"/>
+                </a:lnTo>
+                <a:lnTo>
+                  <a:pt x="1217668" y="29838"/>
+                </a:lnTo>
+                <a:lnTo>
+                  <a:pt x="1240643" y="31559"/>
+                </a:lnTo>
+                <a:lnTo>
+                  <a:pt x="1263618" y="33345"/>
+                </a:lnTo>
+                <a:lnTo>
+                  <a:pt x="1286592" y="35197"/>
+                </a:lnTo>
+                <a:lnTo>
+                  <a:pt x="1309567" y="37116"/>
+                </a:lnTo>
+                <a:lnTo>
+                  <a:pt x="1332542" y="39104"/>
+                </a:lnTo>
+                <a:lnTo>
+                  <a:pt x="1355517" y="41162"/>
+                </a:lnTo>
+                <a:lnTo>
+                  <a:pt x="1378492" y="43291"/>
+                </a:lnTo>
+                <a:lnTo>
+                  <a:pt x="1401467" y="45492"/>
+                </a:lnTo>
+                <a:lnTo>
+                  <a:pt x="1424442" y="47766"/>
+                </a:lnTo>
+                <a:lnTo>
+                  <a:pt x="1447417" y="50114"/>
+                </a:lnTo>
+                <a:lnTo>
+                  <a:pt x="1470391" y="52539"/>
+                </a:lnTo>
+                <a:lnTo>
+                  <a:pt x="1493366" y="55040"/>
+                </a:lnTo>
+                <a:lnTo>
+                  <a:pt x="1516341" y="57620"/>
+                </a:lnTo>
+                <a:lnTo>
+                  <a:pt x="1539316" y="60279"/>
+                </a:lnTo>
+                <a:lnTo>
+                  <a:pt x="1562291" y="63018"/>
+                </a:lnTo>
+                <a:lnTo>
+                  <a:pt x="1585266" y="65840"/>
+                </a:lnTo>
+                <a:lnTo>
+                  <a:pt x="1608241" y="68744"/>
+                </a:lnTo>
+                <a:lnTo>
+                  <a:pt x="1631216" y="71732"/>
+                </a:lnTo>
+                <a:lnTo>
+                  <a:pt x="1654190" y="74806"/>
+                </a:lnTo>
+                <a:lnTo>
+                  <a:pt x="1677165" y="77967"/>
+                </a:lnTo>
+                <a:lnTo>
+                  <a:pt x="1700140" y="81215"/>
+                </a:lnTo>
+                <a:lnTo>
+                  <a:pt x="1723115" y="84552"/>
+                </a:lnTo>
+                <a:lnTo>
+                  <a:pt x="1746090" y="87979"/>
+                </a:lnTo>
+                <a:lnTo>
+                  <a:pt x="1769065" y="91498"/>
+                </a:lnTo>
+                <a:lnTo>
+                  <a:pt x="1792040" y="95109"/>
+                </a:lnTo>
+                <a:lnTo>
+                  <a:pt x="1815015" y="98814"/>
+                </a:lnTo>
+                <a:lnTo>
+                  <a:pt x="1837989" y="102615"/>
+                </a:lnTo>
+                <a:lnTo>
+                  <a:pt x="1860964" y="106511"/>
+                </a:lnTo>
+                <a:lnTo>
+                  <a:pt x="1883939" y="110505"/>
+                </a:lnTo>
+                <a:lnTo>
+                  <a:pt x="1906914" y="114597"/>
+                </a:lnTo>
+                <a:lnTo>
+                  <a:pt x="1929889" y="118789"/>
+                </a:lnTo>
+                <a:lnTo>
+                  <a:pt x="1952864" y="123082"/>
+                </a:lnTo>
+                <a:lnTo>
+                  <a:pt x="1975839" y="127478"/>
+                </a:lnTo>
+                <a:lnTo>
+                  <a:pt x="1998814" y="131977"/>
+                </a:lnTo>
+                <a:lnTo>
+                  <a:pt x="2021788" y="136580"/>
+                </a:lnTo>
+                <a:lnTo>
+                  <a:pt x="2044763" y="141289"/>
+                </a:lnTo>
+                <a:lnTo>
+                  <a:pt x="2067738" y="146105"/>
+                </a:lnTo>
+                <a:lnTo>
+                  <a:pt x="2090713" y="151030"/>
+                </a:lnTo>
+                <a:lnTo>
+                  <a:pt x="2113688" y="156064"/>
+                </a:lnTo>
+                <a:lnTo>
+                  <a:pt x="2136663" y="161208"/>
+                </a:lnTo>
+                <a:lnTo>
+                  <a:pt x="2159638" y="166465"/>
+                </a:lnTo>
+                <a:lnTo>
+                  <a:pt x="2182613" y="171834"/>
+                </a:lnTo>
+                <a:lnTo>
+                  <a:pt x="2205587" y="177318"/>
+                </a:lnTo>
+                <a:lnTo>
+                  <a:pt x="2228562" y="182917"/>
+                </a:lnTo>
+                <a:lnTo>
+                  <a:pt x="2251537" y="188633"/>
+                </a:lnTo>
+                <a:lnTo>
+                  <a:pt x="2274512" y="194466"/>
+                </a:lnTo>
+                <a:lnTo>
+                  <a:pt x="2297487" y="200419"/>
+                </a:lnTo>
+                <a:lnTo>
+                  <a:pt x="2320462" y="206492"/>
+                </a:lnTo>
+                <a:lnTo>
+                  <a:pt x="2343437" y="212686"/>
+                </a:lnTo>
+                <a:lnTo>
+                  <a:pt x="2366412" y="219003"/>
+                </a:lnTo>
+                <a:lnTo>
+                  <a:pt x="2389386" y="225444"/>
+                </a:lnTo>
+                <a:lnTo>
+                  <a:pt x="2412361" y="232010"/>
+                </a:lnTo>
+                <a:lnTo>
+                  <a:pt x="2435336" y="238702"/>
+                </a:lnTo>
+                <a:lnTo>
+                  <a:pt x="2458311" y="245522"/>
+                </a:lnTo>
+                <a:lnTo>
+                  <a:pt x="2481286" y="252470"/>
+                </a:lnTo>
+                <a:lnTo>
+                  <a:pt x="2504261" y="259548"/>
+                </a:lnTo>
+                <a:lnTo>
+                  <a:pt x="2527236" y="266757"/>
+                </a:lnTo>
+                <a:lnTo>
+                  <a:pt x="2550211" y="274099"/>
+                </a:lnTo>
+                <a:lnTo>
+                  <a:pt x="2573185" y="281574"/>
+                </a:lnTo>
+                <a:lnTo>
+                  <a:pt x="2596160" y="289184"/>
+                </a:lnTo>
+                <a:lnTo>
+                  <a:pt x="2619135" y="296929"/>
+                </a:lnTo>
+                <a:lnTo>
+                  <a:pt x="2642110" y="304812"/>
+                </a:lnTo>
+                <a:lnTo>
+                  <a:pt x="2665085" y="312833"/>
+                </a:lnTo>
+                <a:lnTo>
+                  <a:pt x="2688060" y="320993"/>
+                </a:lnTo>
+                <a:lnTo>
+                  <a:pt x="2711035" y="329294"/>
+                </a:lnTo>
+                <a:lnTo>
+                  <a:pt x="2734010" y="337737"/>
+                </a:lnTo>
+                <a:lnTo>
+                  <a:pt x="2756984" y="346324"/>
+                </a:lnTo>
+                <a:lnTo>
+                  <a:pt x="2779959" y="355054"/>
+                </a:lnTo>
+                <a:lnTo>
+                  <a:pt x="2802934" y="363930"/>
+                </a:lnTo>
+                <a:lnTo>
+                  <a:pt x="2825909" y="372953"/>
+                </a:lnTo>
+                <a:lnTo>
+                  <a:pt x="2848884" y="382123"/>
+                </a:lnTo>
+                <a:lnTo>
+                  <a:pt x="2871859" y="391443"/>
+                </a:lnTo>
+                <a:lnTo>
+                  <a:pt x="2894834" y="400913"/>
+                </a:lnTo>
+                <a:lnTo>
+                  <a:pt x="2917809" y="410534"/>
+                </a:lnTo>
+                <a:lnTo>
+                  <a:pt x="2940783" y="420308"/>
+                </a:lnTo>
+                <a:lnTo>
+                  <a:pt x="2963758" y="430237"/>
+                </a:lnTo>
+                <a:lnTo>
+                  <a:pt x="2986733" y="440320"/>
+                </a:lnTo>
+                <a:lnTo>
+                  <a:pt x="3009708" y="450559"/>
+                </a:lnTo>
+                <a:lnTo>
+                  <a:pt x="3032683" y="460957"/>
+                </a:lnTo>
+                <a:lnTo>
+                  <a:pt x="3055658" y="471512"/>
+                </a:lnTo>
+                <a:lnTo>
+                  <a:pt x="3078633" y="482228"/>
+                </a:lnTo>
+                <a:lnTo>
+                  <a:pt x="3101608" y="493105"/>
+                </a:lnTo>
+                <a:lnTo>
+                  <a:pt x="3124582" y="504144"/>
+                </a:lnTo>
+                <a:lnTo>
+                  <a:pt x="3147557" y="515347"/>
+                </a:lnTo>
+                <a:lnTo>
+                  <a:pt x="3170532" y="526715"/>
+                </a:lnTo>
+                <a:lnTo>
+                  <a:pt x="3193507" y="538248"/>
+                </a:lnTo>
+                <a:lnTo>
+                  <a:pt x="3216482" y="549949"/>
+                </a:lnTo>
+                <a:lnTo>
+                  <a:pt x="3239457" y="561818"/>
+                </a:lnTo>
+                <a:lnTo>
+                  <a:pt x="3262432" y="573856"/>
+                </a:lnTo>
+                <a:lnTo>
+                  <a:pt x="3285407" y="586066"/>
+                </a:lnTo>
+                <a:lnTo>
+                  <a:pt x="3308381" y="598447"/>
+                </a:lnTo>
+                <a:lnTo>
+                  <a:pt x="3331356" y="611001"/>
+                </a:lnTo>
+                <a:lnTo>
+                  <a:pt x="3354331" y="623730"/>
+                </a:lnTo>
+                <a:lnTo>
+                  <a:pt x="3377306" y="636634"/>
+                </a:lnTo>
+                <a:lnTo>
+                  <a:pt x="3400281" y="649716"/>
+                </a:lnTo>
+                <a:lnTo>
+                  <a:pt x="3423256" y="662975"/>
+                </a:lnTo>
+                <a:lnTo>
+                  <a:pt x="3446231" y="676413"/>
+                </a:lnTo>
+                <a:lnTo>
+                  <a:pt x="3469206" y="690032"/>
+                </a:lnTo>
+                <a:lnTo>
+                  <a:pt x="3492180" y="703832"/>
+                </a:lnTo>
+                <a:lnTo>
+                  <a:pt x="3515155" y="717815"/>
+                </a:lnTo>
+                <a:lnTo>
+                  <a:pt x="3538130" y="731982"/>
+                </a:lnTo>
+                <a:lnTo>
+                  <a:pt x="3561105" y="746334"/>
+                </a:lnTo>
+                <a:lnTo>
+                  <a:pt x="3584080" y="760872"/>
+                </a:lnTo>
+                <a:lnTo>
+                  <a:pt x="3607055" y="775599"/>
+                </a:lnTo>
+                <a:lnTo>
+                  <a:pt x="3630030" y="790514"/>
+                </a:lnTo>
+                <a:lnTo>
+                  <a:pt x="3653005" y="805619"/>
+                </a:lnTo>
+                <a:lnTo>
+                  <a:pt x="3675979" y="820915"/>
+                </a:lnTo>
+                <a:lnTo>
+                  <a:pt x="3698954" y="836403"/>
+                </a:lnTo>
+                <a:lnTo>
+                  <a:pt x="3721929" y="852085"/>
+                </a:lnTo>
+                <a:lnTo>
+                  <a:pt x="3744904" y="867962"/>
+                </a:lnTo>
+                <a:lnTo>
+                  <a:pt x="3767879" y="884035"/>
+                </a:lnTo>
+                <a:lnTo>
+                  <a:pt x="3790854" y="900305"/>
+                </a:lnTo>
+                <a:lnTo>
+                  <a:pt x="3813829" y="916774"/>
+                </a:lnTo>
+                <a:lnTo>
+                  <a:pt x="3836804" y="933442"/>
+                </a:lnTo>
+                <a:lnTo>
+                  <a:pt x="3859778" y="950311"/>
+                </a:lnTo>
+                <a:lnTo>
+                  <a:pt x="3882753" y="967382"/>
+                </a:lnTo>
+                <a:lnTo>
+                  <a:pt x="3905728" y="984657"/>
+                </a:lnTo>
+                <a:lnTo>
+                  <a:pt x="3928703" y="1002135"/>
+                </a:lnTo>
+                <a:lnTo>
+                  <a:pt x="3951678" y="1019820"/>
+                </a:lnTo>
+                <a:lnTo>
+                  <a:pt x="3974653" y="1037711"/>
+                </a:lnTo>
+                <a:lnTo>
+                  <a:pt x="3997628" y="1055810"/>
+                </a:lnTo>
+                <a:lnTo>
+                  <a:pt x="4020603" y="1074118"/>
+                </a:lnTo>
+                <a:lnTo>
+                  <a:pt x="4043577" y="1092637"/>
+                </a:lnTo>
+                <a:lnTo>
+                  <a:pt x="4066552" y="1111368"/>
+                </a:lnTo>
+                <a:lnTo>
+                  <a:pt x="4089527" y="1130311"/>
+                </a:lnTo>
+                <a:lnTo>
+                  <a:pt x="4112502" y="1149469"/>
+                </a:lnTo>
+                <a:lnTo>
+                  <a:pt x="4135477" y="1168841"/>
+                </a:lnTo>
+                <a:lnTo>
+                  <a:pt x="4158452" y="1188430"/>
+                </a:lnTo>
+                <a:lnTo>
+                  <a:pt x="4181427" y="1208237"/>
+                </a:lnTo>
+                <a:lnTo>
+                  <a:pt x="4204402" y="1228263"/>
+                </a:lnTo>
+                <a:lnTo>
+                  <a:pt x="4227376" y="1248508"/>
+                </a:lnTo>
+                <a:lnTo>
+                  <a:pt x="4250351" y="1268975"/>
+                </a:lnTo>
+                <a:lnTo>
+                  <a:pt x="4273326" y="1289665"/>
+                </a:lnTo>
+                <a:lnTo>
+                  <a:pt x="4296301" y="1310578"/>
+                </a:lnTo>
+                <a:lnTo>
+                  <a:pt x="4319276" y="1331716"/>
+                </a:lnTo>
+                <a:lnTo>
+                  <a:pt x="4342251" y="1353080"/>
+                </a:lnTo>
+                <a:lnTo>
+                  <a:pt x="4365226" y="1374671"/>
+                </a:lnTo>
+                <a:lnTo>
+                  <a:pt x="4388201" y="1396491"/>
+                </a:lnTo>
+                <a:lnTo>
+                  <a:pt x="4411175" y="1418540"/>
+                </a:lnTo>
+                <a:lnTo>
+                  <a:pt x="4434150" y="1440821"/>
+                </a:lnTo>
+                <a:lnTo>
+                  <a:pt x="4457125" y="1463333"/>
+                </a:lnTo>
+                <a:lnTo>
+                  <a:pt x="4480100" y="1486079"/>
+                </a:lnTo>
+                <a:lnTo>
+                  <a:pt x="4503075" y="1509059"/>
+                </a:lnTo>
+                <a:lnTo>
+                  <a:pt x="4526050" y="1532275"/>
+                </a:lnTo>
+                <a:lnTo>
+                  <a:pt x="4549025" y="1555728"/>
+                </a:lnTo>
+                <a:lnTo>
+                  <a:pt x="4572000" y="1579419"/>
+                </a:lnTo>
+              </a:path>
+            </a:pathLst>
+          </a:custGeom>
+          <a:noFill/>
+          <a:ln w="38100">
+            <a:solidFill>
+              <a:srgbClr val="8EDBD4"/>
+            </a:solidFill>
+          </a:ln>
+          <a:effectLst/>
+        </p:spPr>
+        <p:txBody>
+          <a:bodyPr rtlCol="0" anchor="ctr"/>
+          <a:lstStyle/>
+          <a:p>
+            <a:pPr algn="ctr"/>
+          </a:p>
+        </p:txBody>
+      </p:sp>
+      <p:cxnSp>
+        <p:nvCxnSpPr>
+          <p:cNvPr id="57" name="C1-E14 line 55" descr="sci-ppt:o055"/>
+          <p:cNvCxnSpPr/>
+          <p:nvPr/>
+        </p:nvCxnSpPr>
+        <p:spPr>
+          <a:xfrm>
+            <a:off x="9189720" y="4096626"/>
+            <a:ext cx="1600200" cy="335824"/>
+          </a:xfrm>
+          <a:prstGeom prst="line">
+            <a:avLst/>
+          </a:prstGeom>
+          <a:ln w="25400">
+            <a:solidFill>
+              <a:srgbClr val="F2B880"/>
+            </a:solidFill>
+            <a:prstDash val="dash"/>
+          </a:ln>
+          <a:effectLst/>
+        </p:spPr>
+      </p:cxnSp>
+      <p:sp>
+        <p:nvSpPr>
+          <p:cNvPr id="58" name="C1-E14 text 56" descr="sci-ppt:o056"/>
           <p:cNvSpPr txBox="1"/>
           <p:nvPr/>
         </p:nvSpPr>
         <p:spPr>
           <a:xfrm>
-            <a:off x="5242560" y="1987296"/>
-            <a:ext cx="5852160" cy="359054"/>
+            <a:off x="7434072" y="4645152"/>
+            <a:ext cx="2926080" cy="231648"/>
           </a:xfrm>
           <a:prstGeom prst="rect">
             <a:avLst/>
@@ -3330,7 +5774,7 @@
           <a:effectLst/>
         </p:spPr>
         <p:txBody>
-          <a:bodyPr wrap="none" lIns="27432" rIns="27432" tIns="18288" bIns="18288" anchor="ctr">
+          <a:bodyPr wrap="none" lIns="18288" rIns="18288" tIns="18288" bIns="18288" anchor="t">
             <a:spAutoFit/>
           </a:bodyPr>
           <a:lstStyle/>
@@ -3341,51 +5785,179 @@
               </a:spcAft>
             </a:pPr>
             <a:r>
-              <a:rPr sz="1823" b="0" i="0">
+              <a:rPr sz="1200" b="0" i="0">
+                <a:solidFill>
+                  <a:srgbClr val="8EDBD4"/>
+                </a:solidFill>
+                <a:latin typeface="Arial"/>
+              </a:rPr>
+              <a:t>R³y = 1 − x³: simple, slope ∝ −R²</a:t>
+            </a:r>
+          </a:p>
+        </p:txBody>
+      </p:sp>
+      <p:sp>
+        <p:nvSpPr>
+          <p:cNvPr id="59" name="C1-E14 round_rect 57" descr="sci-ppt:o057"/>
+          <p:cNvSpPr/>
+          <p:nvPr/>
+        </p:nvSpPr>
+        <p:spPr>
+          <a:xfrm>
+            <a:off x="365760" y="914400"/>
+            <a:ext cx="5852160" cy="4937760"/>
+          </a:xfrm>
+          <a:prstGeom prst="roundRect">
+            <a:avLst/>
+          </a:prstGeom>
+          <a:solidFill>
+            <a:srgbClr val="213E4B"/>
+          </a:solidFill>
+          <a:ln w="20320">
+            <a:solidFill>
+              <a:srgbClr val="8EDBD4"/>
+            </a:solidFill>
+          </a:ln>
+          <a:effectLst/>
+        </p:spPr>
+        <p:txBody>
+          <a:bodyPr rtlCol="0" anchor="ctr"/>
+          <a:lstStyle/>
+          <a:p>
+            <a:pPr algn="ctr"/>
+          </a:p>
+        </p:txBody>
+      </p:sp>
+      <p:sp>
+        <p:nvSpPr>
+          <p:cNvPr id="60" name="C1-E14 text 58" descr="sci-ppt:o058"/>
+          <p:cNvSpPr txBox="1"/>
+          <p:nvPr/>
+        </p:nvSpPr>
+        <p:spPr>
+          <a:xfrm>
+            <a:off x="475488" y="969264"/>
+            <a:ext cx="5632704" cy="254889"/>
+          </a:xfrm>
+          <a:prstGeom prst="rect">
+            <a:avLst/>
+          </a:prstGeom>
+          <a:noFill/>
+          <a:effectLst/>
+        </p:spPr>
+        <p:txBody>
+          <a:bodyPr wrap="none" lIns="18288" rIns="18288" tIns="18288" bIns="18288" anchor="t">
+            <a:spAutoFit/>
+          </a:bodyPr>
+          <a:lstStyle/>
+          <a:p>
+            <a:pPr algn="l">
+              <a:spcAft>
+                <a:spcPts val="0"/>
+              </a:spcAft>
+            </a:pPr>
+            <a:r>
+              <a:rPr sz="1350" b="1" i="0">
+                <a:solidFill>
+                  <a:srgbClr val="8EDBD4"/>
+                </a:solidFill>
+                <a:latin typeface="Arial"/>
+              </a:rPr>
+              <a:t>Why the radius replaces time</a:t>
+            </a:r>
+          </a:p>
+        </p:txBody>
+      </p:sp>
+      <p:sp>
+        <p:nvSpPr>
+          <p:cNvPr id="61" name="C1-E14 text 59" descr="sci-ppt:o059"/>
+          <p:cNvSpPr txBox="1"/>
+          <p:nvPr/>
+        </p:nvSpPr>
+        <p:spPr>
+          <a:xfrm>
+            <a:off x="548640" y="1417320"/>
+            <a:ext cx="5394960" cy="247142"/>
+          </a:xfrm>
+          <a:prstGeom prst="rect">
+            <a:avLst/>
+          </a:prstGeom>
+          <a:noFill/>
+          <a:effectLst/>
+        </p:spPr>
+        <p:txBody>
+          <a:bodyPr wrap="none" lIns="18288" rIns="18288" tIns="18288" bIns="18288" anchor="t">
+            <a:spAutoFit/>
+          </a:bodyPr>
+          <a:lstStyle/>
+          <a:p>
+            <a:pPr algn="l">
+              <a:spcAft>
+                <a:spcPts val="0"/>
+              </a:spcAft>
+            </a:pPr>
+            <a:r>
+              <a:rPr sz="1300" b="1" i="0">
+                <a:solidFill>
+                  <a:srgbClr val="F2B880"/>
+                </a:solidFill>
+                <a:latin typeface="Arial"/>
+              </a:rPr>
+              <a:t>1  y(R) = Ṙ²,  Ṙ ≠ 0</a:t>
+            </a:r>
+          </a:p>
+        </p:txBody>
+      </p:sp>
+      <p:sp>
+        <p:nvSpPr>
+          <p:cNvPr id="62" name="C1-E14 text 60" descr="sci-ppt:o060"/>
+          <p:cNvSpPr txBox="1"/>
+          <p:nvPr/>
+        </p:nvSpPr>
+        <p:spPr>
+          <a:xfrm>
+            <a:off x="777240" y="1728216"/>
+            <a:ext cx="5212080" cy="247142"/>
+          </a:xfrm>
+          <a:prstGeom prst="rect">
+            <a:avLst/>
+          </a:prstGeom>
+          <a:noFill/>
+          <a:effectLst/>
+        </p:spPr>
+        <p:txBody>
+          <a:bodyPr wrap="none" lIns="18288" rIns="18288" tIns="18288" bIns="18288" anchor="t">
+            <a:spAutoFit/>
+          </a:bodyPr>
+          <a:lstStyle/>
+          <a:p>
+            <a:pPr algn="l">
+              <a:spcAft>
+                <a:spcPts val="0"/>
+              </a:spcAft>
+            </a:pPr>
+            <a:r>
+              <a:rPr sz="1300" b="0" i="0">
                 <a:solidFill>
                   <a:srgbClr val="E7F0F3"/>
                 </a:solidFill>
                 <a:latin typeface="Arial"/>
               </a:rPr>
-              <a:t>p∞, ρ, μ; interface: σ</a:t>
-            </a:r>
-          </a:p>
-        </p:txBody>
-      </p:sp>
-      <p:cxnSp>
-        <p:nvCxnSpPr>
-          <p:cNvPr id="9" name="arrow8" descr="sci-ppt:C1-E14-008"/>
-          <p:cNvCxnSpPr/>
-          <p:nvPr/>
-        </p:nvCxnSpPr>
-        <p:spPr>
-          <a:xfrm>
-            <a:off x="3291840" y="2621280"/>
-            <a:ext cx="1706880" cy="1158240"/>
-          </a:xfrm>
-          <a:prstGeom prst="line">
-            <a:avLst/>
-          </a:prstGeom>
-          <a:ln w="25400">
-            <a:solidFill>
-              <a:srgbClr val="8EDBD4"/>
-            </a:solidFill>
-            <a:headEnd type="none" w="med" len="med"/>
-            <a:tailEnd type="triangle" w="med" len="med"/>
-          </a:ln>
-          <a:effectLst/>
-        </p:spPr>
-      </p:cxnSp>
-      <p:sp>
-        <p:nvSpPr>
-          <p:cNvPr id="10" name="text9" descr="sci-ppt:C1-E14-009"/>
+              <a:t>dy/dR = 2R̈</a:t>
+            </a:r>
+          </a:p>
+        </p:txBody>
+      </p:sp>
+      <p:sp>
+        <p:nvSpPr>
+          <p:cNvPr id="63" name="C1-E14 text 61" descr="sci-ppt:o061"/>
           <p:cNvSpPr txBox="1"/>
           <p:nvPr/>
         </p:nvSpPr>
         <p:spPr>
           <a:xfrm>
-            <a:off x="5364480" y="3657600"/>
-            <a:ext cx="1950720" cy="340156"/>
+            <a:off x="548640" y="2249678"/>
+            <a:ext cx="5394960" cy="247142"/>
           </a:xfrm>
           <a:prstGeom prst="rect">
             <a:avLst/>
@@ -3394,7 +5966,7 @@
           <a:effectLst/>
         </p:spPr>
         <p:txBody>
-          <a:bodyPr wrap="none" lIns="27432" rIns="27432" tIns="18288" bIns="18288" anchor="ctr">
+          <a:bodyPr wrap="none" lIns="18288" rIns="18288" tIns="18288" bIns="18288" anchor="t">
             <a:spAutoFit/>
           </a:bodyPr>
           <a:lstStyle/>
@@ -3405,51 +5977,67 @@
               </a:spcAft>
             </a:pPr>
             <a:r>
-              <a:rPr sz="1728" b="0" i="0">
+              <a:rPr sz="1300" b="1" i="0">
+                <a:solidFill>
+                  <a:srgbClr val="F2B880"/>
+                </a:solidFill>
+                <a:latin typeface="Arial"/>
+              </a:rPr>
+              <a:t>2  Rewrite R R̈ + (3/2)Ṙ² = −Δp_c/ρ</a:t>
+            </a:r>
+          </a:p>
+        </p:txBody>
+      </p:sp>
+      <p:sp>
+        <p:nvSpPr>
+          <p:cNvPr id="64" name="C1-E14 text 62" descr="sci-ppt:o062"/>
+          <p:cNvSpPr txBox="1"/>
+          <p:nvPr/>
+        </p:nvSpPr>
+        <p:spPr>
+          <a:xfrm>
+            <a:off x="777240" y="2560574"/>
+            <a:ext cx="5212080" cy="247142"/>
+          </a:xfrm>
+          <a:prstGeom prst="rect">
+            <a:avLst/>
+          </a:prstGeom>
+          <a:noFill/>
+          <a:effectLst/>
+        </p:spPr>
+        <p:txBody>
+          <a:bodyPr wrap="none" lIns="18288" rIns="18288" tIns="18288" bIns="18288" anchor="t">
+            <a:spAutoFit/>
+          </a:bodyPr>
+          <a:lstStyle/>
+          <a:p>
+            <a:pPr algn="l">
+              <a:spcAft>
+                <a:spcPts val="0"/>
+              </a:spcAft>
+            </a:pPr>
+            <a:r>
+              <a:rPr sz="1300" b="0" i="0">
                 <a:solidFill>
                   <a:srgbClr val="E7F0F3"/>
                 </a:solidFill>
                 <a:latin typeface="Arial"/>
               </a:rPr>
-              <a:t>r ≥ R</a:t>
-            </a:r>
-          </a:p>
-        </p:txBody>
-      </p:sp>
-      <p:cxnSp>
-        <p:nvCxnSpPr>
-          <p:cNvPr id="11" name="arrow10" descr="sci-ppt:C1-E14-010"/>
-          <p:cNvCxnSpPr/>
-          <p:nvPr/>
-        </p:nvCxnSpPr>
-        <p:spPr>
-          <a:xfrm>
-            <a:off x="4998720" y="2621280"/>
-            <a:ext cx="792480" cy="0"/>
-          </a:xfrm>
-          <a:prstGeom prst="line">
-            <a:avLst/>
-          </a:prstGeom>
-          <a:ln w="25400">
-            <a:solidFill>
-              <a:srgbClr val="8EDBD4"/>
-            </a:solidFill>
-            <a:headEnd type="none" w="med" len="med"/>
-            <a:tailEnd type="triangle" w="med" len="med"/>
-          </a:ln>
-          <a:effectLst/>
-        </p:spPr>
-      </p:cxnSp>
-      <p:sp>
-        <p:nvSpPr>
-          <p:cNvPr id="12" name="text11" descr="sci-ppt:C1-E14-011"/>
+              <a:t>y′ + 3y/R = −2Δp_c/(ρR)</a:t>
+            </a:r>
+          </a:p>
+        </p:txBody>
+      </p:sp>
+      <p:sp>
+        <p:nvSpPr>
+          <p:cNvPr id="65" name="C1-E14 text 63" descr="sci-ppt:o063"/>
           <p:cNvSpPr txBox="1"/>
           <p:nvPr/>
         </p:nvSpPr>
         <p:spPr>
           <a:xfrm>
-            <a:off x="5059680" y="2865120"/>
-            <a:ext cx="3291840" cy="321259"/>
+            <a:off x="548640" y="3082036"/>
+            <a:ext cx="5394960" cy="247142"/>
           </a:xfrm>
           <a:prstGeom prst="rect">
             <a:avLst/>
@@ -3458,7 +6046,7 @@
           <a:effectLst/>
         </p:spPr>
         <p:txBody>
-          <a:bodyPr wrap="none" lIns="27432" rIns="27432" tIns="18288" bIns="18288" anchor="ctr">
+          <a:bodyPr wrap="none" lIns="18288" rIns="18288" tIns="18288" bIns="18288" anchor="t">
             <a:spAutoFit/>
           </a:bodyPr>
           <a:lstStyle/>
@@ -3469,27 +6057,67 @@
               </a:spcAft>
             </a:pPr>
             <a:r>
-              <a:rPr sz="1632" b="0" i="0">
+              <a:rPr sz="1300" b="1" i="0">
+                <a:solidFill>
+                  <a:srgbClr val="F2B880"/>
+                </a:solidFill>
+                <a:latin typeface="Arial"/>
+              </a:rPr>
+              <a:t>3  Multiply by the integrating factor R³</a:t>
+            </a:r>
+          </a:p>
+        </p:txBody>
+      </p:sp>
+      <p:sp>
+        <p:nvSpPr>
+          <p:cNvPr id="66" name="C1-E14 text 64" descr="sci-ppt:o064"/>
+          <p:cNvSpPr txBox="1"/>
+          <p:nvPr/>
+        </p:nvSpPr>
+        <p:spPr>
+          <a:xfrm>
+            <a:off x="777240" y="3392931"/>
+            <a:ext cx="5212080" cy="247142"/>
+          </a:xfrm>
+          <a:prstGeom prst="rect">
+            <a:avLst/>
+          </a:prstGeom>
+          <a:noFill/>
+          <a:effectLst/>
+        </p:spPr>
+        <p:txBody>
+          <a:bodyPr wrap="none" lIns="18288" rIns="18288" tIns="18288" bIns="18288" anchor="t">
+            <a:spAutoFit/>
+          </a:bodyPr>
+          <a:lstStyle/>
+          <a:p>
+            <a:pPr algn="l">
+              <a:spcAft>
+                <a:spcPts val="0"/>
+              </a:spcAft>
+            </a:pPr>
+            <a:r>
+              <a:rPr sz="1300" b="0" i="0">
                 <a:solidFill>
                   <a:srgbClr val="E7F0F3"/>
                 </a:solidFill>
                 <a:latin typeface="Arial"/>
               </a:rPr>
-              <a:t>+e_r (coordinate)</a:t>
-            </a:r>
-          </a:p>
-        </p:txBody>
-      </p:sp>
-      <p:sp>
-        <p:nvSpPr>
-          <p:cNvPr id="13" name="text12" descr="sci-ppt:C1-E14-012"/>
+              <a:t>d(R³y)/dR = R³y′ + 3R²y = −(2Δp_c/ρ) R²</a:t>
+            </a:r>
+          </a:p>
+        </p:txBody>
+      </p:sp>
+      <p:sp>
+        <p:nvSpPr>
+          <p:cNvPr id="67" name="C1-E14 text 65" descr="sci-ppt:o065"/>
           <p:cNvSpPr txBox="1"/>
           <p:nvPr/>
         </p:nvSpPr>
         <p:spPr>
           <a:xfrm>
-            <a:off x="1219200" y="4206240"/>
-            <a:ext cx="9753600" cy="340156"/>
+            <a:off x="548640" y="3914393"/>
+            <a:ext cx="5394960" cy="247142"/>
           </a:xfrm>
           <a:prstGeom prst="rect">
             <a:avLst/>
@@ -3498,7 +6126,7 @@
           <a:effectLst/>
         </p:spPr>
         <p:txBody>
-          <a:bodyPr wrap="none" lIns="27432" rIns="27432" tIns="18288" bIns="18288" anchor="ctr">
+          <a:bodyPr wrap="none" lIns="18288" rIns="18288" tIns="18288" bIns="18288" anchor="t">
             <a:spAutoFit/>
           </a:bodyPr>
           <a:lstStyle/>
@@ -3509,51 +6137,67 @@
               </a:spcAft>
             </a:pPr>
             <a:r>
-              <a:rPr sz="1728" b="0" i="0">
+              <a:rPr sz="1300" b="1" i="0">
+                <a:solidFill>
+                  <a:srgbClr val="F2B880"/>
+                </a:solidFill>
+                <a:latin typeface="Arial"/>
+              </a:rPr>
+              <a:t>4  Integrate from Rₘₐₓ (y = 0)</a:t>
+            </a:r>
+          </a:p>
+        </p:txBody>
+      </p:sp>
+      <p:sp>
+        <p:nvSpPr>
+          <p:cNvPr id="68" name="C1-E14 text 66" descr="sci-ppt:o066"/>
+          <p:cNvSpPr txBox="1"/>
+          <p:nvPr/>
+        </p:nvSpPr>
+        <p:spPr>
+          <a:xfrm>
+            <a:off x="777240" y="4225289"/>
+            <a:ext cx="5212080" cy="247142"/>
+          </a:xfrm>
+          <a:prstGeom prst="rect">
+            <a:avLst/>
+          </a:prstGeom>
+          <a:noFill/>
+          <a:effectLst/>
+        </p:spPr>
+        <p:txBody>
+          <a:bodyPr wrap="none" lIns="18288" rIns="18288" tIns="18288" bIns="18288" anchor="t">
+            <a:spAutoFit/>
+          </a:bodyPr>
+          <a:lstStyle/>
+          <a:p>
+            <a:pPr algn="l">
+              <a:spcAft>
+                <a:spcPts val="0"/>
+              </a:spcAft>
+            </a:pPr>
+            <a:r>
+              <a:rPr sz="1300" b="0" i="0">
                 <a:solidFill>
                   <a:srgbClr val="E7F0F3"/>
                 </a:solidFill>
                 <a:latin typeface="Arial"/>
               </a:rPr>
-              <a:t>Signed wall speed: Ṙ; acceleration: R̈</a:t>
-            </a:r>
-          </a:p>
-        </p:txBody>
-      </p:sp>
-      <p:cxnSp>
-        <p:nvCxnSpPr>
-          <p:cNvPr id="14" name="arrow13" descr="sci-ppt:C1-E14-013"/>
-          <p:cNvCxnSpPr/>
-          <p:nvPr/>
-        </p:nvCxnSpPr>
-        <p:spPr>
-          <a:xfrm>
-            <a:off x="1950720" y="2621280"/>
-            <a:ext cx="548640" cy="0"/>
-          </a:xfrm>
-          <a:prstGeom prst="line">
-            <a:avLst/>
-          </a:prstGeom>
-          <a:ln w="25400">
-            <a:solidFill>
-              <a:srgbClr val="F6BC77"/>
-            </a:solidFill>
-            <a:headEnd type="none" w="med" len="med"/>
-            <a:tailEnd type="triangle" w="med" len="med"/>
-          </a:ln>
-          <a:effectLst/>
-        </p:spPr>
-      </p:cxnSp>
-      <p:sp>
-        <p:nvSpPr>
-          <p:cNvPr id="15" name="text14" descr="sci-ppt:C1-E14-014"/>
+              <a:t>R³y = (2Δp_c/3ρ)(Rₘₐₓ³ − R³)</a:t>
+            </a:r>
+          </a:p>
+        </p:txBody>
+      </p:sp>
+      <p:sp>
+        <p:nvSpPr>
+          <p:cNvPr id="69" name="C1-E14 text 67" descr="sci-ppt:o067"/>
           <p:cNvSpPr txBox="1"/>
           <p:nvPr/>
         </p:nvSpPr>
         <p:spPr>
           <a:xfrm>
-            <a:off x="1097280" y="975360"/>
-            <a:ext cx="4267200" cy="340156"/>
+            <a:off x="548640" y="4792471"/>
+            <a:ext cx="5394960" cy="433070"/>
           </a:xfrm>
           <a:prstGeom prst="rect">
             <a:avLst/>
@@ -3562,7 +6206,7 @@
           <a:effectLst/>
         </p:spPr>
         <p:txBody>
-          <a:bodyPr wrap="none" lIns="27432" rIns="27432" tIns="18288" bIns="18288" anchor="ctr">
+          <a:bodyPr wrap="none" lIns="18288" rIns="18288" tIns="18288" bIns="18288" anchor="t">
             <a:spAutoFit/>
           </a:bodyPr>
           <a:lstStyle/>
@@ -3573,39 +6217,15 @@
               </a:spcAft>
             </a:pPr>
             <a:r>
-              <a:rPr sz="1728" b="0" i="0">
+              <a:rPr sz="1250" b="0" i="0">
                 <a:solidFill>
-                  <a:srgbClr val="F6BC77"/>
+                  <a:srgbClr val="B4C7D2"/>
                 </a:solidFill>
                 <a:latin typeface="Arial"/>
               </a:rPr>
-              <a:t>Collapse: Ṙ &lt; 0</a:t>
-            </a:r>
-          </a:p>
-        </p:txBody>
-      </p:sp>
-      <p:sp>
-        <p:nvSpPr>
-          <p:cNvPr id="16" name="text15" descr="sci-ppt:C1-E14-015"/>
-          <p:cNvSpPr txBox="1"/>
-          <p:nvPr/>
-        </p:nvSpPr>
-        <p:spPr>
-          <a:xfrm>
-            <a:off x="365760" y="4974336"/>
-            <a:ext cx="5547360" cy="321259"/>
-          </a:xfrm>
-          <a:prstGeom prst="rect">
-            <a:avLst/>
-          </a:prstGeom>
-          <a:noFill/>
-          <a:effectLst/>
-        </p:spPr>
-        <p:txBody>
-          <a:bodyPr wrap="none" lIns="27432" rIns="27432" tIns="18288" bIns="18288" anchor="ctr">
-            <a:spAutoFit/>
-          </a:bodyPr>
-          <a:lstStyle/>
+              <a:t>On the monotonic inward branch R is a valid independent</a:t>
+            </a:r>
+          </a:p>
           <a:p>
             <a:pPr algn="l">
               <a:spcAft>
@@ -3613,27 +6233,27 @@
               </a:spcAft>
             </a:pPr>
             <a:r>
-              <a:rPr sz="1632" b="0" i="0">
+              <a:rPr sz="1250" b="0" i="0">
                 <a:solidFill>
-                  <a:srgbClr val="E7F0F3"/>
+                  <a:srgbClr val="B4C7D2"/>
                 </a:solidFill>
                 <a:latin typeface="Arial"/>
               </a:rPr>
-              <a:t>y(R) = Ṙ²</a:t>
-            </a:r>
-          </a:p>
-        </p:txBody>
-      </p:sp>
-      <p:sp>
-        <p:nvSpPr>
-          <p:cNvPr id="17" name="text16" descr="sci-ppt:C1-E14-016"/>
+              <a:t>variable. The factor R³ makes the left side an exact derivative.</a:t>
+            </a:r>
+          </a:p>
+        </p:txBody>
+      </p:sp>
+      <p:sp>
+        <p:nvSpPr>
+          <p:cNvPr id="70" name="C1-E14 text 68" descr="sci-ppt:o068"/>
           <p:cNvSpPr txBox="1"/>
           <p:nvPr/>
         </p:nvSpPr>
         <p:spPr>
           <a:xfrm>
-            <a:off x="365760" y="5266944"/>
-            <a:ext cx="5547360" cy="321259"/>
+            <a:off x="320040" y="6510528"/>
+            <a:ext cx="11521440" cy="200660"/>
           </a:xfrm>
           <a:prstGeom prst="rect">
             <a:avLst/>
@@ -3642,7 +6262,7 @@
           <a:effectLst/>
         </p:spPr>
         <p:txBody>
-          <a:bodyPr wrap="none" lIns="27432" rIns="27432" tIns="18288" bIns="18288" anchor="ctr">
+          <a:bodyPr wrap="none" lIns="18288" rIns="18288" tIns="18288" bIns="18288" anchor="t">
             <a:spAutoFit/>
           </a:bodyPr>
           <a:lstStyle/>
@@ -3653,333 +6273,13 @@
               </a:spcAft>
             </a:pPr>
             <a:r>
-              <a:rPr sz="1632" b="0" i="0">
-                <a:solidFill>
-                  <a:srgbClr val="E7F0F3"/>
-                </a:solidFill>
-                <a:latin typeface="Arial"/>
-              </a:rPr>
-              <a:t>Ṙ ≠ 0</a:t>
-            </a:r>
-          </a:p>
-        </p:txBody>
-      </p:sp>
-      <p:sp>
-        <p:nvSpPr>
-          <p:cNvPr id="18" name="text17" descr="sci-ppt:C1-E14-017"/>
-          <p:cNvSpPr txBox="1"/>
-          <p:nvPr/>
-        </p:nvSpPr>
-        <p:spPr>
-          <a:xfrm>
-            <a:off x="365760" y="5559552"/>
-            <a:ext cx="5547360" cy="321259"/>
-          </a:xfrm>
-          <a:prstGeom prst="rect">
-            <a:avLst/>
-          </a:prstGeom>
-          <a:noFill/>
-          <a:effectLst/>
-        </p:spPr>
-        <p:txBody>
-          <a:bodyPr wrap="none" lIns="27432" rIns="27432" tIns="18288" bIns="18288" anchor="ctr">
-            <a:spAutoFit/>
-          </a:bodyPr>
-          <a:lstStyle/>
-          <a:p>
-            <a:pPr algn="l">
-              <a:spcAft>
-                <a:spcPts val="0"/>
-              </a:spcAft>
-            </a:pPr>
-            <a:r>
-              <a:rPr sz="1632" b="0" i="0">
-                <a:solidFill>
-                  <a:srgbClr val="E7F0F3"/>
-                </a:solidFill>
-                <a:latin typeface="Arial"/>
-              </a:rPr>
-              <a:t>Δpc</a:t>
-            </a:r>
-          </a:p>
-        </p:txBody>
-      </p:sp>
-      <p:sp>
-        <p:nvSpPr>
-          <p:cNvPr id="19" name="text18" descr="sci-ppt:C1-E14-018"/>
-          <p:cNvSpPr txBox="1"/>
-          <p:nvPr/>
-        </p:nvSpPr>
-        <p:spPr>
-          <a:xfrm>
-            <a:off x="365760" y="5852160"/>
-            <a:ext cx="5547360" cy="321259"/>
-          </a:xfrm>
-          <a:prstGeom prst="rect">
-            <a:avLst/>
-          </a:prstGeom>
-          <a:noFill/>
-          <a:effectLst/>
-        </p:spPr>
-        <p:txBody>
-          <a:bodyPr wrap="none" lIns="27432" rIns="27432" tIns="18288" bIns="18288" anchor="ctr">
-            <a:spAutoFit/>
-          </a:bodyPr>
-          <a:lstStyle/>
-          <a:p>
-            <a:pPr algn="l">
-              <a:spcAft>
-                <a:spcPts val="0"/>
-              </a:spcAft>
-            </a:pPr>
-            <a:r>
-              <a:rPr sz="1632" b="0" i="0">
-                <a:solidFill>
-                  <a:srgbClr val="E7F0F3"/>
-                </a:solidFill>
-                <a:latin typeface="Arial"/>
-              </a:rPr>
-              <a:t>R³y</a:t>
-            </a:r>
-          </a:p>
-        </p:txBody>
-      </p:sp>
-      <p:sp>
-        <p:nvSpPr>
-          <p:cNvPr id="20" name="text19" descr="sci-ppt:C1-E14-019"/>
-          <p:cNvSpPr txBox="1"/>
-          <p:nvPr/>
-        </p:nvSpPr>
-        <p:spPr>
-          <a:xfrm>
-            <a:off x="365760" y="6144768"/>
-            <a:ext cx="5547360" cy="321259"/>
-          </a:xfrm>
-          <a:prstGeom prst="rect">
-            <a:avLst/>
-          </a:prstGeom>
-          <a:noFill/>
-          <a:effectLst/>
-        </p:spPr>
-        <p:txBody>
-          <a:bodyPr wrap="none" lIns="27432" rIns="27432" tIns="18288" bIns="18288" anchor="ctr">
-            <a:spAutoFit/>
-          </a:bodyPr>
-          <a:lstStyle/>
-          <a:p>
-            <a:pPr algn="l">
-              <a:spcAft>
-                <a:spcPts val="0"/>
-              </a:spcAft>
-            </a:pPr>
-            <a:r>
-              <a:rPr sz="1632" b="0" i="0">
-                <a:solidFill>
-                  <a:srgbClr val="E7F0F3"/>
-                </a:solidFill>
-                <a:latin typeface="Arial"/>
-              </a:rPr>
-              <a:t>Rmax endpoint</a:t>
-            </a:r>
-          </a:p>
-        </p:txBody>
-      </p:sp>
-      <p:sp>
-        <p:nvSpPr>
-          <p:cNvPr id="21" name="text20" descr="sci-ppt:C1-E14-020"/>
-          <p:cNvSpPr txBox="1"/>
-          <p:nvPr/>
-        </p:nvSpPr>
-        <p:spPr>
-          <a:xfrm>
-            <a:off x="6156960" y="4974336"/>
-            <a:ext cx="5547360" cy="321259"/>
-          </a:xfrm>
-          <a:prstGeom prst="rect">
-            <a:avLst/>
-          </a:prstGeom>
-          <a:noFill/>
-          <a:effectLst/>
-        </p:spPr>
-        <p:txBody>
-          <a:bodyPr wrap="none" lIns="27432" rIns="27432" tIns="18288" bIns="18288" anchor="ctr">
-            <a:spAutoFit/>
-          </a:bodyPr>
-          <a:lstStyle/>
-          <a:p>
-            <a:pPr algn="l">
-              <a:spcAft>
-                <a:spcPts val="0"/>
-              </a:spcAft>
-            </a:pPr>
-            <a:r>
-              <a:rPr sz="1632" b="0" i="0">
-                <a:solidFill>
-                  <a:srgbClr val="E7F0F3"/>
-                </a:solidFill>
-                <a:latin typeface="Arial"/>
-              </a:rPr>
-              <a:t>R decreases</a:t>
-            </a:r>
-          </a:p>
-        </p:txBody>
-      </p:sp>
-      <p:sp>
-        <p:nvSpPr>
-          <p:cNvPr id="22" name="text21" descr="sci-ppt:C1-E14-021"/>
-          <p:cNvSpPr txBox="1"/>
-          <p:nvPr/>
-        </p:nvSpPr>
-        <p:spPr>
-          <a:xfrm>
-            <a:off x="6156960" y="5266944"/>
-            <a:ext cx="5547360" cy="321259"/>
-          </a:xfrm>
-          <a:prstGeom prst="rect">
-            <a:avLst/>
-          </a:prstGeom>
-          <a:noFill/>
-          <a:effectLst/>
-        </p:spPr>
-        <p:txBody>
-          <a:bodyPr wrap="none" lIns="27432" rIns="27432" tIns="18288" bIns="18288" anchor="ctr">
-            <a:spAutoFit/>
-          </a:bodyPr>
-          <a:lstStyle/>
-          <a:p>
-            <a:pPr algn="l">
-              <a:spcAft>
-                <a:spcPts val="0"/>
-              </a:spcAft>
-            </a:pPr>
-            <a:r>
-              <a:rPr sz="1632" b="0" i="0">
-                <a:solidFill>
-                  <a:srgbClr val="E7F0F3"/>
-                </a:solidFill>
-                <a:latin typeface="Arial"/>
-              </a:rPr>
-              <a:t>R̈</a:t>
-            </a:r>
-          </a:p>
-        </p:txBody>
-      </p:sp>
-      <p:sp>
-        <p:nvSpPr>
-          <p:cNvPr id="23" name="text22" descr="sci-ppt:C1-E14-022"/>
-          <p:cNvSpPr txBox="1"/>
-          <p:nvPr/>
-        </p:nvSpPr>
-        <p:spPr>
-          <a:xfrm>
-            <a:off x="6156960" y="5559552"/>
-            <a:ext cx="5547360" cy="321259"/>
-          </a:xfrm>
-          <a:prstGeom prst="rect">
-            <a:avLst/>
-          </a:prstGeom>
-          <a:noFill/>
-          <a:effectLst/>
-        </p:spPr>
-        <p:txBody>
-          <a:bodyPr wrap="none" lIns="27432" rIns="27432" tIns="18288" bIns="18288" anchor="ctr">
-            <a:spAutoFit/>
-          </a:bodyPr>
-          <a:lstStyle/>
-          <a:p>
-            <a:pPr algn="l">
-              <a:spcAft>
-                <a:spcPts val="0"/>
-              </a:spcAft>
-            </a:pPr>
-            <a:r>
-              <a:rPr sz="1632" b="0" i="0">
-                <a:solidFill>
-                  <a:srgbClr val="E7F0F3"/>
-                </a:solidFill>
-                <a:latin typeface="Arial"/>
-              </a:rPr>
-              <a:t>ρ</a:t>
-            </a:r>
-          </a:p>
-        </p:txBody>
-      </p:sp>
-      <p:sp>
-        <p:nvSpPr>
-          <p:cNvPr id="24" name="text23" descr="sci-ppt:C1-E14-023"/>
-          <p:cNvSpPr txBox="1"/>
-          <p:nvPr/>
-        </p:nvSpPr>
-        <p:spPr>
-          <a:xfrm>
-            <a:off x="6156960" y="5852160"/>
-            <a:ext cx="5547360" cy="321259"/>
-          </a:xfrm>
-          <a:prstGeom prst="rect">
-            <a:avLst/>
-          </a:prstGeom>
-          <a:noFill/>
-          <a:effectLst/>
-        </p:spPr>
-        <p:txBody>
-          <a:bodyPr wrap="none" lIns="27432" rIns="27432" tIns="18288" bIns="18288" anchor="ctr">
-            <a:spAutoFit/>
-          </a:bodyPr>
-          <a:lstStyle/>
-          <a:p>
-            <a:pPr algn="l">
-              <a:spcAft>
-                <a:spcPts val="0"/>
-              </a:spcAft>
-            </a:pPr>
-            <a:r>
-              <a:rPr sz="1632" b="0" i="0">
-                <a:solidFill>
-                  <a:srgbClr val="E7F0F3"/>
-                </a:solidFill>
-                <a:latin typeface="Arial"/>
-              </a:rPr>
-              <a:t>t</a:t>
-            </a:r>
-          </a:p>
-        </p:txBody>
-      </p:sp>
-      <p:sp>
-        <p:nvSpPr>
-          <p:cNvPr id="25" name="text24" descr="sci-ppt:C1-E14-024"/>
-          <p:cNvSpPr txBox="1"/>
-          <p:nvPr/>
-        </p:nvSpPr>
-        <p:spPr>
-          <a:xfrm>
-            <a:off x="365760" y="6632448"/>
-            <a:ext cx="11277600" cy="302361"/>
-          </a:xfrm>
-          <a:prstGeom prst="rect">
-            <a:avLst/>
-          </a:prstGeom>
-          <a:noFill/>
-          <a:effectLst/>
-        </p:spPr>
-        <p:txBody>
-          <a:bodyPr wrap="none" lIns="27432" rIns="27432" tIns="18288" bIns="18288" anchor="ctr">
-            <a:spAutoFit/>
-          </a:bodyPr>
-          <a:lstStyle/>
-          <a:p>
-            <a:pPr algn="l">
-              <a:spcAft>
-                <a:spcPts val="0"/>
-              </a:spcAft>
-            </a:pPr>
-            <a:r>
-              <a:rPr sz="1536" b="0" i="0">
+              <a:rPr sz="1000" b="0" i="0">
                 <a:solidFill>
                   <a:srgbClr val="B4C7D2"/>
                 </a:solidFill>
                 <a:latin typeface="Arial"/>
               </a:rPr>
-              <a:t>Cancel speed only away from the initial turning point</a:t>
+              <a:t>Curves are y = Ṙ² and R³y from Eqs. C1-E14 and C1-E15 (scaled as labelled).</a:t>
             </a:r>
           </a:p>
         </p:txBody>

--- a/assets/figures-editable/c1-c2/c1-e14.pptx
+++ b/assets/figures-editable/c1-c2/c1-e14.pptx
@@ -3131,7 +3131,7 @@
                 </a:solidFill>
                 <a:latin typeface="Arial"/>
               </a:rPr>
-              <a:t>C1-E14 · Exact chain rule and integrating factor</a:t>
+              <a:t>C1-E14 · Integrated speed with initial constant and branch</a:t>
             </a:r>
           </a:p>
         </p:txBody>
@@ -3144,8 +3144,8 @@
         </p:nvCxnSpPr>
         <p:spPr>
           <a:xfrm>
-            <a:off x="7132320" y="3063239"/>
-            <a:ext cx="4572000" cy="0"/>
+            <a:off x="1005840" y="5120640"/>
+            <a:ext cx="5852160" cy="0"/>
           </a:xfrm>
           <a:prstGeom prst="line">
             <a:avLst/>
@@ -3166,8 +3166,8 @@
         </p:nvCxnSpPr>
         <p:spPr>
           <a:xfrm>
-            <a:off x="7132320" y="1325880"/>
-            <a:ext cx="0" cy="1737359"/>
+            <a:off x="1005840" y="1371600"/>
+            <a:ext cx="0" cy="3749040"/>
           </a:xfrm>
           <a:prstGeom prst="line">
             <a:avLst/>
@@ -3188,7 +3188,7 @@
         </p:nvCxnSpPr>
         <p:spPr>
           <a:xfrm>
-            <a:off x="7132320" y="3063239"/>
+            <a:off x="1005840" y="5120640"/>
             <a:ext cx="0" cy="64008"/>
           </a:xfrm>
           <a:prstGeom prst="line">
@@ -3210,8 +3210,8 @@
         </p:nvCxnSpPr>
         <p:spPr>
           <a:xfrm>
-            <a:off x="7132320" y="1325880"/>
-            <a:ext cx="0" cy="1737359"/>
+            <a:off x="1005840" y="1371600"/>
+            <a:ext cx="0" cy="3749040"/>
           </a:xfrm>
           <a:prstGeom prst="line">
             <a:avLst/>
@@ -3232,7 +3232,7 @@
         </p:nvSpPr>
         <p:spPr>
           <a:xfrm>
-            <a:off x="6675120" y="3145535"/>
+            <a:off x="548640" y="5202936"/>
             <a:ext cx="914400" cy="208407"/>
           </a:xfrm>
           <a:prstGeom prst="rect">
@@ -3259,7 +3259,7 @@
                 </a:solidFill>
                 <a:latin typeface="Arial"/>
               </a:rPr>
-              <a:t>0.25</a:t>
+              <a:t>0.02</a:t>
             </a:r>
           </a:p>
         </p:txBody>
@@ -3272,7 +3272,7 @@
         </p:nvCxnSpPr>
         <p:spPr>
           <a:xfrm>
-            <a:off x="8656320" y="3063239"/>
+            <a:off x="2376557" y="5120640"/>
             <a:ext cx="0" cy="64008"/>
           </a:xfrm>
           <a:prstGeom prst="line">
@@ -3294,8 +3294,8 @@
         </p:nvCxnSpPr>
         <p:spPr>
           <a:xfrm>
-            <a:off x="8656320" y="1325880"/>
-            <a:ext cx="0" cy="1737359"/>
+            <a:off x="2376557" y="1371600"/>
+            <a:ext cx="0" cy="3749040"/>
           </a:xfrm>
           <a:prstGeom prst="line">
             <a:avLst/>
@@ -3316,7 +3316,7 @@
         </p:nvSpPr>
         <p:spPr>
           <a:xfrm>
-            <a:off x="8199120" y="3145535"/>
+            <a:off x="1919357" y="5202936"/>
             <a:ext cx="914400" cy="208407"/>
           </a:xfrm>
           <a:prstGeom prst="rect">
@@ -3343,7 +3343,7 @@
                 </a:solidFill>
                 <a:latin typeface="Arial"/>
               </a:rPr>
-              <a:t>0.50</a:t>
+              <a:t>0.05</a:t>
             </a:r>
           </a:p>
         </p:txBody>
@@ -3356,7 +3356,7 @@
         </p:nvCxnSpPr>
         <p:spPr>
           <a:xfrm>
-            <a:off x="10180320" y="3063239"/>
+            <a:off x="3413465" y="5120640"/>
             <a:ext cx="0" cy="64008"/>
           </a:xfrm>
           <a:prstGeom prst="line">
@@ -3378,8 +3378,8 @@
         </p:nvCxnSpPr>
         <p:spPr>
           <a:xfrm>
-            <a:off x="10180320" y="1325880"/>
-            <a:ext cx="0" cy="1737359"/>
+            <a:off x="3413465" y="1371600"/>
+            <a:ext cx="0" cy="3749040"/>
           </a:xfrm>
           <a:prstGeom prst="line">
             <a:avLst/>
@@ -3400,7 +3400,7 @@
         </p:nvSpPr>
         <p:spPr>
           <a:xfrm>
-            <a:off x="9723120" y="3145535"/>
+            <a:off x="2956265" y="5202936"/>
             <a:ext cx="914400" cy="208407"/>
           </a:xfrm>
           <a:prstGeom prst="rect">
@@ -3427,7 +3427,7 @@
                 </a:solidFill>
                 <a:latin typeface="Arial"/>
               </a:rPr>
-              <a:t>0.75</a:t>
+              <a:t>0.1</a:t>
             </a:r>
           </a:p>
         </p:txBody>
@@ -3440,7 +3440,7 @@
         </p:nvCxnSpPr>
         <p:spPr>
           <a:xfrm>
-            <a:off x="11704320" y="3063239"/>
+            <a:off x="4450374" y="5120640"/>
             <a:ext cx="0" cy="64008"/>
           </a:xfrm>
           <a:prstGeom prst="line">
@@ -3462,8 +3462,8 @@
         </p:nvCxnSpPr>
         <p:spPr>
           <a:xfrm>
-            <a:off x="11704320" y="1325880"/>
-            <a:ext cx="0" cy="1737359"/>
+            <a:off x="4450374" y="1371600"/>
+            <a:ext cx="0" cy="3749040"/>
           </a:xfrm>
           <a:prstGeom prst="line">
             <a:avLst/>
@@ -3484,7 +3484,7 @@
         </p:nvSpPr>
         <p:spPr>
           <a:xfrm>
-            <a:off x="11247120" y="3145535"/>
+            <a:off x="3993174" y="5202936"/>
             <a:ext cx="914400" cy="208407"/>
           </a:xfrm>
           <a:prstGeom prst="rect">
@@ -3511,7 +3511,7 @@
                 </a:solidFill>
                 <a:latin typeface="Arial"/>
               </a:rPr>
-              <a:t>1.00</a:t>
+              <a:t>0.2</a:t>
             </a:r>
           </a:p>
         </p:txBody>
@@ -3524,8 +3524,8 @@
         </p:nvCxnSpPr>
         <p:spPr>
           <a:xfrm>
-            <a:off x="7068312" y="3063239"/>
-            <a:ext cx="64008" cy="0"/>
+            <a:off x="5821091" y="5120640"/>
+            <a:ext cx="0" cy="64008"/>
           </a:xfrm>
           <a:prstGeom prst="line">
             <a:avLst/>
@@ -3546,8 +3546,70 @@
         </p:nvCxnSpPr>
         <p:spPr>
           <a:xfrm>
-            <a:off x="7068312" y="2520314"/>
-            <a:ext cx="64008" cy="0"/>
+            <a:off x="5821091" y="1371600"/>
+            <a:ext cx="0" cy="3749040"/>
+          </a:xfrm>
+          <a:prstGeom prst="line">
+            <a:avLst/>
+          </a:prstGeom>
+          <a:ln w="7620">
+            <a:solidFill>
+              <a:srgbClr val="2E4756"/>
+            </a:solidFill>
+          </a:ln>
+          <a:effectLst/>
+        </p:spPr>
+      </p:cxnSp>
+      <p:sp>
+        <p:nvSpPr>
+          <p:cNvPr id="19" name="C1-E14 text 17" descr="sci-ppt:o017"/>
+          <p:cNvSpPr txBox="1"/>
+          <p:nvPr/>
+        </p:nvSpPr>
+        <p:spPr>
+          <a:xfrm>
+            <a:off x="5363891" y="5202936"/>
+            <a:ext cx="914400" cy="208407"/>
+          </a:xfrm>
+          <a:prstGeom prst="rect">
+            <a:avLst/>
+          </a:prstGeom>
+          <a:noFill/>
+          <a:effectLst/>
+        </p:spPr>
+        <p:txBody>
+          <a:bodyPr wrap="none" lIns="18288" rIns="18288" tIns="18288" bIns="18288" anchor="t">
+            <a:spAutoFit/>
+          </a:bodyPr>
+          <a:lstStyle/>
+          <a:p>
+            <a:pPr algn="ctr">
+              <a:spcAft>
+                <a:spcPts val="0"/>
+              </a:spcAft>
+            </a:pPr>
+            <a:r>
+              <a:rPr sz="1050" b="0" i="0">
+                <a:solidFill>
+                  <a:srgbClr val="B4C7D2"/>
+                </a:solidFill>
+                <a:latin typeface="Arial"/>
+              </a:rPr>
+              <a:t>0.5</a:t>
+            </a:r>
+          </a:p>
+        </p:txBody>
+      </p:sp>
+      <p:cxnSp>
+        <p:nvCxnSpPr>
+          <p:cNvPr id="20" name="C1-E14 line 18" descr="sci-ppt:o018"/>
+          <p:cNvCxnSpPr/>
+          <p:nvPr/>
+        </p:nvCxnSpPr>
+        <p:spPr>
+          <a:xfrm>
+            <a:off x="6858000" y="5120640"/>
+            <a:ext cx="0" cy="64008"/>
           </a:xfrm>
           <a:prstGeom prst="line">
             <a:avLst/>
@@ -3562,14 +3624,14 @@
       </p:cxnSp>
       <p:cxnSp>
         <p:nvCxnSpPr>
-          <p:cNvPr id="19" name="C1-E14 line 17" descr="sci-ppt:o017"/>
+          <p:cNvPr id="21" name="C1-E14 line 19" descr="sci-ppt:o019"/>
           <p:cNvCxnSpPr/>
           <p:nvPr/>
         </p:nvCxnSpPr>
         <p:spPr>
           <a:xfrm>
-            <a:off x="7132320" y="2520314"/>
-            <a:ext cx="4572000" cy="0"/>
+            <a:off x="6858000" y="1371600"/>
+            <a:ext cx="0" cy="3749040"/>
           </a:xfrm>
           <a:prstGeom prst="line">
             <a:avLst/>
@@ -3584,14 +3646,14 @@
       </p:cxnSp>
       <p:sp>
         <p:nvSpPr>
-          <p:cNvPr id="20" name="C1-E14 text 18" descr="sci-ppt:o018"/>
+          <p:cNvPr id="22" name="C1-E14 text 20" descr="sci-ppt:o020"/>
           <p:cNvSpPr txBox="1"/>
           <p:nvPr/>
         </p:nvSpPr>
         <p:spPr>
           <a:xfrm>
-            <a:off x="6263640" y="2438019"/>
-            <a:ext cx="777240" cy="208407"/>
+            <a:off x="6400800" y="5202936"/>
+            <a:ext cx="914400" cy="208407"/>
           </a:xfrm>
           <a:prstGeom prst="rect">
             <a:avLst/>
@@ -3605,7 +3667,7 @@
           </a:bodyPr>
           <a:lstStyle/>
           <a:p>
-            <a:pPr algn="r">
+            <a:pPr algn="ctr">
               <a:spcAft>
                 <a:spcPts val="0"/>
               </a:spcAft>
@@ -3617,20 +3679,20 @@
                 </a:solidFill>
                 <a:latin typeface="Arial"/>
               </a:rPr>
-              <a:t>20</a:t>
+              <a:t>1</a:t>
             </a:r>
           </a:p>
         </p:txBody>
       </p:sp>
       <p:cxnSp>
         <p:nvCxnSpPr>
-          <p:cNvPr id="21" name="C1-E14 line 19" descr="sci-ppt:o019"/>
+          <p:cNvPr id="23" name="C1-E14 line 21" descr="sci-ppt:o021"/>
           <p:cNvCxnSpPr/>
           <p:nvPr/>
         </p:nvCxnSpPr>
         <p:spPr>
           <a:xfrm>
-            <a:off x="7068312" y="1977389"/>
+            <a:off x="941832" y="5120640"/>
             <a:ext cx="64008" cy="0"/>
           </a:xfrm>
           <a:prstGeom prst="line">
@@ -3646,14 +3708,36 @@
       </p:cxnSp>
       <p:cxnSp>
         <p:nvCxnSpPr>
-          <p:cNvPr id="22" name="C1-E14 line 20" descr="sci-ppt:o020"/>
+          <p:cNvPr id="24" name="C1-E14 line 22" descr="sci-ppt:o022"/>
           <p:cNvCxnSpPr/>
           <p:nvPr/>
         </p:nvCxnSpPr>
         <p:spPr>
           <a:xfrm>
-            <a:off x="7132320" y="1977389"/>
-            <a:ext cx="4572000" cy="0"/>
+            <a:off x="941832" y="3870960"/>
+            <a:ext cx="64008" cy="0"/>
+          </a:xfrm>
+          <a:prstGeom prst="line">
+            <a:avLst/>
+          </a:prstGeom>
+          <a:ln w="12700">
+            <a:solidFill>
+              <a:srgbClr val="B4C7D2"/>
+            </a:solidFill>
+          </a:ln>
+          <a:effectLst/>
+        </p:spPr>
+      </p:cxnSp>
+      <p:cxnSp>
+        <p:nvCxnSpPr>
+          <p:cNvPr id="25" name="C1-E14 line 23" descr="sci-ppt:o023"/>
+          <p:cNvCxnSpPr/>
+          <p:nvPr/>
+        </p:nvCxnSpPr>
+        <p:spPr>
+          <a:xfrm>
+            <a:off x="1005840" y="3870960"/>
+            <a:ext cx="5852160" cy="0"/>
           </a:xfrm>
           <a:prstGeom prst="line">
             <a:avLst/>
@@ -3668,13 +3752,13 @@
       </p:cxnSp>
       <p:sp>
         <p:nvSpPr>
-          <p:cNvPr id="23" name="C1-E14 text 21" descr="sci-ppt:o021"/>
+          <p:cNvPr id="26" name="C1-E14 text 24" descr="sci-ppt:o024"/>
           <p:cNvSpPr txBox="1"/>
           <p:nvPr/>
         </p:nvSpPr>
         <p:spPr>
           <a:xfrm>
-            <a:off x="6263640" y="1895093"/>
+            <a:off x="137160" y="3788664"/>
             <a:ext cx="777240" cy="208407"/>
           </a:xfrm>
           <a:prstGeom prst="rect">
@@ -3701,20 +3785,20 @@
                 </a:solidFill>
                 <a:latin typeface="Arial"/>
               </a:rPr>
-              <a:t>40</a:t>
+              <a:t>10</a:t>
             </a:r>
           </a:p>
         </p:txBody>
       </p:sp>
       <p:cxnSp>
         <p:nvCxnSpPr>
-          <p:cNvPr id="24" name="C1-E14 line 22" descr="sci-ppt:o022"/>
+          <p:cNvPr id="27" name="C1-E14 line 25" descr="sci-ppt:o025"/>
           <p:cNvCxnSpPr/>
           <p:nvPr/>
         </p:nvCxnSpPr>
         <p:spPr>
           <a:xfrm>
-            <a:off x="7068312" y="1434464"/>
+            <a:off x="941832" y="2621280"/>
             <a:ext cx="64008" cy="0"/>
           </a:xfrm>
           <a:prstGeom prst="line">
@@ -3730,14 +3814,14 @@
       </p:cxnSp>
       <p:cxnSp>
         <p:nvCxnSpPr>
-          <p:cNvPr id="25" name="C1-E14 line 23" descr="sci-ppt:o023"/>
+          <p:cNvPr id="28" name="C1-E14 line 26" descr="sci-ppt:o026"/>
           <p:cNvCxnSpPr/>
           <p:nvPr/>
         </p:nvCxnSpPr>
         <p:spPr>
           <a:xfrm>
-            <a:off x="7132320" y="1434464"/>
-            <a:ext cx="4572000" cy="0"/>
+            <a:off x="1005840" y="2621280"/>
+            <a:ext cx="5852160" cy="0"/>
           </a:xfrm>
           <a:prstGeom prst="line">
             <a:avLst/>
@@ -3752,13 +3836,13 @@
       </p:cxnSp>
       <p:sp>
         <p:nvSpPr>
-          <p:cNvPr id="26" name="C1-E14 text 24" descr="sci-ppt:o024"/>
+          <p:cNvPr id="29" name="C1-E14 text 27" descr="sci-ppt:o027"/>
           <p:cNvSpPr txBox="1"/>
           <p:nvPr/>
         </p:nvSpPr>
         <p:spPr>
           <a:xfrm>
-            <a:off x="6263640" y="1352168"/>
+            <a:off x="137160" y="2538984"/>
             <a:ext cx="777240" cy="208407"/>
           </a:xfrm>
           <a:prstGeom prst="rect">
@@ -3785,578 +3869,7 @@
                 </a:solidFill>
                 <a:latin typeface="Arial"/>
               </a:rPr>
-              <a:t>60</a:t>
-            </a:r>
-          </a:p>
-        </p:txBody>
-      </p:sp>
-      <p:sp>
-        <p:nvSpPr>
-          <p:cNvPr id="27" name="C1-E14 text 25" descr="sci-ppt:o025"/>
-          <p:cNvSpPr txBox="1"/>
-          <p:nvPr/>
-        </p:nvSpPr>
-        <p:spPr>
-          <a:xfrm>
-            <a:off x="6583680" y="978407"/>
-            <a:ext cx="4572000" cy="231648"/>
-          </a:xfrm>
-          <a:prstGeom prst="rect">
-            <a:avLst/>
-          </a:prstGeom>
-          <a:noFill/>
-          <a:effectLst/>
-        </p:spPr>
-        <p:txBody>
-          <a:bodyPr wrap="none" lIns="18288" rIns="18288" tIns="18288" bIns="18288" anchor="t">
-            <a:spAutoFit/>
-          </a:bodyPr>
-          <a:lstStyle/>
-          <a:p>
-            <a:pPr algn="l">
-              <a:spcAft>
-                <a:spcPts val="0"/>
-              </a:spcAft>
-            </a:pPr>
-            <a:r>
-              <a:rPr sz="1200" b="0" i="0">
-                <a:solidFill>
-                  <a:srgbClr val="E7F0F3"/>
-                </a:solidFill>
-                <a:latin typeface="Arial"/>
-              </a:rPr>
-              <a:t>y (scaled)</a:t>
-            </a:r>
-          </a:p>
-        </p:txBody>
-      </p:sp>
-      <p:sp>
-        <p:nvSpPr>
-          <p:cNvPr id="28" name="C1-E14 polygon 26" descr="sci-ppt:o026"/>
-          <p:cNvSpPr/>
-          <p:nvPr/>
-        </p:nvSpPr>
-        <p:spPr>
-          <a:xfrm>
-            <a:off x="7132320" y="1353026"/>
-            <a:ext cx="4572000" cy="1710213"/>
-          </a:xfrm>
-          <a:custGeom>
-            <a:avLst/>
-            <a:gdLst/>
-            <a:ahLst/>
-            <a:cxnLst/>
-            <a:rect l="l" t="t" r="r" b="b"/>
-            <a:pathLst>
-              <a:path w="4572000" h="1710213">
-                <a:moveTo>
-                  <a:pt x="0" y="0"/>
-                </a:moveTo>
-                <a:lnTo>
-                  <a:pt x="30581" y="100529"/>
-                </a:lnTo>
-                <a:lnTo>
-                  <a:pt x="61163" y="193449"/>
-                </a:lnTo>
-                <a:lnTo>
-                  <a:pt x="91745" y="279467"/>
-                </a:lnTo>
-                <a:lnTo>
-                  <a:pt x="122327" y="359212"/>
-                </a:lnTo>
-                <a:lnTo>
-                  <a:pt x="152909" y="433245"/>
-                </a:lnTo>
-                <a:lnTo>
-                  <a:pt x="183491" y="502070"/>
-                </a:lnTo>
-                <a:lnTo>
-                  <a:pt x="214073" y="566135"/>
-                </a:lnTo>
-                <a:lnTo>
-                  <a:pt x="244655" y="625846"/>
-                </a:lnTo>
-                <a:lnTo>
-                  <a:pt x="275237" y="681566"/>
-                </a:lnTo>
-                <a:lnTo>
-                  <a:pt x="305819" y="733623"/>
-                </a:lnTo>
-                <a:lnTo>
-                  <a:pt x="336401" y="782313"/>
-                </a:lnTo>
-                <a:lnTo>
-                  <a:pt x="366983" y="827904"/>
-                </a:lnTo>
-                <a:lnTo>
-                  <a:pt x="397565" y="870639"/>
-                </a:lnTo>
-                <a:lnTo>
-                  <a:pt x="428147" y="910738"/>
-                </a:lnTo>
-                <a:lnTo>
-                  <a:pt x="458729" y="948400"/>
-                </a:lnTo>
-                <a:lnTo>
-                  <a:pt x="489311" y="983810"/>
-                </a:lnTo>
-                <a:lnTo>
-                  <a:pt x="519892" y="1017131"/>
-                </a:lnTo>
-                <a:lnTo>
-                  <a:pt x="550474" y="1048517"/>
-                </a:lnTo>
-                <a:lnTo>
-                  <a:pt x="581056" y="1078105"/>
-                </a:lnTo>
-                <a:lnTo>
-                  <a:pt x="611638" y="1106023"/>
-                </a:lnTo>
-                <a:lnTo>
-                  <a:pt x="642220" y="1132386"/>
-                </a:lnTo>
-                <a:lnTo>
-                  <a:pt x="672802" y="1157302"/>
-                </a:lnTo>
-                <a:lnTo>
-                  <a:pt x="703384" y="1180868"/>
-                </a:lnTo>
-                <a:lnTo>
-                  <a:pt x="733966" y="1203174"/>
-                </a:lnTo>
-                <a:lnTo>
-                  <a:pt x="764548" y="1224304"/>
-                </a:lnTo>
-                <a:lnTo>
-                  <a:pt x="795130" y="1244334"/>
-                </a:lnTo>
-                <a:lnTo>
-                  <a:pt x="825712" y="1263335"/>
-                </a:lnTo>
-                <a:lnTo>
-                  <a:pt x="856294" y="1281372"/>
-                </a:lnTo>
-                <a:lnTo>
-                  <a:pt x="886876" y="1298506"/>
-                </a:lnTo>
-                <a:lnTo>
-                  <a:pt x="917458" y="1314792"/>
-                </a:lnTo>
-                <a:lnTo>
-                  <a:pt x="948040" y="1330281"/>
-                </a:lnTo>
-                <a:lnTo>
-                  <a:pt x="978622" y="1345023"/>
-                </a:lnTo>
-                <a:lnTo>
-                  <a:pt x="1009204" y="1359062"/>
-                </a:lnTo>
-                <a:lnTo>
-                  <a:pt x="1039785" y="1372438"/>
-                </a:lnTo>
-                <a:lnTo>
-                  <a:pt x="1070367" y="1385192"/>
-                </a:lnTo>
-                <a:lnTo>
-                  <a:pt x="1100949" y="1397358"/>
-                </a:lnTo>
-                <a:lnTo>
-                  <a:pt x="1131531" y="1408970"/>
-                </a:lnTo>
-                <a:lnTo>
-                  <a:pt x="1162113" y="1420059"/>
-                </a:lnTo>
-                <a:lnTo>
-                  <a:pt x="1192695" y="1430654"/>
-                </a:lnTo>
-                <a:lnTo>
-                  <a:pt x="1223277" y="1440783"/>
-                </a:lnTo>
-                <a:lnTo>
-                  <a:pt x="1253859" y="1450471"/>
-                </a:lnTo>
-                <a:lnTo>
-                  <a:pt x="1284441" y="1459741"/>
-                </a:lnTo>
-                <a:lnTo>
-                  <a:pt x="1315023" y="1468616"/>
-                </a:lnTo>
-                <a:lnTo>
-                  <a:pt x="1345605" y="1477117"/>
-                </a:lnTo>
-                <a:lnTo>
-                  <a:pt x="1376187" y="1485263"/>
-                </a:lnTo>
-                <a:lnTo>
-                  <a:pt x="1406769" y="1493073"/>
-                </a:lnTo>
-                <a:lnTo>
-                  <a:pt x="1437351" y="1500563"/>
-                </a:lnTo>
-                <a:lnTo>
-                  <a:pt x="1467933" y="1507751"/>
-                </a:lnTo>
-                <a:lnTo>
-                  <a:pt x="1498515" y="1514650"/>
-                </a:lnTo>
-                <a:lnTo>
-                  <a:pt x="1529096" y="1521276"/>
-                </a:lnTo>
-                <a:lnTo>
-                  <a:pt x="1559678" y="1527641"/>
-                </a:lnTo>
-                <a:lnTo>
-                  <a:pt x="1590260" y="1533759"/>
-                </a:lnTo>
-                <a:lnTo>
-                  <a:pt x="1620842" y="1539641"/>
-                </a:lnTo>
-                <a:lnTo>
-                  <a:pt x="1651424" y="1545299"/>
-                </a:lnTo>
-                <a:lnTo>
-                  <a:pt x="1682006" y="1550743"/>
-                </a:lnTo>
-                <a:lnTo>
-                  <a:pt x="1712588" y="1555983"/>
-                </a:lnTo>
-                <a:lnTo>
-                  <a:pt x="1743170" y="1561028"/>
-                </a:lnTo>
-                <a:lnTo>
-                  <a:pt x="1773752" y="1565889"/>
-                </a:lnTo>
-                <a:lnTo>
-                  <a:pt x="1804334" y="1570572"/>
-                </a:lnTo>
-                <a:lnTo>
-                  <a:pt x="1834916" y="1575086"/>
-                </a:lnTo>
-                <a:lnTo>
-                  <a:pt x="1865498" y="1579439"/>
-                </a:lnTo>
-                <a:lnTo>
-                  <a:pt x="1896080" y="1583638"/>
-                </a:lnTo>
-                <a:lnTo>
-                  <a:pt x="1926662" y="1587689"/>
-                </a:lnTo>
-                <a:lnTo>
-                  <a:pt x="1957244" y="1591599"/>
-                </a:lnTo>
-                <a:lnTo>
-                  <a:pt x="1987826" y="1595374"/>
-                </a:lnTo>
-                <a:lnTo>
-                  <a:pt x="2018408" y="1599019"/>
-                </a:lnTo>
-                <a:lnTo>
-                  <a:pt x="2048989" y="1602541"/>
-                </a:lnTo>
-                <a:lnTo>
-                  <a:pt x="2079571" y="1605945"/>
-                </a:lnTo>
-                <a:lnTo>
-                  <a:pt x="2110153" y="1609234"/>
-                </a:lnTo>
-                <a:lnTo>
-                  <a:pt x="2140735" y="1612415"/>
-                </a:lnTo>
-                <a:lnTo>
-                  <a:pt x="2171317" y="1615492"/>
-                </a:lnTo>
-                <a:lnTo>
-                  <a:pt x="2201899" y="1618468"/>
-                </a:lnTo>
-                <a:lnTo>
-                  <a:pt x="2232481" y="1621348"/>
-                </a:lnTo>
-                <a:lnTo>
-                  <a:pt x="2263063" y="1624136"/>
-                </a:lnTo>
-                <a:lnTo>
-                  <a:pt x="2293645" y="1626835"/>
-                </a:lnTo>
-                <a:lnTo>
-                  <a:pt x="2324227" y="1629450"/>
-                </a:lnTo>
-                <a:lnTo>
-                  <a:pt x="2354809" y="1631982"/>
-                </a:lnTo>
-                <a:lnTo>
-                  <a:pt x="2385391" y="1634436"/>
-                </a:lnTo>
-                <a:lnTo>
-                  <a:pt x="2415973" y="1636814"/>
-                </a:lnTo>
-                <a:lnTo>
-                  <a:pt x="2446555" y="1639119"/>
-                </a:lnTo>
-                <a:lnTo>
-                  <a:pt x="2477137" y="1641355"/>
-                </a:lnTo>
-                <a:lnTo>
-                  <a:pt x="2507719" y="1643523"/>
-                </a:lnTo>
-                <a:lnTo>
-                  <a:pt x="2538301" y="1645626"/>
-                </a:lnTo>
-                <a:lnTo>
-                  <a:pt x="2568882" y="1647667"/>
-                </a:lnTo>
-                <a:lnTo>
-                  <a:pt x="2599464" y="1649648"/>
-                </a:lnTo>
-                <a:lnTo>
-                  <a:pt x="2630046" y="1651571"/>
-                </a:lnTo>
-                <a:lnTo>
-                  <a:pt x="2660628" y="1653438"/>
-                </a:lnTo>
-                <a:lnTo>
-                  <a:pt x="2691210" y="1655251"/>
-                </a:lnTo>
-                <a:lnTo>
-                  <a:pt x="2721792" y="1657013"/>
-                </a:lnTo>
-                <a:lnTo>
-                  <a:pt x="2752374" y="1658724"/>
-                </a:lnTo>
-                <a:lnTo>
-                  <a:pt x="2782956" y="1660388"/>
-                </a:lnTo>
-                <a:lnTo>
-                  <a:pt x="2813538" y="1662004"/>
-                </a:lnTo>
-                <a:lnTo>
-                  <a:pt x="2844120" y="1663576"/>
-                </a:lnTo>
-                <a:lnTo>
-                  <a:pt x="2874702" y="1665104"/>
-                </a:lnTo>
-                <a:lnTo>
-                  <a:pt x="2905284" y="1666591"/>
-                </a:lnTo>
-                <a:lnTo>
-                  <a:pt x="2935866" y="1668036"/>
-                </a:lnTo>
-                <a:lnTo>
-                  <a:pt x="2966448" y="1669443"/>
-                </a:lnTo>
-                <a:lnTo>
-                  <a:pt x="2997030" y="1670812"/>
-                </a:lnTo>
-                <a:lnTo>
-                  <a:pt x="3027612" y="1672145"/>
-                </a:lnTo>
-                <a:lnTo>
-                  <a:pt x="3058193" y="1673442"/>
-                </a:lnTo>
-                <a:lnTo>
-                  <a:pt x="3088775" y="1674704"/>
-                </a:lnTo>
-                <a:lnTo>
-                  <a:pt x="3119357" y="1675934"/>
-                </a:lnTo>
-                <a:lnTo>
-                  <a:pt x="3149939" y="1677132"/>
-                </a:lnTo>
-                <a:lnTo>
-                  <a:pt x="3180521" y="1678299"/>
-                </a:lnTo>
-                <a:lnTo>
-                  <a:pt x="3211103" y="1679436"/>
-                </a:lnTo>
-                <a:lnTo>
-                  <a:pt x="3241685" y="1680544"/>
-                </a:lnTo>
-                <a:lnTo>
-                  <a:pt x="3272267" y="1681624"/>
-                </a:lnTo>
-                <a:lnTo>
-                  <a:pt x="3302849" y="1682677"/>
-                </a:lnTo>
-                <a:lnTo>
-                  <a:pt x="3333431" y="1683703"/>
-                </a:lnTo>
-                <a:lnTo>
-                  <a:pt x="3364013" y="1684704"/>
-                </a:lnTo>
-                <a:lnTo>
-                  <a:pt x="3394595" y="1685680"/>
-                </a:lnTo>
-                <a:lnTo>
-                  <a:pt x="3425177" y="1686632"/>
-                </a:lnTo>
-                <a:lnTo>
-                  <a:pt x="3455759" y="1687561"/>
-                </a:lnTo>
-                <a:lnTo>
-                  <a:pt x="3486341" y="1688467"/>
-                </a:lnTo>
-                <a:lnTo>
-                  <a:pt x="3516923" y="1689352"/>
-                </a:lnTo>
-                <a:lnTo>
-                  <a:pt x="3547505" y="1690215"/>
-                </a:lnTo>
-                <a:lnTo>
-                  <a:pt x="3578086" y="1691058"/>
-                </a:lnTo>
-                <a:lnTo>
-                  <a:pt x="3608668" y="1691880"/>
-                </a:lnTo>
-                <a:lnTo>
-                  <a:pt x="3639250" y="1692684"/>
-                </a:lnTo>
-                <a:lnTo>
-                  <a:pt x="3669832" y="1693468"/>
-                </a:lnTo>
-                <a:lnTo>
-                  <a:pt x="3700414" y="1694234"/>
-                </a:lnTo>
-                <a:lnTo>
-                  <a:pt x="3730996" y="1694983"/>
-                </a:lnTo>
-                <a:lnTo>
-                  <a:pt x="3761578" y="1695714"/>
-                </a:lnTo>
-                <a:lnTo>
-                  <a:pt x="3792160" y="1696429"/>
-                </a:lnTo>
-                <a:lnTo>
-                  <a:pt x="3822742" y="1697127"/>
-                </a:lnTo>
-                <a:lnTo>
-                  <a:pt x="3853324" y="1697810"/>
-                </a:lnTo>
-                <a:lnTo>
-                  <a:pt x="3883906" y="1698477"/>
-                </a:lnTo>
-                <a:lnTo>
-                  <a:pt x="3914488" y="1699129"/>
-                </a:lnTo>
-                <a:lnTo>
-                  <a:pt x="3945070" y="1699767"/>
-                </a:lnTo>
-                <a:lnTo>
-                  <a:pt x="3975652" y="1700391"/>
-                </a:lnTo>
-                <a:lnTo>
-                  <a:pt x="4006234" y="1701001"/>
-                </a:lnTo>
-                <a:lnTo>
-                  <a:pt x="4036816" y="1701597"/>
-                </a:lnTo>
-                <a:lnTo>
-                  <a:pt x="4067397" y="1702181"/>
-                </a:lnTo>
-                <a:lnTo>
-                  <a:pt x="4097979" y="1702752"/>
-                </a:lnTo>
-                <a:lnTo>
-                  <a:pt x="4128561" y="1703310"/>
-                </a:lnTo>
-                <a:lnTo>
-                  <a:pt x="4159143" y="1703857"/>
-                </a:lnTo>
-                <a:lnTo>
-                  <a:pt x="4189725" y="1704392"/>
-                </a:lnTo>
-                <a:lnTo>
-                  <a:pt x="4220307" y="1704916"/>
-                </a:lnTo>
-                <a:lnTo>
-                  <a:pt x="4250889" y="1705429"/>
-                </a:lnTo>
-                <a:lnTo>
-                  <a:pt x="4281471" y="1705931"/>
-                </a:lnTo>
-                <a:lnTo>
-                  <a:pt x="4312053" y="1706422"/>
-                </a:lnTo>
-                <a:lnTo>
-                  <a:pt x="4342635" y="1706903"/>
-                </a:lnTo>
-                <a:lnTo>
-                  <a:pt x="4373217" y="1707375"/>
-                </a:lnTo>
-                <a:lnTo>
-                  <a:pt x="4403799" y="1707836"/>
-                </a:lnTo>
-                <a:lnTo>
-                  <a:pt x="4434381" y="1708289"/>
-                </a:lnTo>
-                <a:lnTo>
-                  <a:pt x="4464963" y="1708732"/>
-                </a:lnTo>
-                <a:lnTo>
-                  <a:pt x="4495545" y="1709166"/>
-                </a:lnTo>
-                <a:lnTo>
-                  <a:pt x="4526127" y="1709591"/>
-                </a:lnTo>
-                <a:lnTo>
-                  <a:pt x="4556709" y="1710008"/>
-                </a:lnTo>
-                <a:lnTo>
-                  <a:pt x="4572000" y="1710213"/>
-                </a:lnTo>
-              </a:path>
-            </a:pathLst>
-          </a:custGeom>
-          <a:noFill/>
-          <a:ln w="38100">
-            <a:solidFill>
-              <a:srgbClr val="F28BA0"/>
-            </a:solidFill>
-          </a:ln>
-          <a:effectLst/>
-        </p:spPr>
-        <p:txBody>
-          <a:bodyPr rtlCol="0" anchor="ctr"/>
-          <a:lstStyle/>
-          <a:p>
-            <a:pPr algn="ctr"/>
-          </a:p>
-        </p:txBody>
-      </p:sp>
-      <p:sp>
-        <p:nvSpPr>
-          <p:cNvPr id="29" name="C1-E14 text 27" descr="sci-ppt:o027"/>
-          <p:cNvSpPr txBox="1"/>
-          <p:nvPr/>
-        </p:nvSpPr>
-        <p:spPr>
-          <a:xfrm>
-            <a:off x="8729472" y="1478756"/>
-            <a:ext cx="3840480" cy="231648"/>
-          </a:xfrm>
-          <a:prstGeom prst="rect">
-            <a:avLst/>
-          </a:prstGeom>
-          <a:noFill/>
-          <a:effectLst/>
-        </p:spPr>
-        <p:txBody>
-          <a:bodyPr wrap="none" lIns="18288" rIns="18288" tIns="18288" bIns="18288" anchor="t">
-            <a:spAutoFit/>
-          </a:bodyPr>
-          <a:lstStyle/>
-          <a:p>
-            <a:pPr algn="l">
-              <a:spcAft>
-                <a:spcPts val="0"/>
-              </a:spcAft>
-            </a:pPr>
-            <a:r>
-              <a:rPr sz="1200" b="0" i="0">
-                <a:solidFill>
-                  <a:srgbClr val="F28BA0"/>
-                </a:solidFill>
-                <a:latin typeface="Arial"/>
-              </a:rPr>
-              <a:t>y = Ṙ² ∝ x⁻³ − 1: blows up inward</a:t>
+              <a:t>100</a:t>
             </a:r>
           </a:p>
         </p:txBody>
@@ -4369,52 +3882,8 @@
         </p:nvCxnSpPr>
         <p:spPr>
           <a:xfrm>
-            <a:off x="7132320" y="5532120"/>
-            <a:ext cx="4572000" cy="0"/>
-          </a:xfrm>
-          <a:prstGeom prst="line">
-            <a:avLst/>
-          </a:prstGeom>
-          <a:ln w="19050">
-            <a:solidFill>
-              <a:srgbClr val="B4C7D2"/>
-            </a:solidFill>
-          </a:ln>
-          <a:effectLst/>
-        </p:spPr>
-      </p:cxnSp>
-      <p:cxnSp>
-        <p:nvCxnSpPr>
-          <p:cNvPr id="31" name="C1-E14 line 29" descr="sci-ppt:o029"/>
-          <p:cNvCxnSpPr/>
-          <p:nvPr/>
-        </p:nvCxnSpPr>
-        <p:spPr>
-          <a:xfrm>
-            <a:off x="7132320" y="3794760"/>
-            <a:ext cx="0" cy="1737360"/>
-          </a:xfrm>
-          <a:prstGeom prst="line">
-            <a:avLst/>
-          </a:prstGeom>
-          <a:ln w="19050">
-            <a:solidFill>
-              <a:srgbClr val="B4C7D2"/>
-            </a:solidFill>
-          </a:ln>
-          <a:effectLst/>
-        </p:spPr>
-      </p:cxnSp>
-      <p:cxnSp>
-        <p:nvCxnSpPr>
-          <p:cNvPr id="32" name="C1-E14 line 30" descr="sci-ppt:o030"/>
-          <p:cNvCxnSpPr/>
-          <p:nvPr/>
-        </p:nvCxnSpPr>
-        <p:spPr>
-          <a:xfrm>
-            <a:off x="7132320" y="5532120"/>
-            <a:ext cx="0" cy="64008"/>
+            <a:off x="941832" y="1371600"/>
+            <a:ext cx="64008" cy="0"/>
           </a:xfrm>
           <a:prstGeom prst="line">
             <a:avLst/>
@@ -4429,14 +3898,14 @@
       </p:cxnSp>
       <p:cxnSp>
         <p:nvCxnSpPr>
-          <p:cNvPr id="33" name="C1-E14 line 31" descr="sci-ppt:o031"/>
+          <p:cNvPr id="31" name="C1-E14 line 29" descr="sci-ppt:o029"/>
           <p:cNvCxnSpPr/>
           <p:nvPr/>
         </p:nvCxnSpPr>
         <p:spPr>
           <a:xfrm>
-            <a:off x="7132320" y="3794760"/>
-            <a:ext cx="0" cy="1737360"/>
+            <a:off x="1005840" y="1371600"/>
+            <a:ext cx="5852160" cy="0"/>
           </a:xfrm>
           <a:prstGeom prst="line">
             <a:avLst/>
@@ -4451,14 +3920,14 @@
       </p:cxnSp>
       <p:sp>
         <p:nvSpPr>
-          <p:cNvPr id="34" name="C1-E14 text 32" descr="sci-ppt:o032"/>
+          <p:cNvPr id="32" name="C1-E14 text 30" descr="sci-ppt:o030"/>
           <p:cNvSpPr txBox="1"/>
           <p:nvPr/>
         </p:nvSpPr>
         <p:spPr>
           <a:xfrm>
-            <a:off x="6675120" y="5614416"/>
-            <a:ext cx="914400" cy="208407"/>
+            <a:off x="137160" y="1289304"/>
+            <a:ext cx="777240" cy="208407"/>
           </a:xfrm>
           <a:prstGeom prst="rect">
             <a:avLst/>
@@ -4472,7 +3941,7 @@
           </a:bodyPr>
           <a:lstStyle/>
           <a:p>
-            <a:pPr algn="ctr">
+            <a:pPr algn="r">
               <a:spcAft>
                 <a:spcPts val="0"/>
               </a:spcAft>
@@ -4484,547 +3953,21 @@
                 </a:solidFill>
                 <a:latin typeface="Arial"/>
               </a:rPr>
-              <a:t>0.00</a:t>
-            </a:r>
-          </a:p>
-        </p:txBody>
-      </p:sp>
-      <p:cxnSp>
-        <p:nvCxnSpPr>
-          <p:cNvPr id="35" name="C1-E14 line 33" descr="sci-ppt:o033"/>
-          <p:cNvCxnSpPr/>
-          <p:nvPr/>
-        </p:nvCxnSpPr>
-        <p:spPr>
-          <a:xfrm>
-            <a:off x="8275320" y="5532120"/>
-            <a:ext cx="0" cy="64008"/>
-          </a:xfrm>
-          <a:prstGeom prst="line">
-            <a:avLst/>
-          </a:prstGeom>
-          <a:ln w="12700">
-            <a:solidFill>
-              <a:srgbClr val="B4C7D2"/>
-            </a:solidFill>
-          </a:ln>
-          <a:effectLst/>
-        </p:spPr>
-      </p:cxnSp>
-      <p:cxnSp>
-        <p:nvCxnSpPr>
-          <p:cNvPr id="36" name="C1-E14 line 34" descr="sci-ppt:o034"/>
-          <p:cNvCxnSpPr/>
-          <p:nvPr/>
-        </p:nvCxnSpPr>
-        <p:spPr>
-          <a:xfrm>
-            <a:off x="8275320" y="3794760"/>
-            <a:ext cx="0" cy="1737360"/>
-          </a:xfrm>
-          <a:prstGeom prst="line">
-            <a:avLst/>
-          </a:prstGeom>
-          <a:ln w="7620">
-            <a:solidFill>
-              <a:srgbClr val="2E4756"/>
-            </a:solidFill>
-          </a:ln>
-          <a:effectLst/>
-        </p:spPr>
-      </p:cxnSp>
-      <p:sp>
-        <p:nvSpPr>
-          <p:cNvPr id="37" name="C1-E14 text 35" descr="sci-ppt:o035"/>
+              <a:t>1000</a:t>
+            </a:r>
+          </a:p>
+        </p:txBody>
+      </p:sp>
+      <p:sp>
+        <p:nvSpPr>
+          <p:cNvPr id="33" name="C1-E14 text 31" descr="sci-ppt:o031"/>
           <p:cNvSpPr txBox="1"/>
           <p:nvPr/>
         </p:nvSpPr>
         <p:spPr>
           <a:xfrm>
-            <a:off x="7818120" y="5614416"/>
-            <a:ext cx="914400" cy="208407"/>
-          </a:xfrm>
-          <a:prstGeom prst="rect">
-            <a:avLst/>
-          </a:prstGeom>
-          <a:noFill/>
-          <a:effectLst/>
-        </p:spPr>
-        <p:txBody>
-          <a:bodyPr wrap="none" lIns="18288" rIns="18288" tIns="18288" bIns="18288" anchor="t">
-            <a:spAutoFit/>
-          </a:bodyPr>
-          <a:lstStyle/>
-          <a:p>
-            <a:pPr algn="ctr">
-              <a:spcAft>
-                <a:spcPts val="0"/>
-              </a:spcAft>
-            </a:pPr>
-            <a:r>
-              <a:rPr sz="1050" b="0" i="0">
-                <a:solidFill>
-                  <a:srgbClr val="B4C7D2"/>
-                </a:solidFill>
-                <a:latin typeface="Arial"/>
-              </a:rPr>
-              <a:t>0.25</a:t>
-            </a:r>
-          </a:p>
-        </p:txBody>
-      </p:sp>
-      <p:cxnSp>
-        <p:nvCxnSpPr>
-          <p:cNvPr id="38" name="C1-E14 line 36" descr="sci-ppt:o036"/>
-          <p:cNvCxnSpPr/>
-          <p:nvPr/>
-        </p:nvCxnSpPr>
-        <p:spPr>
-          <a:xfrm>
-            <a:off x="9418320" y="5532120"/>
-            <a:ext cx="0" cy="64008"/>
-          </a:xfrm>
-          <a:prstGeom prst="line">
-            <a:avLst/>
-          </a:prstGeom>
-          <a:ln w="12700">
-            <a:solidFill>
-              <a:srgbClr val="B4C7D2"/>
-            </a:solidFill>
-          </a:ln>
-          <a:effectLst/>
-        </p:spPr>
-      </p:cxnSp>
-      <p:cxnSp>
-        <p:nvCxnSpPr>
-          <p:cNvPr id="39" name="C1-E14 line 37" descr="sci-ppt:o037"/>
-          <p:cNvCxnSpPr/>
-          <p:nvPr/>
-        </p:nvCxnSpPr>
-        <p:spPr>
-          <a:xfrm>
-            <a:off x="9418320" y="3794760"/>
-            <a:ext cx="0" cy="1737360"/>
-          </a:xfrm>
-          <a:prstGeom prst="line">
-            <a:avLst/>
-          </a:prstGeom>
-          <a:ln w="7620">
-            <a:solidFill>
-              <a:srgbClr val="2E4756"/>
-            </a:solidFill>
-          </a:ln>
-          <a:effectLst/>
-        </p:spPr>
-      </p:cxnSp>
-      <p:sp>
-        <p:nvSpPr>
-          <p:cNvPr id="40" name="C1-E14 text 38" descr="sci-ppt:o038"/>
-          <p:cNvSpPr txBox="1"/>
-          <p:nvPr/>
-        </p:nvSpPr>
-        <p:spPr>
-          <a:xfrm>
-            <a:off x="8961120" y="5614416"/>
-            <a:ext cx="914400" cy="208407"/>
-          </a:xfrm>
-          <a:prstGeom prst="rect">
-            <a:avLst/>
-          </a:prstGeom>
-          <a:noFill/>
-          <a:effectLst/>
-        </p:spPr>
-        <p:txBody>
-          <a:bodyPr wrap="none" lIns="18288" rIns="18288" tIns="18288" bIns="18288" anchor="t">
-            <a:spAutoFit/>
-          </a:bodyPr>
-          <a:lstStyle/>
-          <a:p>
-            <a:pPr algn="ctr">
-              <a:spcAft>
-                <a:spcPts val="0"/>
-              </a:spcAft>
-            </a:pPr>
-            <a:r>
-              <a:rPr sz="1050" b="0" i="0">
-                <a:solidFill>
-                  <a:srgbClr val="B4C7D2"/>
-                </a:solidFill>
-                <a:latin typeface="Arial"/>
-              </a:rPr>
-              <a:t>0.50</a:t>
-            </a:r>
-          </a:p>
-        </p:txBody>
-      </p:sp>
-      <p:cxnSp>
-        <p:nvCxnSpPr>
-          <p:cNvPr id="41" name="C1-E14 line 39" descr="sci-ppt:o039"/>
-          <p:cNvCxnSpPr/>
-          <p:nvPr/>
-        </p:nvCxnSpPr>
-        <p:spPr>
-          <a:xfrm>
-            <a:off x="10561320" y="5532120"/>
-            <a:ext cx="0" cy="64008"/>
-          </a:xfrm>
-          <a:prstGeom prst="line">
-            <a:avLst/>
-          </a:prstGeom>
-          <a:ln w="12700">
-            <a:solidFill>
-              <a:srgbClr val="B4C7D2"/>
-            </a:solidFill>
-          </a:ln>
-          <a:effectLst/>
-        </p:spPr>
-      </p:cxnSp>
-      <p:cxnSp>
-        <p:nvCxnSpPr>
-          <p:cNvPr id="42" name="C1-E14 line 40" descr="sci-ppt:o040"/>
-          <p:cNvCxnSpPr/>
-          <p:nvPr/>
-        </p:nvCxnSpPr>
-        <p:spPr>
-          <a:xfrm>
-            <a:off x="10561320" y="3794760"/>
-            <a:ext cx="0" cy="1737360"/>
-          </a:xfrm>
-          <a:prstGeom prst="line">
-            <a:avLst/>
-          </a:prstGeom>
-          <a:ln w="7620">
-            <a:solidFill>
-              <a:srgbClr val="2E4756"/>
-            </a:solidFill>
-          </a:ln>
-          <a:effectLst/>
-        </p:spPr>
-      </p:cxnSp>
-      <p:sp>
-        <p:nvSpPr>
-          <p:cNvPr id="43" name="C1-E14 text 41" descr="sci-ppt:o041"/>
-          <p:cNvSpPr txBox="1"/>
-          <p:nvPr/>
-        </p:nvSpPr>
-        <p:spPr>
-          <a:xfrm>
-            <a:off x="10104120" y="5614416"/>
-            <a:ext cx="914400" cy="208407"/>
-          </a:xfrm>
-          <a:prstGeom prst="rect">
-            <a:avLst/>
-          </a:prstGeom>
-          <a:noFill/>
-          <a:effectLst/>
-        </p:spPr>
-        <p:txBody>
-          <a:bodyPr wrap="none" lIns="18288" rIns="18288" tIns="18288" bIns="18288" anchor="t">
-            <a:spAutoFit/>
-          </a:bodyPr>
-          <a:lstStyle/>
-          <a:p>
-            <a:pPr algn="ctr">
-              <a:spcAft>
-                <a:spcPts val="0"/>
-              </a:spcAft>
-            </a:pPr>
-            <a:r>
-              <a:rPr sz="1050" b="0" i="0">
-                <a:solidFill>
-                  <a:srgbClr val="B4C7D2"/>
-                </a:solidFill>
-                <a:latin typeface="Arial"/>
-              </a:rPr>
-              <a:t>0.75</a:t>
-            </a:r>
-          </a:p>
-        </p:txBody>
-      </p:sp>
-      <p:cxnSp>
-        <p:nvCxnSpPr>
-          <p:cNvPr id="44" name="C1-E14 line 42" descr="sci-ppt:o042"/>
-          <p:cNvCxnSpPr/>
-          <p:nvPr/>
-        </p:nvCxnSpPr>
-        <p:spPr>
-          <a:xfrm>
-            <a:off x="11704320" y="5532120"/>
-            <a:ext cx="0" cy="64008"/>
-          </a:xfrm>
-          <a:prstGeom prst="line">
-            <a:avLst/>
-          </a:prstGeom>
-          <a:ln w="12700">
-            <a:solidFill>
-              <a:srgbClr val="B4C7D2"/>
-            </a:solidFill>
-          </a:ln>
-          <a:effectLst/>
-        </p:spPr>
-      </p:cxnSp>
-      <p:cxnSp>
-        <p:nvCxnSpPr>
-          <p:cNvPr id="45" name="C1-E14 line 43" descr="sci-ppt:o043"/>
-          <p:cNvCxnSpPr/>
-          <p:nvPr/>
-        </p:nvCxnSpPr>
-        <p:spPr>
-          <a:xfrm>
-            <a:off x="11704320" y="3794760"/>
-            <a:ext cx="0" cy="1737360"/>
-          </a:xfrm>
-          <a:prstGeom prst="line">
-            <a:avLst/>
-          </a:prstGeom>
-          <a:ln w="7620">
-            <a:solidFill>
-              <a:srgbClr val="2E4756"/>
-            </a:solidFill>
-          </a:ln>
-          <a:effectLst/>
-        </p:spPr>
-      </p:cxnSp>
-      <p:sp>
-        <p:nvSpPr>
-          <p:cNvPr id="46" name="C1-E14 text 44" descr="sci-ppt:o044"/>
-          <p:cNvSpPr txBox="1"/>
-          <p:nvPr/>
-        </p:nvSpPr>
-        <p:spPr>
-          <a:xfrm>
-            <a:off x="11247120" y="5614416"/>
-            <a:ext cx="914400" cy="208407"/>
-          </a:xfrm>
-          <a:prstGeom prst="rect">
-            <a:avLst/>
-          </a:prstGeom>
-          <a:noFill/>
-          <a:effectLst/>
-        </p:spPr>
-        <p:txBody>
-          <a:bodyPr wrap="none" lIns="18288" rIns="18288" tIns="18288" bIns="18288" anchor="t">
-            <a:spAutoFit/>
-          </a:bodyPr>
-          <a:lstStyle/>
-          <a:p>
-            <a:pPr algn="ctr">
-              <a:spcAft>
-                <a:spcPts val="0"/>
-              </a:spcAft>
-            </a:pPr>
-            <a:r>
-              <a:rPr sz="1050" b="0" i="0">
-                <a:solidFill>
-                  <a:srgbClr val="B4C7D2"/>
-                </a:solidFill>
-                <a:latin typeface="Arial"/>
-              </a:rPr>
-              <a:t>1.00</a:t>
-            </a:r>
-          </a:p>
-        </p:txBody>
-      </p:sp>
-      <p:cxnSp>
-        <p:nvCxnSpPr>
-          <p:cNvPr id="47" name="C1-E14 line 45" descr="sci-ppt:o045"/>
-          <p:cNvCxnSpPr/>
-          <p:nvPr/>
-        </p:nvCxnSpPr>
-        <p:spPr>
-          <a:xfrm>
-            <a:off x="7068312" y="5532120"/>
-            <a:ext cx="64008" cy="0"/>
-          </a:xfrm>
-          <a:prstGeom prst="line">
-            <a:avLst/>
-          </a:prstGeom>
-          <a:ln w="12700">
-            <a:solidFill>
-              <a:srgbClr val="B4C7D2"/>
-            </a:solidFill>
-          </a:ln>
-          <a:effectLst/>
-        </p:spPr>
-      </p:cxnSp>
-      <p:cxnSp>
-        <p:nvCxnSpPr>
-          <p:cNvPr id="48" name="C1-E14 line 46" descr="sci-ppt:o046"/>
-          <p:cNvCxnSpPr/>
-          <p:nvPr/>
-        </p:nvCxnSpPr>
-        <p:spPr>
-          <a:xfrm>
-            <a:off x="7068312" y="4742410"/>
-            <a:ext cx="64008" cy="0"/>
-          </a:xfrm>
-          <a:prstGeom prst="line">
-            <a:avLst/>
-          </a:prstGeom>
-          <a:ln w="12700">
-            <a:solidFill>
-              <a:srgbClr val="B4C7D2"/>
-            </a:solidFill>
-          </a:ln>
-          <a:effectLst/>
-        </p:spPr>
-      </p:cxnSp>
-      <p:cxnSp>
-        <p:nvCxnSpPr>
-          <p:cNvPr id="49" name="C1-E14 line 47" descr="sci-ppt:o047"/>
-          <p:cNvCxnSpPr/>
-          <p:nvPr/>
-        </p:nvCxnSpPr>
-        <p:spPr>
-          <a:xfrm>
-            <a:off x="7132320" y="4742410"/>
-            <a:ext cx="4572000" cy="0"/>
-          </a:xfrm>
-          <a:prstGeom prst="line">
-            <a:avLst/>
-          </a:prstGeom>
-          <a:ln w="7620">
-            <a:solidFill>
-              <a:srgbClr val="2E4756"/>
-            </a:solidFill>
-          </a:ln>
-          <a:effectLst/>
-        </p:spPr>
-      </p:cxnSp>
-      <p:sp>
-        <p:nvSpPr>
-          <p:cNvPr id="50" name="C1-E14 text 48" descr="sci-ppt:o048"/>
-          <p:cNvSpPr txBox="1"/>
-          <p:nvPr/>
-        </p:nvSpPr>
-        <p:spPr>
-          <a:xfrm>
-            <a:off x="6263640" y="4660114"/>
-            <a:ext cx="777240" cy="208407"/>
-          </a:xfrm>
-          <a:prstGeom prst="rect">
-            <a:avLst/>
-          </a:prstGeom>
-          <a:noFill/>
-          <a:effectLst/>
-        </p:spPr>
-        <p:txBody>
-          <a:bodyPr wrap="none" lIns="18288" rIns="18288" tIns="18288" bIns="18288" anchor="t">
-            <a:spAutoFit/>
-          </a:bodyPr>
-          <a:lstStyle/>
-          <a:p>
-            <a:pPr algn="r">
-              <a:spcAft>
-                <a:spcPts val="0"/>
-              </a:spcAft>
-            </a:pPr>
-            <a:r>
-              <a:rPr sz="1050" b="0" i="0">
-                <a:solidFill>
-                  <a:srgbClr val="B4C7D2"/>
-                </a:solidFill>
-                <a:latin typeface="Arial"/>
-              </a:rPr>
-              <a:t>0.5</a:t>
-            </a:r>
-          </a:p>
-        </p:txBody>
-      </p:sp>
-      <p:cxnSp>
-        <p:nvCxnSpPr>
-          <p:cNvPr id="51" name="C1-E14 line 49" descr="sci-ppt:o049"/>
-          <p:cNvCxnSpPr/>
-          <p:nvPr/>
-        </p:nvCxnSpPr>
-        <p:spPr>
-          <a:xfrm>
-            <a:off x="7068312" y="3952701"/>
-            <a:ext cx="64008" cy="0"/>
-          </a:xfrm>
-          <a:prstGeom prst="line">
-            <a:avLst/>
-          </a:prstGeom>
-          <a:ln w="12700">
-            <a:solidFill>
-              <a:srgbClr val="B4C7D2"/>
-            </a:solidFill>
-          </a:ln>
-          <a:effectLst/>
-        </p:spPr>
-      </p:cxnSp>
-      <p:cxnSp>
-        <p:nvCxnSpPr>
-          <p:cNvPr id="52" name="C1-E14 line 50" descr="sci-ppt:o050"/>
-          <p:cNvCxnSpPr/>
-          <p:nvPr/>
-        </p:nvCxnSpPr>
-        <p:spPr>
-          <a:xfrm>
-            <a:off x="7132320" y="3952701"/>
-            <a:ext cx="4572000" cy="0"/>
-          </a:xfrm>
-          <a:prstGeom prst="line">
-            <a:avLst/>
-          </a:prstGeom>
-          <a:ln w="7620">
-            <a:solidFill>
-              <a:srgbClr val="2E4756"/>
-            </a:solidFill>
-          </a:ln>
-          <a:effectLst/>
-        </p:spPr>
-      </p:cxnSp>
-      <p:sp>
-        <p:nvSpPr>
-          <p:cNvPr id="53" name="C1-E14 text 51" descr="sci-ppt:o051"/>
-          <p:cNvSpPr txBox="1"/>
-          <p:nvPr/>
-        </p:nvSpPr>
-        <p:spPr>
-          <a:xfrm>
-            <a:off x="6263640" y="3870405"/>
-            <a:ext cx="777240" cy="208407"/>
-          </a:xfrm>
-          <a:prstGeom prst="rect">
-            <a:avLst/>
-          </a:prstGeom>
-          <a:noFill/>
-          <a:effectLst/>
-        </p:spPr>
-        <p:txBody>
-          <a:bodyPr wrap="none" lIns="18288" rIns="18288" tIns="18288" bIns="18288" anchor="t">
-            <a:spAutoFit/>
-          </a:bodyPr>
-          <a:lstStyle/>
-          <a:p>
-            <a:pPr algn="r">
-              <a:spcAft>
-                <a:spcPts val="0"/>
-              </a:spcAft>
-            </a:pPr>
-            <a:r>
-              <a:rPr sz="1050" b="0" i="0">
-                <a:solidFill>
-                  <a:srgbClr val="B4C7D2"/>
-                </a:solidFill>
-                <a:latin typeface="Arial"/>
-              </a:rPr>
-              <a:t>1.0</a:t>
-            </a:r>
-          </a:p>
-        </p:txBody>
-      </p:sp>
-      <p:sp>
-        <p:nvSpPr>
-          <p:cNvPr id="54" name="C1-E14 text 52" descr="sci-ppt:o052"/>
-          <p:cNvSpPr txBox="1"/>
-          <p:nvPr/>
-        </p:nvSpPr>
-        <p:spPr>
-          <a:xfrm>
-            <a:off x="7132320" y="5815584"/>
-            <a:ext cx="4572000" cy="231648"/>
+            <a:off x="1005840" y="5404103"/>
+            <a:ext cx="5852160" cy="231648"/>
           </a:xfrm>
           <a:prstGeom prst="rect">
             <a:avLst/>
@@ -5050,21 +3993,21 @@
                 </a:solidFill>
                 <a:latin typeface="Arial"/>
               </a:rPr>
-              <a:t>x = R / Rₘₐₓ</a:t>
-            </a:r>
-          </a:p>
-        </p:txBody>
-      </p:sp>
-      <p:sp>
-        <p:nvSpPr>
-          <p:cNvPr id="55" name="C1-E14 text 53" descr="sci-ppt:o053"/>
+              <a:t>R / Rₘₐₓ</a:t>
+            </a:r>
+          </a:p>
+        </p:txBody>
+      </p:sp>
+      <p:sp>
+        <p:nvSpPr>
+          <p:cNvPr id="34" name="C1-E14 text 32" descr="sci-ppt:o032"/>
           <p:cNvSpPr txBox="1"/>
           <p:nvPr/>
         </p:nvSpPr>
         <p:spPr>
           <a:xfrm>
-            <a:off x="6583680" y="3447288"/>
-            <a:ext cx="4572000" cy="231648"/>
+            <a:off x="457200" y="1024128"/>
+            <a:ext cx="5852160" cy="231648"/>
           </a:xfrm>
           <a:prstGeom prst="rect">
             <a:avLst/>
@@ -5090,21 +4033,21 @@
                 </a:solidFill>
                 <a:latin typeface="Arial"/>
               </a:rPr>
-              <a:t>R³y (scaled)</a:t>
-            </a:r>
-          </a:p>
-        </p:txBody>
-      </p:sp>
-      <p:sp>
-        <p:nvSpPr>
-          <p:cNvPr id="56" name="C1-E14 polygon 54" descr="sci-ppt:o054"/>
+              <a:t>|Ṙ|  (m/s)</a:t>
+            </a:r>
+          </a:p>
+        </p:txBody>
+      </p:sp>
+      <p:sp>
+        <p:nvSpPr>
+          <p:cNvPr id="35" name="C1-E14 polygon 33" descr="sci-ppt:o033"/>
           <p:cNvSpPr/>
           <p:nvPr/>
         </p:nvSpPr>
         <p:spPr>
           <a:xfrm>
-            <a:off x="7132320" y="3952701"/>
-            <a:ext cx="4572000" cy="1579419"/>
+            <a:off x="2099013" y="1391161"/>
+            <a:ext cx="4739402" cy="3462934"/>
           </a:xfrm>
           <a:custGeom>
             <a:avLst/>
@@ -5113,606 +4056,372 @@
             <a:cxnLst/>
             <a:rect l="l" t="t" r="r" b="b"/>
             <a:pathLst>
-              <a:path w="4572000" h="1579419">
+              <a:path w="4739402" h="3462934">
                 <a:moveTo>
                   <a:pt x="0" y="0"/>
                 </a:moveTo>
                 <a:lnTo>
-                  <a:pt x="22974" y="1"/>
-                </a:lnTo>
-                <a:lnTo>
-                  <a:pt x="45949" y="2"/>
-                </a:lnTo>
-                <a:lnTo>
-                  <a:pt x="68924" y="6"/>
-                </a:lnTo>
-                <a:lnTo>
-                  <a:pt x="91899" y="13"/>
-                </a:lnTo>
-                <a:lnTo>
-                  <a:pt x="114874" y="25"/>
-                </a:lnTo>
-                <a:lnTo>
-                  <a:pt x="137849" y="44"/>
-                </a:lnTo>
-                <a:lnTo>
-                  <a:pt x="160824" y="69"/>
-                </a:lnTo>
-                <a:lnTo>
-                  <a:pt x="183798" y="103"/>
-                </a:lnTo>
-                <a:lnTo>
-                  <a:pt x="206773" y="146"/>
-                </a:lnTo>
-                <a:lnTo>
-                  <a:pt x="229748" y="201"/>
-                </a:lnTo>
-                <a:lnTo>
-                  <a:pt x="252723" y="267"/>
-                </a:lnTo>
-                <a:lnTo>
-                  <a:pt x="275698" y="347"/>
-                </a:lnTo>
-                <a:lnTo>
-                  <a:pt x="298673" y="441"/>
-                </a:lnTo>
-                <a:lnTo>
-                  <a:pt x="321648" y="550"/>
-                </a:lnTo>
-                <a:lnTo>
-                  <a:pt x="344623" y="677"/>
-                </a:lnTo>
-                <a:lnTo>
-                  <a:pt x="367597" y="821"/>
-                </a:lnTo>
-                <a:lnTo>
-                  <a:pt x="390572" y="985"/>
-                </a:lnTo>
-                <a:lnTo>
-                  <a:pt x="413547" y="1169"/>
-                </a:lnTo>
-                <a:lnTo>
-                  <a:pt x="436522" y="1375"/>
-                </a:lnTo>
-                <a:lnTo>
-                  <a:pt x="459497" y="1604"/>
-                </a:lnTo>
-                <a:lnTo>
-                  <a:pt x="482472" y="1856"/>
-                </a:lnTo>
-                <a:lnTo>
-                  <a:pt x="505447" y="2134"/>
-                </a:lnTo>
-                <a:lnTo>
-                  <a:pt x="528422" y="2439"/>
-                </a:lnTo>
-                <a:lnTo>
-                  <a:pt x="551396" y="2771"/>
-                </a:lnTo>
-                <a:lnTo>
-                  <a:pt x="574371" y="3132"/>
-                </a:lnTo>
-                <a:lnTo>
-                  <a:pt x="597346" y="3523"/>
-                </a:lnTo>
-                <a:lnTo>
-                  <a:pt x="620321" y="3945"/>
-                </a:lnTo>
-                <a:lnTo>
-                  <a:pt x="643296" y="4400"/>
-                </a:lnTo>
-                <a:lnTo>
-                  <a:pt x="666271" y="4888"/>
-                </a:lnTo>
-                <a:lnTo>
-                  <a:pt x="689246" y="5412"/>
-                </a:lnTo>
-                <a:lnTo>
-                  <a:pt x="712221" y="5971"/>
-                </a:lnTo>
-                <a:lnTo>
-                  <a:pt x="735195" y="6568"/>
-                </a:lnTo>
-                <a:lnTo>
-                  <a:pt x="758170" y="7203"/>
-                </a:lnTo>
-                <a:lnTo>
-                  <a:pt x="781145" y="7878"/>
-                </a:lnTo>
-                <a:lnTo>
-                  <a:pt x="804120" y="8593"/>
-                </a:lnTo>
-                <a:lnTo>
-                  <a:pt x="827095" y="9351"/>
-                </a:lnTo>
-                <a:lnTo>
-                  <a:pt x="850070" y="10152"/>
-                </a:lnTo>
-                <a:lnTo>
-                  <a:pt x="873045" y="10998"/>
-                </a:lnTo>
-                <a:lnTo>
-                  <a:pt x="896020" y="11889"/>
-                </a:lnTo>
-                <a:lnTo>
-                  <a:pt x="918994" y="12827"/>
-                </a:lnTo>
-                <a:lnTo>
-                  <a:pt x="941969" y="13813"/>
-                </a:lnTo>
-                <a:lnTo>
-                  <a:pt x="964944" y="14849"/>
-                </a:lnTo>
-                <a:lnTo>
-                  <a:pt x="987919" y="15935"/>
-                </a:lnTo>
-                <a:lnTo>
-                  <a:pt x="1010894" y="17073"/>
-                </a:lnTo>
-                <a:lnTo>
-                  <a:pt x="1033869" y="18263"/>
-                </a:lnTo>
-                <a:lnTo>
-                  <a:pt x="1056844" y="19508"/>
-                </a:lnTo>
-                <a:lnTo>
-                  <a:pt x="1079819" y="20808"/>
-                </a:lnTo>
-                <a:lnTo>
-                  <a:pt x="1102793" y="22165"/>
-                </a:lnTo>
-                <a:lnTo>
-                  <a:pt x="1125768" y="23579"/>
-                </a:lnTo>
-                <a:lnTo>
-                  <a:pt x="1148743" y="25053"/>
-                </a:lnTo>
-                <a:lnTo>
-                  <a:pt x="1171718" y="26586"/>
-                </a:lnTo>
-                <a:lnTo>
-                  <a:pt x="1194693" y="28181"/>
-                </a:lnTo>
-                <a:lnTo>
-                  <a:pt x="1217668" y="29838"/>
-                </a:lnTo>
-                <a:lnTo>
-                  <a:pt x="1240643" y="31559"/>
-                </a:lnTo>
-                <a:lnTo>
-                  <a:pt x="1263618" y="33345"/>
-                </a:lnTo>
-                <a:lnTo>
-                  <a:pt x="1286592" y="35197"/>
-                </a:lnTo>
-                <a:lnTo>
-                  <a:pt x="1309567" y="37116"/>
-                </a:lnTo>
-                <a:lnTo>
-                  <a:pt x="1332542" y="39104"/>
-                </a:lnTo>
-                <a:lnTo>
-                  <a:pt x="1355517" y="41162"/>
-                </a:lnTo>
-                <a:lnTo>
-                  <a:pt x="1378492" y="43291"/>
-                </a:lnTo>
-                <a:lnTo>
-                  <a:pt x="1401467" y="45492"/>
-                </a:lnTo>
-                <a:lnTo>
-                  <a:pt x="1424442" y="47766"/>
-                </a:lnTo>
-                <a:lnTo>
-                  <a:pt x="1447417" y="50114"/>
-                </a:lnTo>
-                <a:lnTo>
-                  <a:pt x="1470391" y="52539"/>
-                </a:lnTo>
-                <a:lnTo>
-                  <a:pt x="1493366" y="55040"/>
-                </a:lnTo>
-                <a:lnTo>
-                  <a:pt x="1516341" y="57620"/>
-                </a:lnTo>
-                <a:lnTo>
-                  <a:pt x="1539316" y="60279"/>
-                </a:lnTo>
-                <a:lnTo>
-                  <a:pt x="1562291" y="63018"/>
-                </a:lnTo>
-                <a:lnTo>
-                  <a:pt x="1585266" y="65840"/>
-                </a:lnTo>
-                <a:lnTo>
-                  <a:pt x="1608241" y="68744"/>
-                </a:lnTo>
-                <a:lnTo>
-                  <a:pt x="1631216" y="71732"/>
-                </a:lnTo>
-                <a:lnTo>
-                  <a:pt x="1654190" y="74806"/>
-                </a:lnTo>
-                <a:lnTo>
-                  <a:pt x="1677165" y="77967"/>
-                </a:lnTo>
-                <a:lnTo>
-                  <a:pt x="1700140" y="81215"/>
-                </a:lnTo>
-                <a:lnTo>
-                  <a:pt x="1723115" y="84552"/>
-                </a:lnTo>
-                <a:lnTo>
-                  <a:pt x="1746090" y="87979"/>
-                </a:lnTo>
-                <a:lnTo>
-                  <a:pt x="1769065" y="91498"/>
-                </a:lnTo>
-                <a:lnTo>
-                  <a:pt x="1792040" y="95109"/>
-                </a:lnTo>
-                <a:lnTo>
-                  <a:pt x="1815015" y="98814"/>
-                </a:lnTo>
-                <a:lnTo>
-                  <a:pt x="1837989" y="102615"/>
-                </a:lnTo>
-                <a:lnTo>
-                  <a:pt x="1860964" y="106511"/>
-                </a:lnTo>
-                <a:lnTo>
-                  <a:pt x="1883939" y="110505"/>
-                </a:lnTo>
-                <a:lnTo>
-                  <a:pt x="1906914" y="114597"/>
-                </a:lnTo>
-                <a:lnTo>
-                  <a:pt x="1929889" y="118789"/>
-                </a:lnTo>
-                <a:lnTo>
-                  <a:pt x="1952864" y="123082"/>
-                </a:lnTo>
-                <a:lnTo>
-                  <a:pt x="1975839" y="127478"/>
-                </a:lnTo>
-                <a:lnTo>
-                  <a:pt x="1998814" y="131977"/>
-                </a:lnTo>
-                <a:lnTo>
-                  <a:pt x="2021788" y="136580"/>
-                </a:lnTo>
-                <a:lnTo>
-                  <a:pt x="2044763" y="141289"/>
-                </a:lnTo>
-                <a:lnTo>
-                  <a:pt x="2067738" y="146105"/>
-                </a:lnTo>
-                <a:lnTo>
-                  <a:pt x="2090713" y="151030"/>
-                </a:lnTo>
-                <a:lnTo>
-                  <a:pt x="2113688" y="156064"/>
-                </a:lnTo>
-                <a:lnTo>
-                  <a:pt x="2136663" y="161208"/>
-                </a:lnTo>
-                <a:lnTo>
-                  <a:pt x="2159638" y="166465"/>
-                </a:lnTo>
-                <a:lnTo>
-                  <a:pt x="2182613" y="171834"/>
-                </a:lnTo>
-                <a:lnTo>
-                  <a:pt x="2205587" y="177318"/>
-                </a:lnTo>
-                <a:lnTo>
-                  <a:pt x="2228562" y="182917"/>
-                </a:lnTo>
-                <a:lnTo>
-                  <a:pt x="2251537" y="188633"/>
-                </a:lnTo>
-                <a:lnTo>
-                  <a:pt x="2274512" y="194466"/>
-                </a:lnTo>
-                <a:lnTo>
-                  <a:pt x="2297487" y="200419"/>
-                </a:lnTo>
-                <a:lnTo>
-                  <a:pt x="2320462" y="206492"/>
-                </a:lnTo>
-                <a:lnTo>
-                  <a:pt x="2343437" y="212686"/>
-                </a:lnTo>
-                <a:lnTo>
-                  <a:pt x="2366412" y="219003"/>
-                </a:lnTo>
-                <a:lnTo>
-                  <a:pt x="2389386" y="225444"/>
-                </a:lnTo>
-                <a:lnTo>
-                  <a:pt x="2412361" y="232010"/>
-                </a:lnTo>
-                <a:lnTo>
-                  <a:pt x="2435336" y="238702"/>
-                </a:lnTo>
-                <a:lnTo>
-                  <a:pt x="2458311" y="245522"/>
-                </a:lnTo>
-                <a:lnTo>
-                  <a:pt x="2481286" y="252470"/>
-                </a:lnTo>
-                <a:lnTo>
-                  <a:pt x="2504261" y="259548"/>
-                </a:lnTo>
-                <a:lnTo>
-                  <a:pt x="2527236" y="266757"/>
-                </a:lnTo>
-                <a:lnTo>
-                  <a:pt x="2550211" y="274099"/>
-                </a:lnTo>
-                <a:lnTo>
-                  <a:pt x="2573185" y="281574"/>
-                </a:lnTo>
-                <a:lnTo>
-                  <a:pt x="2596160" y="289184"/>
-                </a:lnTo>
-                <a:lnTo>
-                  <a:pt x="2619135" y="296929"/>
-                </a:lnTo>
-                <a:lnTo>
-                  <a:pt x="2642110" y="304812"/>
-                </a:lnTo>
-                <a:lnTo>
-                  <a:pt x="2665085" y="312833"/>
-                </a:lnTo>
-                <a:lnTo>
-                  <a:pt x="2688060" y="320993"/>
-                </a:lnTo>
-                <a:lnTo>
-                  <a:pt x="2711035" y="329294"/>
-                </a:lnTo>
-                <a:lnTo>
-                  <a:pt x="2734010" y="337737"/>
-                </a:lnTo>
-                <a:lnTo>
-                  <a:pt x="2756984" y="346324"/>
-                </a:lnTo>
-                <a:lnTo>
-                  <a:pt x="2779959" y="355054"/>
-                </a:lnTo>
-                <a:lnTo>
-                  <a:pt x="2802934" y="363930"/>
-                </a:lnTo>
-                <a:lnTo>
-                  <a:pt x="2825909" y="372953"/>
-                </a:lnTo>
-                <a:lnTo>
-                  <a:pt x="2848884" y="382123"/>
-                </a:lnTo>
-                <a:lnTo>
-                  <a:pt x="2871859" y="391443"/>
-                </a:lnTo>
-                <a:lnTo>
-                  <a:pt x="2894834" y="400913"/>
-                </a:lnTo>
-                <a:lnTo>
-                  <a:pt x="2917809" y="410534"/>
-                </a:lnTo>
-                <a:lnTo>
-                  <a:pt x="2940783" y="420308"/>
-                </a:lnTo>
-                <a:lnTo>
-                  <a:pt x="2963758" y="430237"/>
-                </a:lnTo>
-                <a:lnTo>
-                  <a:pt x="2986733" y="440320"/>
-                </a:lnTo>
-                <a:lnTo>
-                  <a:pt x="3009708" y="450559"/>
-                </a:lnTo>
-                <a:lnTo>
-                  <a:pt x="3032683" y="460957"/>
-                </a:lnTo>
-                <a:lnTo>
-                  <a:pt x="3055658" y="471512"/>
-                </a:lnTo>
-                <a:lnTo>
-                  <a:pt x="3078633" y="482228"/>
-                </a:lnTo>
-                <a:lnTo>
-                  <a:pt x="3101608" y="493105"/>
-                </a:lnTo>
-                <a:lnTo>
-                  <a:pt x="3124582" y="504144"/>
-                </a:lnTo>
-                <a:lnTo>
-                  <a:pt x="3147557" y="515347"/>
-                </a:lnTo>
-                <a:lnTo>
-                  <a:pt x="3170532" y="526715"/>
-                </a:lnTo>
-                <a:lnTo>
-                  <a:pt x="3193507" y="538248"/>
-                </a:lnTo>
-                <a:lnTo>
-                  <a:pt x="3216482" y="549949"/>
-                </a:lnTo>
-                <a:lnTo>
-                  <a:pt x="3239457" y="561818"/>
-                </a:lnTo>
-                <a:lnTo>
-                  <a:pt x="3262432" y="573856"/>
-                </a:lnTo>
-                <a:lnTo>
-                  <a:pt x="3285407" y="586066"/>
-                </a:lnTo>
-                <a:lnTo>
-                  <a:pt x="3308381" y="598447"/>
-                </a:lnTo>
-                <a:lnTo>
-                  <a:pt x="3331356" y="611001"/>
-                </a:lnTo>
-                <a:lnTo>
-                  <a:pt x="3354331" y="623730"/>
-                </a:lnTo>
-                <a:lnTo>
-                  <a:pt x="3377306" y="636634"/>
-                </a:lnTo>
-                <a:lnTo>
-                  <a:pt x="3400281" y="649716"/>
-                </a:lnTo>
-                <a:lnTo>
-                  <a:pt x="3423256" y="662975"/>
-                </a:lnTo>
-                <a:lnTo>
-                  <a:pt x="3446231" y="676413"/>
-                </a:lnTo>
-                <a:lnTo>
-                  <a:pt x="3469206" y="690032"/>
-                </a:lnTo>
-                <a:lnTo>
-                  <a:pt x="3492180" y="703832"/>
-                </a:lnTo>
-                <a:lnTo>
-                  <a:pt x="3515155" y="717815"/>
-                </a:lnTo>
-                <a:lnTo>
-                  <a:pt x="3538130" y="731982"/>
-                </a:lnTo>
-                <a:lnTo>
-                  <a:pt x="3561105" y="746334"/>
-                </a:lnTo>
-                <a:lnTo>
-                  <a:pt x="3584080" y="760872"/>
-                </a:lnTo>
-                <a:lnTo>
-                  <a:pt x="3607055" y="775599"/>
-                </a:lnTo>
-                <a:lnTo>
-                  <a:pt x="3630030" y="790514"/>
-                </a:lnTo>
-                <a:lnTo>
-                  <a:pt x="3653005" y="805619"/>
-                </a:lnTo>
-                <a:lnTo>
-                  <a:pt x="3675979" y="820915"/>
-                </a:lnTo>
-                <a:lnTo>
-                  <a:pt x="3698954" y="836403"/>
-                </a:lnTo>
-                <a:lnTo>
-                  <a:pt x="3721929" y="852085"/>
-                </a:lnTo>
-                <a:lnTo>
-                  <a:pt x="3744904" y="867962"/>
-                </a:lnTo>
-                <a:lnTo>
-                  <a:pt x="3767879" y="884035"/>
-                </a:lnTo>
-                <a:lnTo>
-                  <a:pt x="3790854" y="900305"/>
-                </a:lnTo>
-                <a:lnTo>
-                  <a:pt x="3813829" y="916774"/>
-                </a:lnTo>
-                <a:lnTo>
-                  <a:pt x="3836804" y="933442"/>
-                </a:lnTo>
-                <a:lnTo>
-                  <a:pt x="3859778" y="950311"/>
-                </a:lnTo>
-                <a:lnTo>
-                  <a:pt x="3882753" y="967382"/>
-                </a:lnTo>
-                <a:lnTo>
-                  <a:pt x="3905728" y="984657"/>
-                </a:lnTo>
-                <a:lnTo>
-                  <a:pt x="3928703" y="1002135"/>
-                </a:lnTo>
-                <a:lnTo>
-                  <a:pt x="3951678" y="1019820"/>
-                </a:lnTo>
-                <a:lnTo>
-                  <a:pt x="3974653" y="1037711"/>
-                </a:lnTo>
-                <a:lnTo>
-                  <a:pt x="3997628" y="1055810"/>
-                </a:lnTo>
-                <a:lnTo>
-                  <a:pt x="4020603" y="1074118"/>
-                </a:lnTo>
-                <a:lnTo>
-                  <a:pt x="4043577" y="1092637"/>
-                </a:lnTo>
-                <a:lnTo>
-                  <a:pt x="4066552" y="1111368"/>
-                </a:lnTo>
-                <a:lnTo>
-                  <a:pt x="4089527" y="1130311"/>
-                </a:lnTo>
-                <a:lnTo>
-                  <a:pt x="4112502" y="1149469"/>
-                </a:lnTo>
-                <a:lnTo>
-                  <a:pt x="4135477" y="1168841"/>
-                </a:lnTo>
-                <a:lnTo>
-                  <a:pt x="4158452" y="1188430"/>
-                </a:lnTo>
-                <a:lnTo>
-                  <a:pt x="4181427" y="1208237"/>
-                </a:lnTo>
-                <a:lnTo>
-                  <a:pt x="4204402" y="1228263"/>
-                </a:lnTo>
-                <a:lnTo>
-                  <a:pt x="4227376" y="1248508"/>
-                </a:lnTo>
-                <a:lnTo>
-                  <a:pt x="4250351" y="1268975"/>
-                </a:lnTo>
-                <a:lnTo>
-                  <a:pt x="4273326" y="1289665"/>
-                </a:lnTo>
-                <a:lnTo>
-                  <a:pt x="4296301" y="1310578"/>
-                </a:lnTo>
-                <a:lnTo>
-                  <a:pt x="4319276" y="1331716"/>
-                </a:lnTo>
-                <a:lnTo>
-                  <a:pt x="4342251" y="1353080"/>
-                </a:lnTo>
-                <a:lnTo>
-                  <a:pt x="4365226" y="1374671"/>
-                </a:lnTo>
-                <a:lnTo>
-                  <a:pt x="4388201" y="1396491"/>
-                </a:lnTo>
-                <a:lnTo>
-                  <a:pt x="4411175" y="1418540"/>
-                </a:lnTo>
-                <a:lnTo>
-                  <a:pt x="4434150" y="1440821"/>
-                </a:lnTo>
-                <a:lnTo>
-                  <a:pt x="4457125" y="1463333"/>
-                </a:lnTo>
-                <a:lnTo>
-                  <a:pt x="4480100" y="1486079"/>
-                </a:lnTo>
-                <a:lnTo>
-                  <a:pt x="4503075" y="1509059"/>
-                </a:lnTo>
-                <a:lnTo>
-                  <a:pt x="4526050" y="1532275"/>
-                </a:lnTo>
-                <a:lnTo>
-                  <a:pt x="4549025" y="1555728"/>
-                </a:lnTo>
-                <a:lnTo>
-                  <a:pt x="4572000" y="1579419"/>
+                  <a:pt x="39168" y="21317"/>
+                </a:lnTo>
+                <a:lnTo>
+                  <a:pt x="78337" y="42634"/>
+                </a:lnTo>
+                <a:lnTo>
+                  <a:pt x="117506" y="63952"/>
+                </a:lnTo>
+                <a:lnTo>
+                  <a:pt x="156674" y="85270"/>
+                </a:lnTo>
+                <a:lnTo>
+                  <a:pt x="195843" y="106587"/>
+                </a:lnTo>
+                <a:lnTo>
+                  <a:pt x="235012" y="127905"/>
+                </a:lnTo>
+                <a:lnTo>
+                  <a:pt x="274180" y="149223"/>
+                </a:lnTo>
+                <a:lnTo>
+                  <a:pt x="313349" y="170542"/>
+                </a:lnTo>
+                <a:lnTo>
+                  <a:pt x="352517" y="191860"/>
+                </a:lnTo>
+                <a:lnTo>
+                  <a:pt x="391686" y="213179"/>
+                </a:lnTo>
+                <a:lnTo>
+                  <a:pt x="430855" y="234498"/>
+                </a:lnTo>
+                <a:lnTo>
+                  <a:pt x="470023" y="255818"/>
+                </a:lnTo>
+                <a:lnTo>
+                  <a:pt x="509192" y="277137"/>
+                </a:lnTo>
+                <a:lnTo>
+                  <a:pt x="548360" y="298457"/>
+                </a:lnTo>
+                <a:lnTo>
+                  <a:pt x="587529" y="319778"/>
+                </a:lnTo>
+                <a:lnTo>
+                  <a:pt x="626698" y="341099"/>
+                </a:lnTo>
+                <a:lnTo>
+                  <a:pt x="665866" y="362420"/>
+                </a:lnTo>
+                <a:lnTo>
+                  <a:pt x="705035" y="383741"/>
+                </a:lnTo>
+                <a:lnTo>
+                  <a:pt x="744204" y="405064"/>
+                </a:lnTo>
+                <a:lnTo>
+                  <a:pt x="783372" y="426386"/>
+                </a:lnTo>
+                <a:lnTo>
+                  <a:pt x="822541" y="447710"/>
+                </a:lnTo>
+                <a:lnTo>
+                  <a:pt x="861709" y="469033"/>
+                </a:lnTo>
+                <a:lnTo>
+                  <a:pt x="900878" y="490358"/>
+                </a:lnTo>
+                <a:lnTo>
+                  <a:pt x="940047" y="511683"/>
+                </a:lnTo>
+                <a:lnTo>
+                  <a:pt x="979215" y="533009"/>
+                </a:lnTo>
+                <a:lnTo>
+                  <a:pt x="1018384" y="554336"/>
+                </a:lnTo>
+                <a:lnTo>
+                  <a:pt x="1057552" y="575664"/>
+                </a:lnTo>
+                <a:lnTo>
+                  <a:pt x="1096721" y="596993"/>
+                </a:lnTo>
+                <a:lnTo>
+                  <a:pt x="1135890" y="618323"/>
+                </a:lnTo>
+                <a:lnTo>
+                  <a:pt x="1175058" y="639654"/>
+                </a:lnTo>
+                <a:lnTo>
+                  <a:pt x="1214227" y="660987"/>
+                </a:lnTo>
+                <a:lnTo>
+                  <a:pt x="1253396" y="682320"/>
+                </a:lnTo>
+                <a:lnTo>
+                  <a:pt x="1292564" y="703656"/>
+                </a:lnTo>
+                <a:lnTo>
+                  <a:pt x="1331733" y="724992"/>
+                </a:lnTo>
+                <a:lnTo>
+                  <a:pt x="1370901" y="746331"/>
+                </a:lnTo>
+                <a:lnTo>
+                  <a:pt x="1410070" y="767671"/>
+                </a:lnTo>
+                <a:lnTo>
+                  <a:pt x="1449239" y="789014"/>
+                </a:lnTo>
+                <a:lnTo>
+                  <a:pt x="1488407" y="810359"/>
+                </a:lnTo>
+                <a:lnTo>
+                  <a:pt x="1527576" y="831706"/>
+                </a:lnTo>
+                <a:lnTo>
+                  <a:pt x="1566744" y="853055"/>
+                </a:lnTo>
+                <a:lnTo>
+                  <a:pt x="1605913" y="874408"/>
+                </a:lnTo>
+                <a:lnTo>
+                  <a:pt x="1645082" y="895763"/>
+                </a:lnTo>
+                <a:lnTo>
+                  <a:pt x="1684250" y="917122"/>
+                </a:lnTo>
+                <a:lnTo>
+                  <a:pt x="1723419" y="938484"/>
+                </a:lnTo>
+                <a:lnTo>
+                  <a:pt x="1762587" y="959850"/>
+                </a:lnTo>
+                <a:lnTo>
+                  <a:pt x="1801756" y="981221"/>
+                </a:lnTo>
+                <a:lnTo>
+                  <a:pt x="1840925" y="1002595"/>
+                </a:lnTo>
+                <a:lnTo>
+                  <a:pt x="1880093" y="1023975"/>
+                </a:lnTo>
+                <a:lnTo>
+                  <a:pt x="1919262" y="1045360"/>
+                </a:lnTo>
+                <a:lnTo>
+                  <a:pt x="1958431" y="1066750"/>
+                </a:lnTo>
+                <a:lnTo>
+                  <a:pt x="1997599" y="1088147"/>
+                </a:lnTo>
+                <a:lnTo>
+                  <a:pt x="2036768" y="1109550"/>
+                </a:lnTo>
+                <a:lnTo>
+                  <a:pt x="2075936" y="1130960"/>
+                </a:lnTo>
+                <a:lnTo>
+                  <a:pt x="2115105" y="1152379"/>
+                </a:lnTo>
+                <a:lnTo>
+                  <a:pt x="2154274" y="1173805"/>
+                </a:lnTo>
+                <a:lnTo>
+                  <a:pt x="2193442" y="1195241"/>
+                </a:lnTo>
+                <a:lnTo>
+                  <a:pt x="2232611" y="1216687"/>
+                </a:lnTo>
+                <a:lnTo>
+                  <a:pt x="2271779" y="1238143"/>
+                </a:lnTo>
+                <a:lnTo>
+                  <a:pt x="2310948" y="1259611"/>
+                </a:lnTo>
+                <a:lnTo>
+                  <a:pt x="2350117" y="1281091"/>
+                </a:lnTo>
+                <a:lnTo>
+                  <a:pt x="2389285" y="1302585"/>
+                </a:lnTo>
+                <a:lnTo>
+                  <a:pt x="2428454" y="1324094"/>
+                </a:lnTo>
+                <a:lnTo>
+                  <a:pt x="2467623" y="1345619"/>
+                </a:lnTo>
+                <a:lnTo>
+                  <a:pt x="2506791" y="1367161"/>
+                </a:lnTo>
+                <a:lnTo>
+                  <a:pt x="2545960" y="1388722"/>
+                </a:lnTo>
+                <a:lnTo>
+                  <a:pt x="2585128" y="1410303"/>
+                </a:lnTo>
+                <a:lnTo>
+                  <a:pt x="2624297" y="1431906"/>
+                </a:lnTo>
+                <a:lnTo>
+                  <a:pt x="2663466" y="1453532"/>
+                </a:lnTo>
+                <a:lnTo>
+                  <a:pt x="2702634" y="1475185"/>
+                </a:lnTo>
+                <a:lnTo>
+                  <a:pt x="2741803" y="1496865"/>
+                </a:lnTo>
+                <a:lnTo>
+                  <a:pt x="2780971" y="1518576"/>
+                </a:lnTo>
+                <a:lnTo>
+                  <a:pt x="2820140" y="1540320"/>
+                </a:lnTo>
+                <a:lnTo>
+                  <a:pt x="2859309" y="1562100"/>
+                </a:lnTo>
+                <a:lnTo>
+                  <a:pt x="2898477" y="1583919"/>
+                </a:lnTo>
+                <a:lnTo>
+                  <a:pt x="2937646" y="1605779"/>
+                </a:lnTo>
+                <a:lnTo>
+                  <a:pt x="2976815" y="1627686"/>
+                </a:lnTo>
+                <a:lnTo>
+                  <a:pt x="3015983" y="1649642"/>
+                </a:lnTo>
+                <a:lnTo>
+                  <a:pt x="3055152" y="1671652"/>
+                </a:lnTo>
+                <a:lnTo>
+                  <a:pt x="3094320" y="1693721"/>
+                </a:lnTo>
+                <a:lnTo>
+                  <a:pt x="3133489" y="1715854"/>
+                </a:lnTo>
+                <a:lnTo>
+                  <a:pt x="3172658" y="1738056"/>
+                </a:lnTo>
+                <a:lnTo>
+                  <a:pt x="3211826" y="1760335"/>
+                </a:lnTo>
+                <a:lnTo>
+                  <a:pt x="3250995" y="1782695"/>
+                </a:lnTo>
+                <a:lnTo>
+                  <a:pt x="3290163" y="1805146"/>
+                </a:lnTo>
+                <a:lnTo>
+                  <a:pt x="3329332" y="1827695"/>
+                </a:lnTo>
+                <a:lnTo>
+                  <a:pt x="3368501" y="1850351"/>
+                </a:lnTo>
+                <a:lnTo>
+                  <a:pt x="3407669" y="1873124"/>
+                </a:lnTo>
+                <a:lnTo>
+                  <a:pt x="3446838" y="1896025"/>
+                </a:lnTo>
+                <a:lnTo>
+                  <a:pt x="3486007" y="1919066"/>
+                </a:lnTo>
+                <a:lnTo>
+                  <a:pt x="3525175" y="1942260"/>
+                </a:lnTo>
+                <a:lnTo>
+                  <a:pt x="3564344" y="1965623"/>
+                </a:lnTo>
+                <a:lnTo>
+                  <a:pt x="3603512" y="1989170"/>
+                </a:lnTo>
+                <a:lnTo>
+                  <a:pt x="3642681" y="2012921"/>
+                </a:lnTo>
+                <a:lnTo>
+                  <a:pt x="3681850" y="2036896"/>
+                </a:lnTo>
+                <a:lnTo>
+                  <a:pt x="3721018" y="2061117"/>
+                </a:lnTo>
+                <a:lnTo>
+                  <a:pt x="3760187" y="2085611"/>
+                </a:lnTo>
+                <a:lnTo>
+                  <a:pt x="3799355" y="2110408"/>
+                </a:lnTo>
+                <a:lnTo>
+                  <a:pt x="3838524" y="2135540"/>
+                </a:lnTo>
+                <a:lnTo>
+                  <a:pt x="3877693" y="2161045"/>
+                </a:lnTo>
+                <a:lnTo>
+                  <a:pt x="3916861" y="2186967"/>
+                </a:lnTo>
+                <a:lnTo>
+                  <a:pt x="3956030" y="2213354"/>
+                </a:lnTo>
+                <a:lnTo>
+                  <a:pt x="3995199" y="2240265"/>
+                </a:lnTo>
+                <a:lnTo>
+                  <a:pt x="4034367" y="2267766"/>
+                </a:lnTo>
+                <a:lnTo>
+                  <a:pt x="4073536" y="2295935"/>
+                </a:lnTo>
+                <a:lnTo>
+                  <a:pt x="4112704" y="2324864"/>
+                </a:lnTo>
+                <a:lnTo>
+                  <a:pt x="4151873" y="2354664"/>
+                </a:lnTo>
+                <a:lnTo>
+                  <a:pt x="4191042" y="2385465"/>
+                </a:lnTo>
+                <a:lnTo>
+                  <a:pt x="4230210" y="2417430"/>
+                </a:lnTo>
+                <a:lnTo>
+                  <a:pt x="4269379" y="2450755"/>
+                </a:lnTo>
+                <a:lnTo>
+                  <a:pt x="4308547" y="2485690"/>
+                </a:lnTo>
+                <a:lnTo>
+                  <a:pt x="4347716" y="2522550"/>
+                </a:lnTo>
+                <a:lnTo>
+                  <a:pt x="4386885" y="2561748"/>
+                </a:lnTo>
+                <a:lnTo>
+                  <a:pt x="4426053" y="2603834"/>
+                </a:lnTo>
+                <a:lnTo>
+                  <a:pt x="4465222" y="2649565"/>
+                </a:lnTo>
+                <a:lnTo>
+                  <a:pt x="4504391" y="2700027"/>
+                </a:lnTo>
+                <a:lnTo>
+                  <a:pt x="4543559" y="2756852"/>
+                </a:lnTo>
+                <a:lnTo>
+                  <a:pt x="4582728" y="2822660"/>
+                </a:lnTo>
+                <a:lnTo>
+                  <a:pt x="4621896" y="2902073"/>
+                </a:lnTo>
+                <a:lnTo>
+                  <a:pt x="4661065" y="3004456"/>
+                </a:lnTo>
+                <a:lnTo>
+                  <a:pt x="4700234" y="3154013"/>
+                </a:lnTo>
+                <a:lnTo>
+                  <a:pt x="4739402" y="3462934"/>
                 </a:lnTo>
               </a:path>
             </a:pathLst>
@@ -5733,21 +4442,399 @@
           </a:p>
         </p:txBody>
       </p:sp>
-      <p:cxnSp>
-        <p:nvCxnSpPr>
-          <p:cNvPr id="57" name="C1-E14 line 55" descr="sci-ppt:o055"/>
-          <p:cNvCxnSpPr/>
+      <p:sp>
+        <p:nvSpPr>
+          <p:cNvPr id="36" name="C1-E14 polygon 34" descr="sci-ppt:o034"/>
+          <p:cNvSpPr/>
           <p:nvPr/>
-        </p:nvCxnSpPr>
-        <p:spPr>
-          <a:xfrm>
-            <a:off x="9189720" y="4096626"/>
-            <a:ext cx="1600200" cy="335824"/>
-          </a:xfrm>
-          <a:prstGeom prst="line">
+        </p:nvSpPr>
+        <p:spPr>
+          <a:xfrm>
+            <a:off x="2099013" y="1391141"/>
+            <a:ext cx="4758987" cy="2589847"/>
+          </a:xfrm>
+          <a:custGeom>
             <a:avLst/>
-          </a:prstGeom>
-          <a:ln w="25400">
+            <a:gdLst/>
+            <a:ahLst/>
+            <a:cxnLst/>
+            <a:rect l="l" t="t" r="r" b="b"/>
+            <a:pathLst>
+              <a:path w="4758987" h="2589847">
+                <a:moveTo>
+                  <a:pt x="0" y="0"/>
+                </a:moveTo>
+                <a:lnTo>
+                  <a:pt x="39168" y="21316"/>
+                </a:lnTo>
+                <a:lnTo>
+                  <a:pt x="78337" y="42632"/>
+                </a:lnTo>
+                <a:lnTo>
+                  <a:pt x="117506" y="63947"/>
+                </a:lnTo>
+                <a:lnTo>
+                  <a:pt x="156674" y="85263"/>
+                </a:lnTo>
+                <a:lnTo>
+                  <a:pt x="195843" y="106579"/>
+                </a:lnTo>
+                <a:lnTo>
+                  <a:pt x="235012" y="127894"/>
+                </a:lnTo>
+                <a:lnTo>
+                  <a:pt x="274180" y="149210"/>
+                </a:lnTo>
+                <a:lnTo>
+                  <a:pt x="313349" y="170525"/>
+                </a:lnTo>
+                <a:lnTo>
+                  <a:pt x="352517" y="191841"/>
+                </a:lnTo>
+                <a:lnTo>
+                  <a:pt x="391686" y="213157"/>
+                </a:lnTo>
+                <a:lnTo>
+                  <a:pt x="430855" y="234472"/>
+                </a:lnTo>
+                <a:lnTo>
+                  <a:pt x="470023" y="255788"/>
+                </a:lnTo>
+                <a:lnTo>
+                  <a:pt x="509192" y="277103"/>
+                </a:lnTo>
+                <a:lnTo>
+                  <a:pt x="548360" y="298419"/>
+                </a:lnTo>
+                <a:lnTo>
+                  <a:pt x="587529" y="319735"/>
+                </a:lnTo>
+                <a:lnTo>
+                  <a:pt x="626698" y="341050"/>
+                </a:lnTo>
+                <a:lnTo>
+                  <a:pt x="665866" y="362366"/>
+                </a:lnTo>
+                <a:lnTo>
+                  <a:pt x="705035" y="383682"/>
+                </a:lnTo>
+                <a:lnTo>
+                  <a:pt x="744204" y="404997"/>
+                </a:lnTo>
+                <a:lnTo>
+                  <a:pt x="783372" y="426313"/>
+                </a:lnTo>
+                <a:lnTo>
+                  <a:pt x="822541" y="447628"/>
+                </a:lnTo>
+                <a:lnTo>
+                  <a:pt x="861709" y="468944"/>
+                </a:lnTo>
+                <a:lnTo>
+                  <a:pt x="900878" y="490260"/>
+                </a:lnTo>
+                <a:lnTo>
+                  <a:pt x="940047" y="511575"/>
+                </a:lnTo>
+                <a:lnTo>
+                  <a:pt x="979215" y="532891"/>
+                </a:lnTo>
+                <a:lnTo>
+                  <a:pt x="1018384" y="554206"/>
+                </a:lnTo>
+                <a:lnTo>
+                  <a:pt x="1057552" y="575522"/>
+                </a:lnTo>
+                <a:lnTo>
+                  <a:pt x="1096721" y="596838"/>
+                </a:lnTo>
+                <a:lnTo>
+                  <a:pt x="1135890" y="618153"/>
+                </a:lnTo>
+                <a:lnTo>
+                  <a:pt x="1175058" y="639469"/>
+                </a:lnTo>
+                <a:lnTo>
+                  <a:pt x="1214227" y="660784"/>
+                </a:lnTo>
+                <a:lnTo>
+                  <a:pt x="1253396" y="682100"/>
+                </a:lnTo>
+                <a:lnTo>
+                  <a:pt x="1292564" y="703416"/>
+                </a:lnTo>
+                <a:lnTo>
+                  <a:pt x="1331733" y="724731"/>
+                </a:lnTo>
+                <a:lnTo>
+                  <a:pt x="1370901" y="746047"/>
+                </a:lnTo>
+                <a:lnTo>
+                  <a:pt x="1410070" y="767363"/>
+                </a:lnTo>
+                <a:lnTo>
+                  <a:pt x="1449239" y="788678"/>
+                </a:lnTo>
+                <a:lnTo>
+                  <a:pt x="1488407" y="809994"/>
+                </a:lnTo>
+                <a:lnTo>
+                  <a:pt x="1527576" y="831309"/>
+                </a:lnTo>
+                <a:lnTo>
+                  <a:pt x="1566744" y="852625"/>
+                </a:lnTo>
+                <a:lnTo>
+                  <a:pt x="1605913" y="873941"/>
+                </a:lnTo>
+                <a:lnTo>
+                  <a:pt x="1645082" y="895256"/>
+                </a:lnTo>
+                <a:lnTo>
+                  <a:pt x="1684250" y="916572"/>
+                </a:lnTo>
+                <a:lnTo>
+                  <a:pt x="1723419" y="937887"/>
+                </a:lnTo>
+                <a:lnTo>
+                  <a:pt x="1762587" y="959203"/>
+                </a:lnTo>
+                <a:lnTo>
+                  <a:pt x="1801756" y="980519"/>
+                </a:lnTo>
+                <a:lnTo>
+                  <a:pt x="1840925" y="1001834"/>
+                </a:lnTo>
+                <a:lnTo>
+                  <a:pt x="1880093" y="1023150"/>
+                </a:lnTo>
+                <a:lnTo>
+                  <a:pt x="1919262" y="1044465"/>
+                </a:lnTo>
+                <a:lnTo>
+                  <a:pt x="1958431" y="1065781"/>
+                </a:lnTo>
+                <a:lnTo>
+                  <a:pt x="1997599" y="1087097"/>
+                </a:lnTo>
+                <a:lnTo>
+                  <a:pt x="2036768" y="1108412"/>
+                </a:lnTo>
+                <a:lnTo>
+                  <a:pt x="2075936" y="1129728"/>
+                </a:lnTo>
+                <a:lnTo>
+                  <a:pt x="2115105" y="1151044"/>
+                </a:lnTo>
+                <a:lnTo>
+                  <a:pt x="2154274" y="1172359"/>
+                </a:lnTo>
+                <a:lnTo>
+                  <a:pt x="2193442" y="1193675"/>
+                </a:lnTo>
+                <a:lnTo>
+                  <a:pt x="2232611" y="1214990"/>
+                </a:lnTo>
+                <a:lnTo>
+                  <a:pt x="2271779" y="1236306"/>
+                </a:lnTo>
+                <a:lnTo>
+                  <a:pt x="2310948" y="1257622"/>
+                </a:lnTo>
+                <a:lnTo>
+                  <a:pt x="2350117" y="1278937"/>
+                </a:lnTo>
+                <a:lnTo>
+                  <a:pt x="2389285" y="1300253"/>
+                </a:lnTo>
+                <a:lnTo>
+                  <a:pt x="2428454" y="1321568"/>
+                </a:lnTo>
+                <a:lnTo>
+                  <a:pt x="2467623" y="1342884"/>
+                </a:lnTo>
+                <a:lnTo>
+                  <a:pt x="2506791" y="1364200"/>
+                </a:lnTo>
+                <a:lnTo>
+                  <a:pt x="2545960" y="1385515"/>
+                </a:lnTo>
+                <a:lnTo>
+                  <a:pt x="2585128" y="1406831"/>
+                </a:lnTo>
+                <a:lnTo>
+                  <a:pt x="2624297" y="1428147"/>
+                </a:lnTo>
+                <a:lnTo>
+                  <a:pt x="2663466" y="1449462"/>
+                </a:lnTo>
+                <a:lnTo>
+                  <a:pt x="2702634" y="1470778"/>
+                </a:lnTo>
+                <a:lnTo>
+                  <a:pt x="2741803" y="1492093"/>
+                </a:lnTo>
+                <a:lnTo>
+                  <a:pt x="2780971" y="1513409"/>
+                </a:lnTo>
+                <a:lnTo>
+                  <a:pt x="2820140" y="1534725"/>
+                </a:lnTo>
+                <a:lnTo>
+                  <a:pt x="2859309" y="1556040"/>
+                </a:lnTo>
+                <a:lnTo>
+                  <a:pt x="2898477" y="1577356"/>
+                </a:lnTo>
+                <a:lnTo>
+                  <a:pt x="2937646" y="1598671"/>
+                </a:lnTo>
+                <a:lnTo>
+                  <a:pt x="2976815" y="1619987"/>
+                </a:lnTo>
+                <a:lnTo>
+                  <a:pt x="3015983" y="1641303"/>
+                </a:lnTo>
+                <a:lnTo>
+                  <a:pt x="3055152" y="1662618"/>
+                </a:lnTo>
+                <a:lnTo>
+                  <a:pt x="3094320" y="1683934"/>
+                </a:lnTo>
+                <a:lnTo>
+                  <a:pt x="3133489" y="1705249"/>
+                </a:lnTo>
+                <a:lnTo>
+                  <a:pt x="3172658" y="1726565"/>
+                </a:lnTo>
+                <a:lnTo>
+                  <a:pt x="3211826" y="1747881"/>
+                </a:lnTo>
+                <a:lnTo>
+                  <a:pt x="3250995" y="1769196"/>
+                </a:lnTo>
+                <a:lnTo>
+                  <a:pt x="3290163" y="1790512"/>
+                </a:lnTo>
+                <a:lnTo>
+                  <a:pt x="3329332" y="1811828"/>
+                </a:lnTo>
+                <a:lnTo>
+                  <a:pt x="3368501" y="1833143"/>
+                </a:lnTo>
+                <a:lnTo>
+                  <a:pt x="3407669" y="1854459"/>
+                </a:lnTo>
+                <a:lnTo>
+                  <a:pt x="3446838" y="1875774"/>
+                </a:lnTo>
+                <a:lnTo>
+                  <a:pt x="3486007" y="1897090"/>
+                </a:lnTo>
+                <a:lnTo>
+                  <a:pt x="3525175" y="1918406"/>
+                </a:lnTo>
+                <a:lnTo>
+                  <a:pt x="3564344" y="1939721"/>
+                </a:lnTo>
+                <a:lnTo>
+                  <a:pt x="3603512" y="1961037"/>
+                </a:lnTo>
+                <a:lnTo>
+                  <a:pt x="3642681" y="1982352"/>
+                </a:lnTo>
+                <a:lnTo>
+                  <a:pt x="3681850" y="2003668"/>
+                </a:lnTo>
+                <a:lnTo>
+                  <a:pt x="3721018" y="2024984"/>
+                </a:lnTo>
+                <a:lnTo>
+                  <a:pt x="3760187" y="2046299"/>
+                </a:lnTo>
+                <a:lnTo>
+                  <a:pt x="3799355" y="2067615"/>
+                </a:lnTo>
+                <a:lnTo>
+                  <a:pt x="3838524" y="2088930"/>
+                </a:lnTo>
+                <a:lnTo>
+                  <a:pt x="3877693" y="2110246"/>
+                </a:lnTo>
+                <a:lnTo>
+                  <a:pt x="3916861" y="2131562"/>
+                </a:lnTo>
+                <a:lnTo>
+                  <a:pt x="3956030" y="2152877"/>
+                </a:lnTo>
+                <a:lnTo>
+                  <a:pt x="3995199" y="2174193"/>
+                </a:lnTo>
+                <a:lnTo>
+                  <a:pt x="4034367" y="2195509"/>
+                </a:lnTo>
+                <a:lnTo>
+                  <a:pt x="4073536" y="2216824"/>
+                </a:lnTo>
+                <a:lnTo>
+                  <a:pt x="4112704" y="2238140"/>
+                </a:lnTo>
+                <a:lnTo>
+                  <a:pt x="4151873" y="2259455"/>
+                </a:lnTo>
+                <a:lnTo>
+                  <a:pt x="4191042" y="2280771"/>
+                </a:lnTo>
+                <a:lnTo>
+                  <a:pt x="4230210" y="2302087"/>
+                </a:lnTo>
+                <a:lnTo>
+                  <a:pt x="4269379" y="2323402"/>
+                </a:lnTo>
+                <a:lnTo>
+                  <a:pt x="4308547" y="2344718"/>
+                </a:lnTo>
+                <a:lnTo>
+                  <a:pt x="4347716" y="2366033"/>
+                </a:lnTo>
+                <a:lnTo>
+                  <a:pt x="4386885" y="2387349"/>
+                </a:lnTo>
+                <a:lnTo>
+                  <a:pt x="4426053" y="2408665"/>
+                </a:lnTo>
+                <a:lnTo>
+                  <a:pt x="4465222" y="2429980"/>
+                </a:lnTo>
+                <a:lnTo>
+                  <a:pt x="4504391" y="2451296"/>
+                </a:lnTo>
+                <a:lnTo>
+                  <a:pt x="4543559" y="2472611"/>
+                </a:lnTo>
+                <a:lnTo>
+                  <a:pt x="4582728" y="2493927"/>
+                </a:lnTo>
+                <a:lnTo>
+                  <a:pt x="4621896" y="2515243"/>
+                </a:lnTo>
+                <a:lnTo>
+                  <a:pt x="4661065" y="2536558"/>
+                </a:lnTo>
+                <a:lnTo>
+                  <a:pt x="4700234" y="2557874"/>
+                </a:lnTo>
+                <a:lnTo>
+                  <a:pt x="4739402" y="2579190"/>
+                </a:lnTo>
+                <a:lnTo>
+                  <a:pt x="4758987" y="2589847"/>
+                </a:lnTo>
+              </a:path>
+            </a:pathLst>
+          </a:custGeom>
+          <a:noFill/>
+          <a:ln w="22860">
             <a:solidFill>
               <a:srgbClr val="F2B880"/>
             </a:solidFill>
@@ -5755,17 +4842,56 @@
           </a:ln>
           <a:effectLst/>
         </p:spPr>
-      </p:cxnSp>
-      <p:sp>
-        <p:nvSpPr>
-          <p:cNvPr id="58" name="C1-E14 text 56" descr="sci-ppt:o056"/>
+        <p:txBody>
+          <a:bodyPr rtlCol="0" anchor="ctr"/>
+          <a:lstStyle/>
+          <a:p>
+            <a:pPr algn="ctr"/>
+          </a:p>
+        </p:txBody>
+      </p:sp>
+      <p:sp>
+        <p:nvSpPr>
+          <p:cNvPr id="37" name="C1-E14 ellipse 35" descr="sci-ppt:o035"/>
+          <p:cNvSpPr/>
+          <p:nvPr/>
+        </p:nvSpPr>
+        <p:spPr>
+          <a:xfrm>
+            <a:off x="5747939" y="3379785"/>
+            <a:ext cx="146304" cy="146304"/>
+          </a:xfrm>
+          <a:prstGeom prst="ellipse">
+            <a:avLst/>
+          </a:prstGeom>
+          <a:solidFill>
+            <a:srgbClr val="F2B880"/>
+          </a:solidFill>
+          <a:ln w="12700">
+            <a:solidFill>
+              <a:srgbClr val="F2B880"/>
+            </a:solidFill>
+          </a:ln>
+          <a:effectLst/>
+        </p:spPr>
+        <p:txBody>
+          <a:bodyPr rtlCol="0" anchor="ctr"/>
+          <a:lstStyle/>
+          <a:p>
+            <a:pPr algn="ctr"/>
+          </a:p>
+        </p:txBody>
+      </p:sp>
+      <p:sp>
+        <p:nvSpPr>
+          <p:cNvPr id="38" name="C1-E14 text 36" descr="sci-ppt:o036"/>
           <p:cNvSpPr txBox="1"/>
           <p:nvPr/>
         </p:nvSpPr>
         <p:spPr>
           <a:xfrm>
-            <a:off x="7434072" y="4645152"/>
-            <a:ext cx="2926080" cy="231648"/>
+            <a:off x="3489371" y="3452999"/>
+            <a:ext cx="2194560" cy="231648"/>
           </a:xfrm>
           <a:prstGeom prst="rect">
             <a:avLst/>
@@ -5787,25 +4913,137 @@
             <a:r>
               <a:rPr sz="1200" b="0" i="0">
                 <a:solidFill>
-                  <a:srgbClr val="8EDBD4"/>
+                  <a:srgbClr val="F2B880"/>
                 </a:solidFill>
                 <a:latin typeface="Arial"/>
               </a:rPr>
-              <a:t>R³y = 1 − x³: simple, slope ∝ −R²</a:t>
-            </a:r>
-          </a:p>
-        </p:txBody>
-      </p:sp>
-      <p:sp>
-        <p:nvSpPr>
-          <p:cNvPr id="59" name="C1-E14 round_rect 57" descr="sci-ppt:o057"/>
+              <a:t>21.6 m/s at R = Rₘₐₓ/2</a:t>
+            </a:r>
+          </a:p>
+        </p:txBody>
+      </p:sp>
+      <p:sp>
+        <p:nvSpPr>
+          <p:cNvPr id="39" name="C1-E14 ellipse 37" descr="sci-ppt:o037"/>
           <p:cNvSpPr/>
           <p:nvPr/>
         </p:nvSpPr>
         <p:spPr>
           <a:xfrm>
-            <a:off x="365760" y="914400"/>
-            <a:ext cx="5852160" cy="4937760"/>
+            <a:off x="3340313" y="2033588"/>
+            <a:ext cx="146304" cy="146304"/>
+          </a:xfrm>
+          <a:prstGeom prst="ellipse">
+            <a:avLst/>
+          </a:prstGeom>
+          <a:solidFill>
+            <a:srgbClr val="F28BA0"/>
+          </a:solidFill>
+          <a:ln w="12700">
+            <a:solidFill>
+              <a:srgbClr val="F28BA0"/>
+            </a:solidFill>
+          </a:ln>
+          <a:effectLst/>
+        </p:spPr>
+        <p:txBody>
+          <a:bodyPr rtlCol="0" anchor="ctr"/>
+          <a:lstStyle/>
+          <a:p>
+            <a:pPr algn="ctr"/>
+          </a:p>
+        </p:txBody>
+      </p:sp>
+      <p:sp>
+        <p:nvSpPr>
+          <p:cNvPr id="40" name="C1-E14 text 38" descr="sci-ppt:o038"/>
+          <p:cNvSpPr txBox="1"/>
+          <p:nvPr/>
+        </p:nvSpPr>
+        <p:spPr>
+          <a:xfrm>
+            <a:off x="3550625" y="2015447"/>
+            <a:ext cx="2377440" cy="231648"/>
+          </a:xfrm>
+          <a:prstGeom prst="rect">
+            <a:avLst/>
+          </a:prstGeom>
+          <a:noFill/>
+          <a:effectLst/>
+        </p:spPr>
+        <p:txBody>
+          <a:bodyPr wrap="none" lIns="18288" rIns="18288" tIns="18288" bIns="18288" anchor="t">
+            <a:spAutoFit/>
+          </a:bodyPr>
+          <a:lstStyle/>
+          <a:p>
+            <a:pPr algn="l">
+              <a:spcAft>
+                <a:spcPts val="0"/>
+              </a:spcAft>
+            </a:pPr>
+            <a:r>
+              <a:rPr sz="1200" b="0" i="0">
+                <a:solidFill>
+                  <a:srgbClr val="F28BA0"/>
+                </a:solidFill>
+                <a:latin typeface="Arial"/>
+              </a:rPr>
+              <a:t>258 m/s at R = Rₘₐₓ/10</a:t>
+            </a:r>
+          </a:p>
+        </p:txBody>
+      </p:sp>
+      <p:sp>
+        <p:nvSpPr>
+          <p:cNvPr id="41" name="C1-E14 text 39" descr="sci-ppt:o039"/>
+          <p:cNvSpPr txBox="1"/>
+          <p:nvPr/>
+        </p:nvSpPr>
+        <p:spPr>
+          <a:xfrm>
+            <a:off x="1221570" y="3779520"/>
+            <a:ext cx="3108960" cy="223900"/>
+          </a:xfrm>
+          <a:prstGeom prst="rect">
+            <a:avLst/>
+          </a:prstGeom>
+          <a:noFill/>
+          <a:effectLst/>
+        </p:spPr>
+        <p:txBody>
+          <a:bodyPr wrap="none" lIns="18288" rIns="18288" tIns="18288" bIns="18288" anchor="t">
+            <a:spAutoFit/>
+          </a:bodyPr>
+          <a:lstStyle/>
+          <a:p>
+            <a:pPr algn="l">
+              <a:spcAft>
+                <a:spcPts val="0"/>
+              </a:spcAft>
+            </a:pPr>
+            <a:r>
+              <a:rPr sz="1150" b="0" i="0">
+                <a:solidFill>
+                  <a:srgbClr val="F2B880"/>
+                </a:solidFill>
+                <a:latin typeface="Arial"/>
+              </a:rPr>
+              <a:t>dashed: ∝ R^(−3/2) as R → 0</a:t>
+            </a:r>
+          </a:p>
+        </p:txBody>
+      </p:sp>
+      <p:sp>
+        <p:nvSpPr>
+          <p:cNvPr id="42" name="C1-E14 round_rect 40" descr="sci-ppt:o040"/>
+          <p:cNvSpPr/>
+          <p:nvPr/>
+        </p:nvSpPr>
+        <p:spPr>
+          <a:xfrm>
+            <a:off x="7223760" y="1371600"/>
+            <a:ext cx="4617720" cy="3749039"/>
           </a:xfrm>
           <a:prstGeom prst="roundRect">
             <a:avLst/>
@@ -5830,14 +5068,14 @@
       </p:sp>
       <p:sp>
         <p:nvSpPr>
-          <p:cNvPr id="60" name="C1-E14 text 58" descr="sci-ppt:o058"/>
+          <p:cNvPr id="43" name="C1-E14 text 41" descr="sci-ppt:o041"/>
           <p:cNvSpPr txBox="1"/>
           <p:nvPr/>
         </p:nvSpPr>
         <p:spPr>
           <a:xfrm>
-            <a:off x="475488" y="969264"/>
-            <a:ext cx="5632704" cy="254889"/>
+            <a:off x="7333488" y="1426464"/>
+            <a:ext cx="4398264" cy="254889"/>
           </a:xfrm>
           <a:prstGeom prst="rect">
             <a:avLst/>
@@ -5863,21 +5101,21 @@
                 </a:solidFill>
                 <a:latin typeface="Arial"/>
               </a:rPr>
-              <a:t>Why the radius replaces time</a:t>
-            </a:r>
-          </a:p>
-        </p:txBody>
-      </p:sp>
-      <p:sp>
-        <p:nvSpPr>
-          <p:cNvPr id="61" name="C1-E14 text 59" descr="sci-ppt:o059"/>
+              <a:t>Reading the solution</a:t>
+            </a:r>
+          </a:p>
+        </p:txBody>
+      </p:sp>
+      <p:sp>
+        <p:nvSpPr>
+          <p:cNvPr id="44" name="C1-E14 text 42" descr="sci-ppt:o042"/>
           <p:cNvSpPr txBox="1"/>
           <p:nvPr/>
         </p:nvSpPr>
         <p:spPr>
           <a:xfrm>
-            <a:off x="548640" y="1417320"/>
-            <a:ext cx="5394960" cy="247142"/>
+            <a:off x="7360920" y="1828800"/>
+            <a:ext cx="4389120" cy="247142"/>
           </a:xfrm>
           <a:prstGeom prst="rect">
             <a:avLst/>
@@ -5899,25 +5137,25 @@
             <a:r>
               <a:rPr sz="1300" b="1" i="0">
                 <a:solidFill>
-                  <a:srgbClr val="F2B880"/>
+                  <a:srgbClr val="E7F0F3"/>
                 </a:solidFill>
                 <a:latin typeface="Arial"/>
               </a:rPr>
-              <a:t>1  y(R) = Ṙ²,  Ṙ ≠ 0</a:t>
-            </a:r>
-          </a:p>
-        </p:txBody>
-      </p:sp>
-      <p:sp>
-        <p:nvSpPr>
-          <p:cNvPr id="62" name="C1-E14 text 60" descr="sci-ppt:o060"/>
+              <a:t>Ṙ = −√{ (2Δp_c/3ρ) [ (Rₘₐₓ/R)³ − 1 ] }</a:t>
+            </a:r>
+          </a:p>
+        </p:txBody>
+      </p:sp>
+      <p:sp>
+        <p:nvSpPr>
+          <p:cNvPr id="45" name="C1-E14 text 43" descr="sci-ppt:o043"/>
           <p:cNvSpPr txBox="1"/>
           <p:nvPr/>
         </p:nvSpPr>
         <p:spPr>
           <a:xfrm>
-            <a:off x="777240" y="1728216"/>
-            <a:ext cx="5212080" cy="247142"/>
+            <a:off x="7562088" y="2514600"/>
+            <a:ext cx="4187952" cy="433070"/>
           </a:xfrm>
           <a:prstGeom prst="rect">
             <a:avLst/>
@@ -5937,27 +5175,75 @@
               </a:spcAft>
             </a:pPr>
             <a:r>
-              <a:rPr sz="1300" b="0" i="0">
+              <a:rPr sz="1250" b="0" i="0">
                 <a:solidFill>
                   <a:srgbClr val="E7F0F3"/>
                 </a:solidFill>
                 <a:latin typeface="Arial"/>
               </a:rPr>
-              <a:t>dy/dR = 2R̈</a:t>
-            </a:r>
-          </a:p>
-        </p:txBody>
-      </p:sp>
-      <p:sp>
-        <p:nvSpPr>
-          <p:cNvPr id="63" name="C1-E14 text 61" descr="sci-ppt:o061"/>
+              <a:t>The start R = Rₘₐₓ at rest fixes the constant: Ṙ</a:t>
+            </a:r>
+          </a:p>
+          <a:p>
+            <a:pPr algn="l">
+              <a:spcAft>
+                <a:spcPts val="0"/>
+              </a:spcAft>
+            </a:pPr>
+            <a:r>
+              <a:rPr sz="1250" b="0" i="0">
+                <a:solidFill>
+                  <a:srgbClr val="E7F0F3"/>
+                </a:solidFill>
+                <a:latin typeface="Arial"/>
+              </a:rPr>
+              <a:t>= 0 there.</a:t>
+            </a:r>
+          </a:p>
+        </p:txBody>
+      </p:sp>
+      <p:sp>
+        <p:nvSpPr>
+          <p:cNvPr id="46" name="C1-E14 ellipse 44" descr="sci-ppt:o044"/>
+          <p:cNvSpPr/>
+          <p:nvPr/>
+        </p:nvSpPr>
+        <p:spPr>
+          <a:xfrm>
+            <a:off x="7392924" y="2571877"/>
+            <a:ext cx="82296" cy="82296"/>
+          </a:xfrm>
+          <a:prstGeom prst="ellipse">
+            <a:avLst/>
+          </a:prstGeom>
+          <a:solidFill>
+            <a:srgbClr val="8EDBD4"/>
+          </a:solidFill>
+          <a:ln w="12700">
+            <a:solidFill>
+              <a:srgbClr val="8EDBD4"/>
+            </a:solidFill>
+          </a:ln>
+          <a:effectLst/>
+        </p:spPr>
+        <p:txBody>
+          <a:bodyPr rtlCol="0" anchor="ctr"/>
+          <a:lstStyle/>
+          <a:p>
+            <a:pPr algn="ctr"/>
+          </a:p>
+        </p:txBody>
+      </p:sp>
+      <p:sp>
+        <p:nvSpPr>
+          <p:cNvPr id="47" name="C1-E14 text 45" descr="sci-ppt:o045"/>
           <p:cNvSpPr txBox="1"/>
           <p:nvPr/>
         </p:nvSpPr>
         <p:spPr>
           <a:xfrm>
-            <a:off x="548640" y="2249678"/>
-            <a:ext cx="5394960" cy="247142"/>
+            <a:off x="7562088" y="2993389"/>
+            <a:ext cx="4187952" cy="433070"/>
           </a:xfrm>
           <a:prstGeom prst="rect">
             <a:avLst/>
@@ -5977,27 +5263,75 @@
               </a:spcAft>
             </a:pPr>
             <a:r>
-              <a:rPr sz="1300" b="1" i="0">
+              <a:rPr sz="1250" b="0" i="0">
                 <a:solidFill>
-                  <a:srgbClr val="F2B880"/>
+                  <a:srgbClr val="E7F0F3"/>
                 </a:solidFill>
                 <a:latin typeface="Arial"/>
               </a:rPr>
-              <a:t>2  Rewrite R R̈ + (3/2)Ṙ² = −Δp_c/ρ</a:t>
-            </a:r>
-          </a:p>
-        </p:txBody>
-      </p:sp>
-      <p:sp>
-        <p:nvSpPr>
-          <p:cNvPr id="64" name="C1-E14 text 62" descr="sci-ppt:o062"/>
+              <a:t>The minus sign selects the inward branch</a:t>
+            </a:r>
+          </a:p>
+          <a:p>
+            <a:pPr algn="l">
+              <a:spcAft>
+                <a:spcPts val="0"/>
+              </a:spcAft>
+            </a:pPr>
+            <a:r>
+              <a:rPr sz="1250" b="0" i="0">
+                <a:solidFill>
+                  <a:srgbClr val="E7F0F3"/>
+                </a:solidFill>
+                <a:latin typeface="Arial"/>
+              </a:rPr>
+              <a:t>(collapse).</a:t>
+            </a:r>
+          </a:p>
+        </p:txBody>
+      </p:sp>
+      <p:sp>
+        <p:nvSpPr>
+          <p:cNvPr id="48" name="C1-E14 ellipse 46" descr="sci-ppt:o046"/>
+          <p:cNvSpPr/>
+          <p:nvPr/>
+        </p:nvSpPr>
+        <p:spPr>
+          <a:xfrm>
+            <a:off x="7392924" y="3050666"/>
+            <a:ext cx="82296" cy="82296"/>
+          </a:xfrm>
+          <a:prstGeom prst="ellipse">
+            <a:avLst/>
+          </a:prstGeom>
+          <a:solidFill>
+            <a:srgbClr val="8EDBD4"/>
+          </a:solidFill>
+          <a:ln w="12700">
+            <a:solidFill>
+              <a:srgbClr val="8EDBD4"/>
+            </a:solidFill>
+          </a:ln>
+          <a:effectLst/>
+        </p:spPr>
+        <p:txBody>
+          <a:bodyPr rtlCol="0" anchor="ctr"/>
+          <a:lstStyle/>
+          <a:p>
+            <a:pPr algn="ctr"/>
+          </a:p>
+        </p:txBody>
+      </p:sp>
+      <p:sp>
+        <p:nvSpPr>
+          <p:cNvPr id="49" name="C1-E14 text 47" descr="sci-ppt:o047"/>
           <p:cNvSpPr txBox="1"/>
           <p:nvPr/>
         </p:nvSpPr>
         <p:spPr>
           <a:xfrm>
-            <a:off x="777240" y="2560574"/>
-            <a:ext cx="5212080" cy="247142"/>
+            <a:off x="7562088" y="3472179"/>
+            <a:ext cx="4187952" cy="433070"/>
           </a:xfrm>
           <a:prstGeom prst="rect">
             <a:avLst/>
@@ -6017,27 +5351,75 @@
               </a:spcAft>
             </a:pPr>
             <a:r>
-              <a:rPr sz="1300" b="0" i="0">
+              <a:rPr sz="1250" b="0" i="0">
                 <a:solidFill>
                   <a:srgbClr val="E7F0F3"/>
                 </a:solidFill>
                 <a:latin typeface="Arial"/>
               </a:rPr>
-              <a:t>y′ + 3y/R = −2Δp_c/(ρR)</a:t>
-            </a:r>
-          </a:p>
-        </p:txBody>
-      </p:sp>
-      <p:sp>
-        <p:nvSpPr>
-          <p:cNvPr id="65" name="C1-E14 text 63" descr="sci-ppt:o063"/>
+              <a:t>As R → 0, |Ṙ| grows without bound: this is the</a:t>
+            </a:r>
+          </a:p>
+          <a:p>
+            <a:pPr algn="l">
+              <a:spcAft>
+                <a:spcPts val="0"/>
+              </a:spcAft>
+            </a:pPr>
+            <a:r>
+              <a:rPr sz="1250" b="0" i="0">
+                <a:solidFill>
+                  <a:srgbClr val="E7F0F3"/>
+                </a:solidFill>
+                <a:latin typeface="Arial"/>
+              </a:rPr>
+              <a:t>model's singularity, not a physical speed limit.</a:t>
+            </a:r>
+          </a:p>
+        </p:txBody>
+      </p:sp>
+      <p:sp>
+        <p:nvSpPr>
+          <p:cNvPr id="50" name="C1-E14 ellipse 48" descr="sci-ppt:o048"/>
+          <p:cNvSpPr/>
+          <p:nvPr/>
+        </p:nvSpPr>
+        <p:spPr>
+          <a:xfrm>
+            <a:off x="7392924" y="3529456"/>
+            <a:ext cx="82296" cy="82296"/>
+          </a:xfrm>
+          <a:prstGeom prst="ellipse">
+            <a:avLst/>
+          </a:prstGeom>
+          <a:solidFill>
+            <a:srgbClr val="8EDBD4"/>
+          </a:solidFill>
+          <a:ln w="12700">
+            <a:solidFill>
+              <a:srgbClr val="8EDBD4"/>
+            </a:solidFill>
+          </a:ln>
+          <a:effectLst/>
+        </p:spPr>
+        <p:txBody>
+          <a:bodyPr rtlCol="0" anchor="ctr"/>
+          <a:lstStyle/>
+          <a:p>
+            <a:pPr algn="ctr"/>
+          </a:p>
+        </p:txBody>
+      </p:sp>
+      <p:sp>
+        <p:nvSpPr>
+          <p:cNvPr id="51" name="C1-E14 text 49" descr="sci-ppt:o049"/>
           <p:cNvSpPr txBox="1"/>
           <p:nvPr/>
         </p:nvSpPr>
         <p:spPr>
           <a:xfrm>
-            <a:off x="548640" y="3082036"/>
-            <a:ext cx="5394960" cy="247142"/>
+            <a:off x="7562088" y="3950969"/>
+            <a:ext cx="4187952" cy="433070"/>
           </a:xfrm>
           <a:prstGeom prst="rect">
             <a:avLst/>
@@ -6057,39 +5439,15 @@
               </a:spcAft>
             </a:pPr>
             <a:r>
-              <a:rPr sz="1300" b="1" i="0">
+              <a:rPr sz="1250" b="0" i="0">
                 <a:solidFill>
-                  <a:srgbClr val="F2B880"/>
+                  <a:srgbClr val="E7F0F3"/>
                 </a:solidFill>
                 <a:latin typeface="Arial"/>
               </a:rPr>
-              <a:t>3  Multiply by the integrating factor R³</a:t>
-            </a:r>
-          </a:p>
-        </p:txBody>
-      </p:sp>
-      <p:sp>
-        <p:nvSpPr>
-          <p:cNvPr id="66" name="C1-E14 text 64" descr="sci-ppt:o064"/>
-          <p:cNvSpPr txBox="1"/>
-          <p:nvPr/>
-        </p:nvSpPr>
-        <p:spPr>
-          <a:xfrm>
-            <a:off x="777240" y="3392931"/>
-            <a:ext cx="5212080" cy="247142"/>
-          </a:xfrm>
-          <a:prstGeom prst="rect">
-            <a:avLst/>
-          </a:prstGeom>
-          <a:noFill/>
-          <a:effectLst/>
-        </p:spPr>
-        <p:txBody>
-          <a:bodyPr wrap="none" lIns="18288" rIns="18288" tIns="18288" bIns="18288" anchor="t">
-            <a:spAutoFit/>
-          </a:bodyPr>
-          <a:lstStyle/>
+              <a:t>Real collapse is stopped by gas, viscosity,</a:t>
+            </a:r>
+          </a:p>
           <a:p>
             <a:pPr algn="l">
               <a:spcAft>
@@ -6097,107 +5455,59 @@
               </a:spcAft>
             </a:pPr>
             <a:r>
-              <a:rPr sz="1300" b="0" i="0">
+              <a:rPr sz="1250" b="0" i="0">
                 <a:solidFill>
                   <a:srgbClr val="E7F0F3"/>
                 </a:solidFill>
                 <a:latin typeface="Arial"/>
               </a:rPr>
-              <a:t>d(R³y)/dR = R³y′ + 3R²y = −(2Δp_c/ρ) R²</a:t>
-            </a:r>
-          </a:p>
-        </p:txBody>
-      </p:sp>
-      <p:sp>
-        <p:nvSpPr>
-          <p:cNvPr id="67" name="C1-E14 text 65" descr="sci-ppt:o065"/>
+              <a:t>tension and compressibility long before.</a:t>
+            </a:r>
+          </a:p>
+        </p:txBody>
+      </p:sp>
+      <p:sp>
+        <p:nvSpPr>
+          <p:cNvPr id="52" name="C1-E14 ellipse 50" descr="sci-ppt:o050"/>
+          <p:cNvSpPr/>
+          <p:nvPr/>
+        </p:nvSpPr>
+        <p:spPr>
+          <a:xfrm>
+            <a:off x="7392924" y="4008247"/>
+            <a:ext cx="82296" cy="82296"/>
+          </a:xfrm>
+          <a:prstGeom prst="ellipse">
+            <a:avLst/>
+          </a:prstGeom>
+          <a:solidFill>
+            <a:srgbClr val="8EDBD4"/>
+          </a:solidFill>
+          <a:ln w="12700">
+            <a:solidFill>
+              <a:srgbClr val="8EDBD4"/>
+            </a:solidFill>
+          </a:ln>
+          <a:effectLst/>
+        </p:spPr>
+        <p:txBody>
+          <a:bodyPr rtlCol="0" anchor="ctr"/>
+          <a:lstStyle/>
+          <a:p>
+            <a:pPr algn="ctr"/>
+          </a:p>
+        </p:txBody>
+      </p:sp>
+      <p:sp>
+        <p:nvSpPr>
+          <p:cNvPr id="53" name="C1-E14 text 51" descr="sci-ppt:o051"/>
           <p:cNvSpPr txBox="1"/>
           <p:nvPr/>
         </p:nvSpPr>
         <p:spPr>
           <a:xfrm>
-            <a:off x="548640" y="3914393"/>
-            <a:ext cx="5394960" cy="247142"/>
-          </a:xfrm>
-          <a:prstGeom prst="rect">
-            <a:avLst/>
-          </a:prstGeom>
-          <a:noFill/>
-          <a:effectLst/>
-        </p:spPr>
-        <p:txBody>
-          <a:bodyPr wrap="none" lIns="18288" rIns="18288" tIns="18288" bIns="18288" anchor="t">
-            <a:spAutoFit/>
-          </a:bodyPr>
-          <a:lstStyle/>
-          <a:p>
-            <a:pPr algn="l">
-              <a:spcAft>
-                <a:spcPts val="0"/>
-              </a:spcAft>
-            </a:pPr>
-            <a:r>
-              <a:rPr sz="1300" b="1" i="0">
-                <a:solidFill>
-                  <a:srgbClr val="F2B880"/>
-                </a:solidFill>
-                <a:latin typeface="Arial"/>
-              </a:rPr>
-              <a:t>4  Integrate from Rₘₐₓ (y = 0)</a:t>
-            </a:r>
-          </a:p>
-        </p:txBody>
-      </p:sp>
-      <p:sp>
-        <p:nvSpPr>
-          <p:cNvPr id="68" name="C1-E14 text 66" descr="sci-ppt:o066"/>
-          <p:cNvSpPr txBox="1"/>
-          <p:nvPr/>
-        </p:nvSpPr>
-        <p:spPr>
-          <a:xfrm>
-            <a:off x="777240" y="4225289"/>
-            <a:ext cx="5212080" cy="247142"/>
-          </a:xfrm>
-          <a:prstGeom prst="rect">
-            <a:avLst/>
-          </a:prstGeom>
-          <a:noFill/>
-          <a:effectLst/>
-        </p:spPr>
-        <p:txBody>
-          <a:bodyPr wrap="none" lIns="18288" rIns="18288" tIns="18288" bIns="18288" anchor="t">
-            <a:spAutoFit/>
-          </a:bodyPr>
-          <a:lstStyle/>
-          <a:p>
-            <a:pPr algn="l">
-              <a:spcAft>
-                <a:spcPts val="0"/>
-              </a:spcAft>
-            </a:pPr>
-            <a:r>
-              <a:rPr sz="1300" b="0" i="0">
-                <a:solidFill>
-                  <a:srgbClr val="E7F0F3"/>
-                </a:solidFill>
-                <a:latin typeface="Arial"/>
-              </a:rPr>
-              <a:t>R³y = (2Δp_c/3ρ)(Rₘₐₓ³ − R³)</a:t>
-            </a:r>
-          </a:p>
-        </p:txBody>
-      </p:sp>
-      <p:sp>
-        <p:nvSpPr>
-          <p:cNvPr id="69" name="C1-E14 text 67" descr="sci-ppt:o067"/>
-          <p:cNvSpPr txBox="1"/>
-          <p:nvPr/>
-        </p:nvSpPr>
-        <p:spPr>
-          <a:xfrm>
-            <a:off x="548640" y="4792471"/>
-            <a:ext cx="5394960" cy="433070"/>
+            <a:off x="1005840" y="5733288"/>
+            <a:ext cx="10972800" cy="239395"/>
           </a:xfrm>
           <a:prstGeom prst="rect">
             <a:avLst/>
@@ -6223,30 +5533,14 @@
                 </a:solidFill>
                 <a:latin typeface="Arial"/>
               </a:rPr>
-              <a:t>On the monotonic inward branch R is a valid independent</a:t>
-            </a:r>
-          </a:p>
-          <a:p>
-            <a:pPr algn="l">
-              <a:spcAft>
-                <a:spcPts val="0"/>
-              </a:spcAft>
-            </a:pPr>
-            <a:r>
-              <a:rPr sz="1250" b="0" i="0">
-                <a:solidFill>
-                  <a:srgbClr val="B4C7D2"/>
-                </a:solidFill>
-                <a:latin typeface="Arial"/>
-              </a:rPr>
-              <a:t>variable. The factor R³ makes the left side an exact derivative.</a:t>
-            </a:r>
-          </a:p>
-        </p:txBody>
-      </p:sp>
-      <p:sp>
-        <p:nvSpPr>
-          <p:cNvPr id="70" name="C1-E14 text 68" descr="sci-ppt:o068"/>
+              <a:t>Teaching inputs: Rₘₐₓ = 30 µm, ρ = 1000 kg/m³, Δp_c = 100 kPa.</a:t>
+            </a:r>
+          </a:p>
+        </p:txBody>
+      </p:sp>
+      <p:sp>
+        <p:nvSpPr>
+          <p:cNvPr id="54" name="C1-E14 text 52" descr="sci-ppt:o052"/>
           <p:cNvSpPr txBox="1"/>
           <p:nvPr/>
         </p:nvSpPr>
@@ -6279,7 +5573,7 @@
                 </a:solidFill>
                 <a:latin typeface="Arial"/>
               </a:rPr>
-              <a:t>Curves are y = Ṙ² and R³y from Eqs. C1-E14 and C1-E15 (scaled as labelled).</a:t>
+              <a:t>Wall speed from Eq. C1-E14 (log–log axes).</a:t>
             </a:r>
           </a:p>
         </p:txBody>
